--- a/Presentation1.pptx
+++ b/Presentation1.pptx
@@ -5,19 +5,17 @@
     <p:sldMasterId id="2147483648" r:id="rId1"/>
   </p:sldMasterIdLst>
   <p:sldIdLst>
-    <p:sldId id="269" r:id="rId2"/>
-    <p:sldId id="257" r:id="rId3"/>
-    <p:sldId id="258" r:id="rId4"/>
-    <p:sldId id="259" r:id="rId5"/>
-    <p:sldId id="260" r:id="rId6"/>
-    <p:sldId id="261" r:id="rId7"/>
-    <p:sldId id="264" r:id="rId8"/>
-    <p:sldId id="262" r:id="rId9"/>
-    <p:sldId id="263" r:id="rId10"/>
-    <p:sldId id="265" r:id="rId11"/>
-    <p:sldId id="266" r:id="rId12"/>
-    <p:sldId id="267" r:id="rId13"/>
-    <p:sldId id="268" r:id="rId14"/>
+    <p:sldId id="258" r:id="rId2"/>
+    <p:sldId id="259" r:id="rId3"/>
+    <p:sldId id="260" r:id="rId4"/>
+    <p:sldId id="261" r:id="rId5"/>
+    <p:sldId id="264" r:id="rId6"/>
+    <p:sldId id="262" r:id="rId7"/>
+    <p:sldId id="263" r:id="rId8"/>
+    <p:sldId id="265" r:id="rId9"/>
+    <p:sldId id="266" r:id="rId10"/>
+    <p:sldId id="267" r:id="rId11"/>
+    <p:sldId id="268" r:id="rId12"/>
   </p:sldIdLst>
   <p:sldSz cx="12192000" cy="6858000"/>
   <p:notesSz cx="6858000" cy="9144000"/>
@@ -3359,10 +3357,205 @@
           <a:chExt cx="0" cy="0"/>
         </a:xfrm>
       </p:grpSpPr>
+      <p:grpSp>
+        <p:nvGrpSpPr>
+          <p:cNvPr id="7" name="Group 6">
+            <a:extLst>
+              <a:ext uri="{FF2B5EF4-FFF2-40B4-BE49-F238E27FC236}">
+                <a16:creationId xmlns:a16="http://schemas.microsoft.com/office/drawing/2014/main" id="{651E1C8A-412C-1888-A270-E2AB26081734}"/>
+              </a:ext>
+            </a:extLst>
+          </p:cNvPr>
+          <p:cNvGrpSpPr/>
+          <p:nvPr/>
+        </p:nvGrpSpPr>
+        <p:grpSpPr>
+          <a:xfrm>
+            <a:off x="556696" y="0"/>
+            <a:ext cx="11062315" cy="6858000"/>
+            <a:chOff x="556696" y="0"/>
+            <a:chExt cx="11062315" cy="6858000"/>
+          </a:xfrm>
+        </p:grpSpPr>
+        <p:pic>
+          <p:nvPicPr>
+            <p:cNvPr id="5" name="Picture 4">
+              <a:extLst>
+                <a:ext uri="{FF2B5EF4-FFF2-40B4-BE49-F238E27FC236}">
+                  <a16:creationId xmlns:a16="http://schemas.microsoft.com/office/drawing/2014/main" id="{C7CA17EA-66DF-C264-5B69-20BE4A0B40E2}"/>
+                </a:ext>
+              </a:extLst>
+            </p:cNvPr>
+            <p:cNvPicPr>
+              <a:picLocks noChangeAspect="1"/>
+            </p:cNvPicPr>
+            <p:nvPr/>
+          </p:nvPicPr>
+          <p:blipFill>
+            <a:blip r:embed="rId2"/>
+            <a:stretch>
+              <a:fillRect/>
+            </a:stretch>
+          </p:blipFill>
+          <p:spPr>
+            <a:xfrm>
+              <a:off x="572988" y="0"/>
+              <a:ext cx="11046023" cy="6858000"/>
+            </a:xfrm>
+            <a:prstGeom prst="rect">
+              <a:avLst/>
+            </a:prstGeom>
+          </p:spPr>
+        </p:pic>
+        <p:sp>
+          <p:nvSpPr>
+            <p:cNvPr id="2" name="TextBox 1">
+              <a:extLst>
+                <a:ext uri="{FF2B5EF4-FFF2-40B4-BE49-F238E27FC236}">
+                  <a16:creationId xmlns:a16="http://schemas.microsoft.com/office/drawing/2014/main" id="{308F1285-5198-B011-B84D-971B989D1D92}"/>
+                </a:ext>
+              </a:extLst>
+            </p:cNvPr>
+            <p:cNvSpPr txBox="1"/>
+            <p:nvPr/>
+          </p:nvSpPr>
+          <p:spPr>
+            <a:xfrm>
+              <a:off x="556696" y="333494"/>
+              <a:ext cx="375920" cy="369332"/>
+            </a:xfrm>
+            <a:prstGeom prst="rect">
+              <a:avLst/>
+            </a:prstGeom>
+            <a:noFill/>
+          </p:spPr>
+          <p:txBody>
+            <a:bodyPr wrap="square" rtlCol="0">
+              <a:spAutoFit/>
+            </a:bodyPr>
+            <a:lstStyle/>
+            <a:p>
+              <a:r>
+                <a:rPr lang="en-US" dirty="0"/>
+                <a:t>a)</a:t>
+              </a:r>
+              <a:endParaRPr lang="nl-NL" dirty="0"/>
+            </a:p>
+          </p:txBody>
+        </p:sp>
+        <p:sp>
+          <p:nvSpPr>
+            <p:cNvPr id="3" name="TextBox 2">
+              <a:extLst>
+                <a:ext uri="{FF2B5EF4-FFF2-40B4-BE49-F238E27FC236}">
+                  <a16:creationId xmlns:a16="http://schemas.microsoft.com/office/drawing/2014/main" id="{BF2A7C26-A1E4-E685-ADA1-2234637E7CE6}"/>
+                </a:ext>
+              </a:extLst>
+            </p:cNvPr>
+            <p:cNvSpPr txBox="1"/>
+            <p:nvPr/>
+          </p:nvSpPr>
+          <p:spPr>
+            <a:xfrm>
+              <a:off x="5588782" y="303014"/>
+              <a:ext cx="433531" cy="369332"/>
+            </a:xfrm>
+            <a:prstGeom prst="rect">
+              <a:avLst/>
+            </a:prstGeom>
+            <a:noFill/>
+          </p:spPr>
+          <p:txBody>
+            <a:bodyPr wrap="square" rtlCol="0">
+              <a:spAutoFit/>
+            </a:bodyPr>
+            <a:lstStyle/>
+            <a:p>
+              <a:r>
+                <a:rPr lang="en-US" dirty="0"/>
+                <a:t>b)</a:t>
+              </a:r>
+              <a:endParaRPr lang="nl-NL" dirty="0"/>
+            </a:p>
+          </p:txBody>
+        </p:sp>
+        <p:sp>
+          <p:nvSpPr>
+            <p:cNvPr id="4" name="TextBox 3">
+              <a:extLst>
+                <a:ext uri="{FF2B5EF4-FFF2-40B4-BE49-F238E27FC236}">
+                  <a16:creationId xmlns:a16="http://schemas.microsoft.com/office/drawing/2014/main" id="{F9425B4F-D379-0EBA-4209-493EB1D68684}"/>
+                </a:ext>
+              </a:extLst>
+            </p:cNvPr>
+            <p:cNvSpPr txBox="1"/>
+            <p:nvPr/>
+          </p:nvSpPr>
+          <p:spPr>
+            <a:xfrm>
+              <a:off x="671186" y="3534604"/>
+              <a:ext cx="375920" cy="369332"/>
+            </a:xfrm>
+            <a:prstGeom prst="rect">
+              <a:avLst/>
+            </a:prstGeom>
+            <a:noFill/>
+          </p:spPr>
+          <p:txBody>
+            <a:bodyPr wrap="square" rtlCol="0">
+              <a:spAutoFit/>
+            </a:bodyPr>
+            <a:lstStyle/>
+            <a:p>
+              <a:r>
+                <a:rPr lang="en-US" dirty="0"/>
+                <a:t>c)</a:t>
+              </a:r>
+              <a:endParaRPr lang="nl-NL" dirty="0"/>
+            </a:p>
+          </p:txBody>
+        </p:sp>
+        <p:sp>
+          <p:nvSpPr>
+            <p:cNvPr id="6" name="TextBox 5">
+              <a:extLst>
+                <a:ext uri="{FF2B5EF4-FFF2-40B4-BE49-F238E27FC236}">
+                  <a16:creationId xmlns:a16="http://schemas.microsoft.com/office/drawing/2014/main" id="{8150A24F-1B76-6A5D-E0ED-557CDE604044}"/>
+                </a:ext>
+              </a:extLst>
+            </p:cNvPr>
+            <p:cNvSpPr txBox="1"/>
+            <p:nvPr/>
+          </p:nvSpPr>
+          <p:spPr>
+            <a:xfrm>
+              <a:off x="6022313" y="3508849"/>
+              <a:ext cx="433531" cy="369332"/>
+            </a:xfrm>
+            <a:prstGeom prst="rect">
+              <a:avLst/>
+            </a:prstGeom>
+            <a:noFill/>
+          </p:spPr>
+          <p:txBody>
+            <a:bodyPr wrap="square" rtlCol="0">
+              <a:spAutoFit/>
+            </a:bodyPr>
+            <a:lstStyle/>
+            <a:p>
+              <a:r>
+                <a:rPr lang="en-US" dirty="0"/>
+                <a:t>d)</a:t>
+              </a:r>
+              <a:endParaRPr lang="nl-NL" dirty="0"/>
+            </a:p>
+          </p:txBody>
+        </p:sp>
+      </p:grpSp>
     </p:spTree>
     <p:extLst>
       <p:ext uri="{BB962C8B-B14F-4D97-AF65-F5344CB8AC3E}">
-        <p14:creationId xmlns:p14="http://schemas.microsoft.com/office/powerpoint/2010/main" val="1535339866"/>
+        <p14:creationId xmlns:p14="http://schemas.microsoft.com/office/powerpoint/2010/main" val="1787045235"/>
       </p:ext>
     </p:extLst>
   </p:cSld>
@@ -3389,68 +3582,365 @@
           <a:chExt cx="0" cy="0"/>
         </a:xfrm>
       </p:grpSpPr>
-      <p:pic>
-        <p:nvPicPr>
-          <p:cNvPr id="3" name="Picture 2">
-            <a:extLst>
-              <a:ext uri="{FF2B5EF4-FFF2-40B4-BE49-F238E27FC236}">
-                <a16:creationId xmlns:a16="http://schemas.microsoft.com/office/drawing/2014/main" id="{98824164-2DEF-E45F-0CC2-1580082C75E3}"/>
-              </a:ext>
-            </a:extLst>
-          </p:cNvPr>
-          <p:cNvPicPr>
-            <a:picLocks noChangeAspect="1"/>
-          </p:cNvPicPr>
+      <p:grpSp>
+        <p:nvGrpSpPr>
+          <p:cNvPr id="12" name="Group 11">
+            <a:extLst>
+              <a:ext uri="{FF2B5EF4-FFF2-40B4-BE49-F238E27FC236}">
+                <a16:creationId xmlns:a16="http://schemas.microsoft.com/office/drawing/2014/main" id="{867F05DB-E656-97B9-B424-72D0F1DEC4B1}"/>
+              </a:ext>
+            </a:extLst>
+          </p:cNvPr>
+          <p:cNvGrpSpPr/>
           <p:nvPr/>
-        </p:nvPicPr>
-        <p:blipFill>
-          <a:blip r:embed="rId2"/>
-          <a:srcRect r="9895"/>
-          <a:stretch/>
-        </p:blipFill>
-        <p:spPr>
+        </p:nvGrpSpPr>
+        <p:grpSpPr>
           <a:xfrm>
-            <a:off x="134239" y="0"/>
-            <a:ext cx="10249281" cy="6858000"/>
+            <a:off x="456147" y="0"/>
+            <a:ext cx="11613933" cy="6858000"/>
+            <a:chOff x="456147" y="0"/>
+            <a:chExt cx="11613933" cy="6858000"/>
           </a:xfrm>
-          <a:prstGeom prst="rect">
-            <a:avLst/>
-          </a:prstGeom>
-        </p:spPr>
-      </p:pic>
-      <p:pic>
-        <p:nvPicPr>
-          <p:cNvPr id="2" name="Picture 1">
-            <a:extLst>
-              <a:ext uri="{FF2B5EF4-FFF2-40B4-BE49-F238E27FC236}">
-                <a16:creationId xmlns:a16="http://schemas.microsoft.com/office/drawing/2014/main" id="{1EB2DD14-4F7A-29FC-13F3-C4C4B9AD41D9}"/>
-              </a:ext>
-            </a:extLst>
-          </p:cNvPr>
-          <p:cNvPicPr>
-            <a:picLocks noChangeAspect="1"/>
-          </p:cNvPicPr>
-          <p:nvPr/>
-        </p:nvPicPr>
-        <p:blipFill>
-          <a:blip r:embed="rId2"/>
-          <a:srcRect l="90462" t="43851" b="42815"/>
-          <a:stretch/>
-        </p:blipFill>
-        <p:spPr>
-          <a:xfrm>
-            <a:off x="5011040" y="3230880"/>
-            <a:ext cx="1084960" cy="914400"/>
-          </a:xfrm>
-          <a:prstGeom prst="rect">
-            <a:avLst/>
-          </a:prstGeom>
-        </p:spPr>
-      </p:pic>
+        </p:grpSpPr>
+        <p:pic>
+          <p:nvPicPr>
+            <p:cNvPr id="3" name="Picture 2">
+              <a:extLst>
+                <a:ext uri="{FF2B5EF4-FFF2-40B4-BE49-F238E27FC236}">
+                  <a16:creationId xmlns:a16="http://schemas.microsoft.com/office/drawing/2014/main" id="{EB28AEDC-D2FB-7F8A-0E44-3C0856005BD1}"/>
+                </a:ext>
+              </a:extLst>
+            </p:cNvPr>
+            <p:cNvPicPr>
+              <a:picLocks noChangeAspect="1"/>
+            </p:cNvPicPr>
+            <p:nvPr/>
+          </p:nvPicPr>
+          <p:blipFill>
+            <a:blip r:embed="rId2"/>
+            <a:srcRect r="10632"/>
+            <a:stretch/>
+          </p:blipFill>
+          <p:spPr>
+            <a:xfrm>
+              <a:off x="698569" y="0"/>
+              <a:ext cx="8049191" cy="6858000"/>
+            </a:xfrm>
+            <a:prstGeom prst="rect">
+              <a:avLst/>
+            </a:prstGeom>
+          </p:spPr>
+        </p:pic>
+        <p:pic>
+          <p:nvPicPr>
+            <p:cNvPr id="4" name="Picture 3">
+              <a:extLst>
+                <a:ext uri="{FF2B5EF4-FFF2-40B4-BE49-F238E27FC236}">
+                  <a16:creationId xmlns:a16="http://schemas.microsoft.com/office/drawing/2014/main" id="{7CED0798-9331-5574-08A5-E32A52E52CEC}"/>
+                </a:ext>
+              </a:extLst>
+            </p:cNvPr>
+            <p:cNvPicPr>
+              <a:picLocks noChangeAspect="1"/>
+            </p:cNvPicPr>
+            <p:nvPr/>
+          </p:nvPicPr>
+          <p:blipFill>
+            <a:blip r:embed="rId2"/>
+            <a:srcRect l="89369" t="45185" b="45185"/>
+            <a:stretch/>
+          </p:blipFill>
+          <p:spPr>
+            <a:xfrm>
+              <a:off x="4622800" y="3429000"/>
+              <a:ext cx="957511" cy="660400"/>
+            </a:xfrm>
+            <a:prstGeom prst="rect">
+              <a:avLst/>
+            </a:prstGeom>
+          </p:spPr>
+        </p:pic>
+        <p:pic>
+          <p:nvPicPr>
+            <p:cNvPr id="8" name="Picture 7">
+              <a:extLst>
+                <a:ext uri="{FF2B5EF4-FFF2-40B4-BE49-F238E27FC236}">
+                  <a16:creationId xmlns:a16="http://schemas.microsoft.com/office/drawing/2014/main" id="{76336C71-6DD9-7C75-9083-C986FD6EA44E}"/>
+                </a:ext>
+              </a:extLst>
+            </p:cNvPr>
+            <p:cNvPicPr>
+              <a:picLocks noChangeAspect="1"/>
+            </p:cNvPicPr>
+            <p:nvPr/>
+          </p:nvPicPr>
+          <p:blipFill>
+            <a:blip r:embed="rId3"/>
+            <a:stretch>
+              <a:fillRect/>
+            </a:stretch>
+          </p:blipFill>
+          <p:spPr>
+            <a:xfrm>
+              <a:off x="8628772" y="1107440"/>
+              <a:ext cx="3441308" cy="2052954"/>
+            </a:xfrm>
+            <a:prstGeom prst="rect">
+              <a:avLst/>
+            </a:prstGeom>
+          </p:spPr>
+        </p:pic>
+        <p:pic>
+          <p:nvPicPr>
+            <p:cNvPr id="10" name="Picture 9">
+              <a:extLst>
+                <a:ext uri="{FF2B5EF4-FFF2-40B4-BE49-F238E27FC236}">
+                  <a16:creationId xmlns:a16="http://schemas.microsoft.com/office/drawing/2014/main" id="{0D923E87-D662-9549-EF1E-BFE3DD5DA1A6}"/>
+                </a:ext>
+              </a:extLst>
+            </p:cNvPr>
+            <p:cNvPicPr>
+              <a:picLocks noChangeAspect="1"/>
+            </p:cNvPicPr>
+            <p:nvPr/>
+          </p:nvPicPr>
+          <p:blipFill>
+            <a:blip r:embed="rId4"/>
+            <a:stretch>
+              <a:fillRect/>
+            </a:stretch>
+          </p:blipFill>
+          <p:spPr>
+            <a:xfrm>
+              <a:off x="8371840" y="3843433"/>
+              <a:ext cx="3698240" cy="2293845"/>
+            </a:xfrm>
+            <a:prstGeom prst="rect">
+              <a:avLst/>
+            </a:prstGeom>
+          </p:spPr>
+        </p:pic>
+        <p:sp>
+          <p:nvSpPr>
+            <p:cNvPr id="2" name="TextBox 1">
+              <a:extLst>
+                <a:ext uri="{FF2B5EF4-FFF2-40B4-BE49-F238E27FC236}">
+                  <a16:creationId xmlns:a16="http://schemas.microsoft.com/office/drawing/2014/main" id="{97300BE8-C277-30D2-AD27-A61FEB0A31D5}"/>
+                </a:ext>
+              </a:extLst>
+            </p:cNvPr>
+            <p:cNvSpPr txBox="1"/>
+            <p:nvPr/>
+          </p:nvSpPr>
+          <p:spPr>
+            <a:xfrm>
+              <a:off x="456147" y="437445"/>
+              <a:ext cx="375920" cy="369332"/>
+            </a:xfrm>
+            <a:prstGeom prst="rect">
+              <a:avLst/>
+            </a:prstGeom>
+            <a:noFill/>
+          </p:spPr>
+          <p:txBody>
+            <a:bodyPr wrap="square" rtlCol="0">
+              <a:spAutoFit/>
+            </a:bodyPr>
+            <a:lstStyle/>
+            <a:p>
+              <a:r>
+                <a:rPr lang="en-US" dirty="0"/>
+                <a:t>a)</a:t>
+              </a:r>
+              <a:endParaRPr lang="nl-NL" dirty="0"/>
+            </a:p>
+          </p:txBody>
+        </p:sp>
+        <p:sp>
+          <p:nvSpPr>
+            <p:cNvPr id="5" name="TextBox 4">
+              <a:extLst>
+                <a:ext uri="{FF2B5EF4-FFF2-40B4-BE49-F238E27FC236}">
+                  <a16:creationId xmlns:a16="http://schemas.microsoft.com/office/drawing/2014/main" id="{C21F04F1-FCAB-1DF3-72DF-BDE0DD981A0B}"/>
+                </a:ext>
+              </a:extLst>
+            </p:cNvPr>
+            <p:cNvSpPr txBox="1"/>
+            <p:nvPr/>
+          </p:nvSpPr>
+          <p:spPr>
+            <a:xfrm>
+              <a:off x="5588782" y="437445"/>
+              <a:ext cx="433531" cy="369332"/>
+            </a:xfrm>
+            <a:prstGeom prst="rect">
+              <a:avLst/>
+            </a:prstGeom>
+            <a:noFill/>
+          </p:spPr>
+          <p:txBody>
+            <a:bodyPr wrap="square" rtlCol="0">
+              <a:spAutoFit/>
+            </a:bodyPr>
+            <a:lstStyle/>
+            <a:p>
+              <a:r>
+                <a:rPr lang="en-US" dirty="0"/>
+                <a:t>b)</a:t>
+              </a:r>
+              <a:endParaRPr lang="nl-NL" dirty="0"/>
+            </a:p>
+          </p:txBody>
+        </p:sp>
+        <p:sp>
+          <p:nvSpPr>
+            <p:cNvPr id="6" name="TextBox 5">
+              <a:extLst>
+                <a:ext uri="{FF2B5EF4-FFF2-40B4-BE49-F238E27FC236}">
+                  <a16:creationId xmlns:a16="http://schemas.microsoft.com/office/drawing/2014/main" id="{588CBF49-FAAB-F03F-C20F-C0FBEA4215B6}"/>
+                </a:ext>
+              </a:extLst>
+            </p:cNvPr>
+            <p:cNvSpPr txBox="1"/>
+            <p:nvPr/>
+          </p:nvSpPr>
+          <p:spPr>
+            <a:xfrm>
+              <a:off x="456147" y="3478934"/>
+              <a:ext cx="375920" cy="369332"/>
+            </a:xfrm>
+            <a:prstGeom prst="rect">
+              <a:avLst/>
+            </a:prstGeom>
+            <a:noFill/>
+          </p:spPr>
+          <p:txBody>
+            <a:bodyPr wrap="square" rtlCol="0">
+              <a:spAutoFit/>
+            </a:bodyPr>
+            <a:lstStyle/>
+            <a:p>
+              <a:r>
+                <a:rPr lang="en-US" dirty="0"/>
+                <a:t>c)</a:t>
+              </a:r>
+              <a:endParaRPr lang="nl-NL" dirty="0"/>
+            </a:p>
+          </p:txBody>
+        </p:sp>
+        <p:sp>
+          <p:nvSpPr>
+            <p:cNvPr id="7" name="TextBox 6">
+              <a:extLst>
+                <a:ext uri="{FF2B5EF4-FFF2-40B4-BE49-F238E27FC236}">
+                  <a16:creationId xmlns:a16="http://schemas.microsoft.com/office/drawing/2014/main" id="{69C2E6F9-CEC6-F6ED-8A07-24164E20E338}"/>
+                </a:ext>
+              </a:extLst>
+            </p:cNvPr>
+            <p:cNvSpPr txBox="1"/>
+            <p:nvPr/>
+          </p:nvSpPr>
+          <p:spPr>
+            <a:xfrm>
+              <a:off x="6022313" y="3508849"/>
+              <a:ext cx="433531" cy="369332"/>
+            </a:xfrm>
+            <a:prstGeom prst="rect">
+              <a:avLst/>
+            </a:prstGeom>
+            <a:noFill/>
+          </p:spPr>
+          <p:txBody>
+            <a:bodyPr wrap="square" rtlCol="0">
+              <a:spAutoFit/>
+            </a:bodyPr>
+            <a:lstStyle/>
+            <a:p>
+              <a:r>
+                <a:rPr lang="en-US" dirty="0"/>
+                <a:t>d)</a:t>
+              </a:r>
+              <a:endParaRPr lang="nl-NL" dirty="0"/>
+            </a:p>
+          </p:txBody>
+        </p:sp>
+        <p:sp>
+          <p:nvSpPr>
+            <p:cNvPr id="9" name="TextBox 8">
+              <a:extLst>
+                <a:ext uri="{FF2B5EF4-FFF2-40B4-BE49-F238E27FC236}">
+                  <a16:creationId xmlns:a16="http://schemas.microsoft.com/office/drawing/2014/main" id="{14F3540B-CA55-4223-7288-F0B0DD44C8E4}"/>
+                </a:ext>
+              </a:extLst>
+            </p:cNvPr>
+            <p:cNvSpPr txBox="1"/>
+            <p:nvPr/>
+          </p:nvSpPr>
+          <p:spPr>
+            <a:xfrm>
+              <a:off x="10089662" y="589845"/>
+              <a:ext cx="433531" cy="369332"/>
+            </a:xfrm>
+            <a:prstGeom prst="rect">
+              <a:avLst/>
+            </a:prstGeom>
+            <a:noFill/>
+          </p:spPr>
+          <p:txBody>
+            <a:bodyPr wrap="square" rtlCol="0">
+              <a:spAutoFit/>
+            </a:bodyPr>
+            <a:lstStyle/>
+            <a:p>
+              <a:r>
+                <a:rPr lang="en-US" dirty="0"/>
+                <a:t>e)</a:t>
+              </a:r>
+              <a:endParaRPr lang="nl-NL" dirty="0"/>
+            </a:p>
+          </p:txBody>
+        </p:sp>
+        <p:sp>
+          <p:nvSpPr>
+            <p:cNvPr id="11" name="TextBox 10">
+              <a:extLst>
+                <a:ext uri="{FF2B5EF4-FFF2-40B4-BE49-F238E27FC236}">
+                  <a16:creationId xmlns:a16="http://schemas.microsoft.com/office/drawing/2014/main" id="{4CED2DE2-BA6A-CC55-3C71-436A3C67B70C}"/>
+                </a:ext>
+              </a:extLst>
+            </p:cNvPr>
+            <p:cNvSpPr txBox="1"/>
+            <p:nvPr/>
+          </p:nvSpPr>
+          <p:spPr>
+            <a:xfrm>
+              <a:off x="10303022" y="3475285"/>
+              <a:ext cx="433531" cy="369332"/>
+            </a:xfrm>
+            <a:prstGeom prst="rect">
+              <a:avLst/>
+            </a:prstGeom>
+            <a:noFill/>
+          </p:spPr>
+          <p:txBody>
+            <a:bodyPr wrap="square" rtlCol="0">
+              <a:spAutoFit/>
+            </a:bodyPr>
+            <a:lstStyle/>
+            <a:p>
+              <a:r>
+                <a:rPr lang="en-US" dirty="0"/>
+                <a:t>f)</a:t>
+              </a:r>
+              <a:endParaRPr lang="nl-NL" dirty="0"/>
+            </a:p>
+          </p:txBody>
+        </p:sp>
+      </p:grpSp>
     </p:spTree>
     <p:extLst>
       <p:ext uri="{BB962C8B-B14F-4D97-AF65-F5344CB8AC3E}">
-        <p14:creationId xmlns:p14="http://schemas.microsoft.com/office/powerpoint/2010/main" val="1338863895"/>
+        <p14:creationId xmlns:p14="http://schemas.microsoft.com/office/powerpoint/2010/main" val="506965682"/>
       </p:ext>
     </p:extLst>
   </p:cSld>
@@ -3477,304 +3967,201 @@
           <a:chExt cx="0" cy="0"/>
         </a:xfrm>
       </p:grpSpPr>
-      <p:pic>
-        <p:nvPicPr>
-          <p:cNvPr id="3" name="Picture 2">
-            <a:extLst>
-              <a:ext uri="{FF2B5EF4-FFF2-40B4-BE49-F238E27FC236}">
-                <a16:creationId xmlns:a16="http://schemas.microsoft.com/office/drawing/2014/main" id="{37BD88A7-A799-7EE7-4588-88F94B32C308}"/>
-              </a:ext>
-            </a:extLst>
-          </p:cNvPr>
-          <p:cNvPicPr>
-            <a:picLocks noChangeAspect="1"/>
-          </p:cNvPicPr>
+      <p:grpSp>
+        <p:nvGrpSpPr>
+          <p:cNvPr id="8" name="Group 7">
+            <a:extLst>
+              <a:ext uri="{FF2B5EF4-FFF2-40B4-BE49-F238E27FC236}">
+                <a16:creationId xmlns:a16="http://schemas.microsoft.com/office/drawing/2014/main" id="{7B56A21D-FD35-B51F-1CFC-A51CAC7966D3}"/>
+              </a:ext>
+            </a:extLst>
+          </p:cNvPr>
+          <p:cNvGrpSpPr/>
           <p:nvPr/>
-        </p:nvPicPr>
-        <p:blipFill>
-          <a:blip r:embed="rId2"/>
-          <a:stretch>
-            <a:fillRect/>
-          </a:stretch>
-        </p:blipFill>
-        <p:spPr>
-          <a:xfrm>
-            <a:off x="217487" y="141605"/>
-            <a:ext cx="5726113" cy="3415982"/>
-          </a:xfrm>
-          <a:prstGeom prst="rect">
-            <a:avLst/>
-          </a:prstGeom>
-        </p:spPr>
-      </p:pic>
-      <p:pic>
-        <p:nvPicPr>
-          <p:cNvPr id="5" name="Picture 4">
-            <a:extLst>
-              <a:ext uri="{FF2B5EF4-FFF2-40B4-BE49-F238E27FC236}">
-                <a16:creationId xmlns:a16="http://schemas.microsoft.com/office/drawing/2014/main" id="{06C69711-057C-65D2-7B24-CEE9AEEE9D26}"/>
-              </a:ext>
-            </a:extLst>
-          </p:cNvPr>
-          <p:cNvPicPr>
-            <a:picLocks noChangeAspect="1"/>
-          </p:cNvPicPr>
-          <p:nvPr/>
-        </p:nvPicPr>
-        <p:blipFill>
-          <a:blip r:embed="rId3"/>
-          <a:stretch>
-            <a:fillRect/>
-          </a:stretch>
-        </p:blipFill>
-        <p:spPr>
-          <a:xfrm>
-            <a:off x="5943600" y="141604"/>
-            <a:ext cx="5726114" cy="3415983"/>
-          </a:xfrm>
-          <a:prstGeom prst="rect">
-            <a:avLst/>
-          </a:prstGeom>
-        </p:spPr>
-      </p:pic>
-      <p:pic>
-        <p:nvPicPr>
-          <p:cNvPr id="4" name="Picture 3">
-            <a:extLst>
-              <a:ext uri="{FF2B5EF4-FFF2-40B4-BE49-F238E27FC236}">
-                <a16:creationId xmlns:a16="http://schemas.microsoft.com/office/drawing/2014/main" id="{7C12F1BC-0514-5B9D-F7A7-D369759644A7}"/>
-              </a:ext>
-            </a:extLst>
-          </p:cNvPr>
-          <p:cNvPicPr>
-            <a:picLocks noChangeAspect="1"/>
-          </p:cNvPicPr>
-          <p:nvPr/>
-        </p:nvPicPr>
-        <p:blipFill>
-          <a:blip r:embed="rId4"/>
-          <a:stretch>
-            <a:fillRect/>
-          </a:stretch>
-        </p:blipFill>
-        <p:spPr>
-          <a:xfrm>
-            <a:off x="833260" y="3872547"/>
-            <a:ext cx="4494566" cy="2681288"/>
-          </a:xfrm>
-          <a:prstGeom prst="rect">
-            <a:avLst/>
-          </a:prstGeom>
-        </p:spPr>
-      </p:pic>
-    </p:spTree>
-    <p:extLst>
-      <p:ext uri="{BB962C8B-B14F-4D97-AF65-F5344CB8AC3E}">
-        <p14:creationId xmlns:p14="http://schemas.microsoft.com/office/powerpoint/2010/main" val="730969210"/>
-      </p:ext>
-    </p:extLst>
-  </p:cSld>
-  <p:clrMapOvr>
-    <a:masterClrMapping/>
-  </p:clrMapOvr>
-</p:sld>
-</file>
-
-<file path=ppt/slides/slide12.xml><?xml version="1.0" encoding="utf-8"?>
-<p:sld xmlns:a="http://schemas.openxmlformats.org/drawingml/2006/main" xmlns:r="http://schemas.openxmlformats.org/officeDocument/2006/relationships" xmlns:p="http://schemas.openxmlformats.org/presentationml/2006/main">
-  <p:cSld>
-    <p:spTree>
-      <p:nvGrpSpPr>
-        <p:cNvPr id="1" name=""/>
-        <p:cNvGrpSpPr/>
-        <p:nvPr/>
-      </p:nvGrpSpPr>
-      <p:grpSpPr>
-        <a:xfrm>
-          <a:off x="0" y="0"/>
-          <a:ext cx="0" cy="0"/>
-          <a:chOff x="0" y="0"/>
-          <a:chExt cx="0" cy="0"/>
-        </a:xfrm>
-      </p:grpSpPr>
-      <p:pic>
-        <p:nvPicPr>
-          <p:cNvPr id="3" name="Picture 2">
-            <a:extLst>
-              <a:ext uri="{FF2B5EF4-FFF2-40B4-BE49-F238E27FC236}">
-                <a16:creationId xmlns:a16="http://schemas.microsoft.com/office/drawing/2014/main" id="{EB28AEDC-D2FB-7F8A-0E44-3C0856005BD1}"/>
-              </a:ext>
-            </a:extLst>
-          </p:cNvPr>
-          <p:cNvPicPr>
-            <a:picLocks noChangeAspect="1"/>
-          </p:cNvPicPr>
-          <p:nvPr/>
-        </p:nvPicPr>
-        <p:blipFill>
-          <a:blip r:embed="rId2"/>
-          <a:srcRect r="10632"/>
-          <a:stretch/>
-        </p:blipFill>
-        <p:spPr>
-          <a:xfrm>
-            <a:off x="698569" y="0"/>
-            <a:ext cx="8049191" cy="6858000"/>
-          </a:xfrm>
-          <a:prstGeom prst="rect">
-            <a:avLst/>
-          </a:prstGeom>
-        </p:spPr>
-      </p:pic>
-      <p:pic>
-        <p:nvPicPr>
-          <p:cNvPr id="4" name="Picture 3">
-            <a:extLst>
-              <a:ext uri="{FF2B5EF4-FFF2-40B4-BE49-F238E27FC236}">
-                <a16:creationId xmlns:a16="http://schemas.microsoft.com/office/drawing/2014/main" id="{7CED0798-9331-5574-08A5-E32A52E52CEC}"/>
-              </a:ext>
-            </a:extLst>
-          </p:cNvPr>
-          <p:cNvPicPr>
-            <a:picLocks noChangeAspect="1"/>
-          </p:cNvPicPr>
-          <p:nvPr/>
-        </p:nvPicPr>
-        <p:blipFill>
-          <a:blip r:embed="rId2"/>
-          <a:srcRect l="89369" t="45185" b="45185"/>
-          <a:stretch/>
-        </p:blipFill>
-        <p:spPr>
-          <a:xfrm>
-            <a:off x="4622800" y="3429000"/>
-            <a:ext cx="957511" cy="660400"/>
-          </a:xfrm>
-          <a:prstGeom prst="rect">
-            <a:avLst/>
-          </a:prstGeom>
-        </p:spPr>
-      </p:pic>
-      <p:pic>
-        <p:nvPicPr>
-          <p:cNvPr id="8" name="Picture 7">
-            <a:extLst>
-              <a:ext uri="{FF2B5EF4-FFF2-40B4-BE49-F238E27FC236}">
-                <a16:creationId xmlns:a16="http://schemas.microsoft.com/office/drawing/2014/main" id="{76336C71-6DD9-7C75-9083-C986FD6EA44E}"/>
-              </a:ext>
-            </a:extLst>
-          </p:cNvPr>
-          <p:cNvPicPr>
-            <a:picLocks noChangeAspect="1"/>
-          </p:cNvPicPr>
-          <p:nvPr/>
-        </p:nvPicPr>
-        <p:blipFill>
-          <a:blip r:embed="rId3"/>
-          <a:stretch>
-            <a:fillRect/>
-          </a:stretch>
-        </p:blipFill>
-        <p:spPr>
-          <a:xfrm>
-            <a:off x="8628772" y="1107440"/>
-            <a:ext cx="3441308" cy="2052954"/>
-          </a:xfrm>
-          <a:prstGeom prst="rect">
-            <a:avLst/>
-          </a:prstGeom>
-        </p:spPr>
-      </p:pic>
-      <p:pic>
-        <p:nvPicPr>
-          <p:cNvPr id="10" name="Picture 9">
-            <a:extLst>
-              <a:ext uri="{FF2B5EF4-FFF2-40B4-BE49-F238E27FC236}">
-                <a16:creationId xmlns:a16="http://schemas.microsoft.com/office/drawing/2014/main" id="{0D923E87-D662-9549-EF1E-BFE3DD5DA1A6}"/>
-              </a:ext>
-            </a:extLst>
-          </p:cNvPr>
-          <p:cNvPicPr>
-            <a:picLocks noChangeAspect="1"/>
-          </p:cNvPicPr>
-          <p:nvPr/>
-        </p:nvPicPr>
-        <p:blipFill>
-          <a:blip r:embed="rId4"/>
-          <a:stretch>
-            <a:fillRect/>
-          </a:stretch>
-        </p:blipFill>
-        <p:spPr>
-          <a:xfrm>
-            <a:off x="8371840" y="3843433"/>
-            <a:ext cx="3698240" cy="2293845"/>
-          </a:xfrm>
-          <a:prstGeom prst="rect">
-            <a:avLst/>
-          </a:prstGeom>
-        </p:spPr>
-      </p:pic>
-    </p:spTree>
-    <p:extLst>
-      <p:ext uri="{BB962C8B-B14F-4D97-AF65-F5344CB8AC3E}">
-        <p14:creationId xmlns:p14="http://schemas.microsoft.com/office/powerpoint/2010/main" val="506965682"/>
-      </p:ext>
-    </p:extLst>
-  </p:cSld>
-  <p:clrMapOvr>
-    <a:masterClrMapping/>
-  </p:clrMapOvr>
-</p:sld>
-</file>
-
-<file path=ppt/slides/slide13.xml><?xml version="1.0" encoding="utf-8"?>
-<p:sld xmlns:a="http://schemas.openxmlformats.org/drawingml/2006/main" xmlns:r="http://schemas.openxmlformats.org/officeDocument/2006/relationships" xmlns:p="http://schemas.openxmlformats.org/presentationml/2006/main">
-  <p:cSld>
-    <p:spTree>
-      <p:nvGrpSpPr>
-        <p:cNvPr id="1" name=""/>
-        <p:cNvGrpSpPr/>
-        <p:nvPr/>
-      </p:nvGrpSpPr>
-      <p:grpSpPr>
-        <a:xfrm>
-          <a:off x="0" y="0"/>
-          <a:ext cx="0" cy="0"/>
-          <a:chOff x="0" y="0"/>
-          <a:chExt cx="0" cy="0"/>
-        </a:xfrm>
-      </p:grpSpPr>
-      <p:pic>
-        <p:nvPicPr>
-          <p:cNvPr id="3" name="Picture 2">
-            <a:extLst>
-              <a:ext uri="{FF2B5EF4-FFF2-40B4-BE49-F238E27FC236}">
-                <a16:creationId xmlns:a16="http://schemas.microsoft.com/office/drawing/2014/main" id="{EE47228F-844F-4241-AA9A-D5DA98CE8DA1}"/>
-              </a:ext>
-            </a:extLst>
-          </p:cNvPr>
-          <p:cNvPicPr>
-            <a:picLocks noChangeAspect="1"/>
-          </p:cNvPicPr>
-          <p:nvPr/>
-        </p:nvPicPr>
-        <p:blipFill>
-          <a:blip r:embed="rId2"/>
-          <a:stretch>
-            <a:fillRect/>
-          </a:stretch>
-        </p:blipFill>
-        <p:spPr>
+        </p:nvGrpSpPr>
+        <p:grpSpPr>
           <a:xfrm>
             <a:off x="1394242" y="0"/>
             <a:ext cx="9403516" cy="6858000"/>
+            <a:chOff x="1394242" y="0"/>
+            <a:chExt cx="9403516" cy="6858000"/>
           </a:xfrm>
-          <a:prstGeom prst="rect">
-            <a:avLst/>
-          </a:prstGeom>
-        </p:spPr>
-      </p:pic>
+        </p:grpSpPr>
+        <p:pic>
+          <p:nvPicPr>
+            <p:cNvPr id="3" name="Picture 2">
+              <a:extLst>
+                <a:ext uri="{FF2B5EF4-FFF2-40B4-BE49-F238E27FC236}">
+                  <a16:creationId xmlns:a16="http://schemas.microsoft.com/office/drawing/2014/main" id="{EE47228F-844F-4241-AA9A-D5DA98CE8DA1}"/>
+                </a:ext>
+              </a:extLst>
+            </p:cNvPr>
+            <p:cNvPicPr>
+              <a:picLocks noChangeAspect="1"/>
+            </p:cNvPicPr>
+            <p:nvPr/>
+          </p:nvPicPr>
+          <p:blipFill>
+            <a:blip r:embed="rId2"/>
+            <a:stretch>
+              <a:fillRect/>
+            </a:stretch>
+          </p:blipFill>
+          <p:spPr>
+            <a:xfrm>
+              <a:off x="1394242" y="0"/>
+              <a:ext cx="9403516" cy="6858000"/>
+            </a:xfrm>
+            <a:prstGeom prst="rect">
+              <a:avLst/>
+            </a:prstGeom>
+          </p:spPr>
+        </p:pic>
+        <p:sp>
+          <p:nvSpPr>
+            <p:cNvPr id="4" name="TextBox 3">
+              <a:extLst>
+                <a:ext uri="{FF2B5EF4-FFF2-40B4-BE49-F238E27FC236}">
+                  <a16:creationId xmlns:a16="http://schemas.microsoft.com/office/drawing/2014/main" id="{CD46AFB5-B5E1-16EF-80C0-4AA3D168ADA0}"/>
+                </a:ext>
+              </a:extLst>
+            </p:cNvPr>
+            <p:cNvSpPr txBox="1"/>
+            <p:nvPr/>
+          </p:nvSpPr>
+          <p:spPr>
+            <a:xfrm>
+              <a:off x="1592392" y="237306"/>
+              <a:ext cx="375920" cy="369332"/>
+            </a:xfrm>
+            <a:prstGeom prst="rect">
+              <a:avLst/>
+            </a:prstGeom>
+            <a:noFill/>
+          </p:spPr>
+          <p:txBody>
+            <a:bodyPr wrap="square" rtlCol="0">
+              <a:spAutoFit/>
+            </a:bodyPr>
+            <a:lstStyle/>
+            <a:p>
+              <a:r>
+                <a:rPr lang="en-US" dirty="0"/>
+                <a:t>a)</a:t>
+              </a:r>
+              <a:endParaRPr lang="nl-NL" dirty="0"/>
+            </a:p>
+          </p:txBody>
+        </p:sp>
+        <p:sp>
+          <p:nvSpPr>
+            <p:cNvPr id="5" name="TextBox 4">
+              <a:extLst>
+                <a:ext uri="{FF2B5EF4-FFF2-40B4-BE49-F238E27FC236}">
+                  <a16:creationId xmlns:a16="http://schemas.microsoft.com/office/drawing/2014/main" id="{CEFE730F-75FD-8053-13EE-88D0EC791EB5}"/>
+                </a:ext>
+              </a:extLst>
+            </p:cNvPr>
+            <p:cNvSpPr txBox="1"/>
+            <p:nvPr/>
+          </p:nvSpPr>
+          <p:spPr>
+            <a:xfrm>
+              <a:off x="6452382" y="421972"/>
+              <a:ext cx="433531" cy="369332"/>
+            </a:xfrm>
+            <a:prstGeom prst="rect">
+              <a:avLst/>
+            </a:prstGeom>
+            <a:noFill/>
+          </p:spPr>
+          <p:txBody>
+            <a:bodyPr wrap="square" rtlCol="0">
+              <a:spAutoFit/>
+            </a:bodyPr>
+            <a:lstStyle/>
+            <a:p>
+              <a:r>
+                <a:rPr lang="en-US" dirty="0"/>
+                <a:t>b)</a:t>
+              </a:r>
+              <a:endParaRPr lang="nl-NL" dirty="0"/>
+            </a:p>
+          </p:txBody>
+        </p:sp>
+        <p:sp>
+          <p:nvSpPr>
+            <p:cNvPr id="6" name="TextBox 5">
+              <a:extLst>
+                <a:ext uri="{FF2B5EF4-FFF2-40B4-BE49-F238E27FC236}">
+                  <a16:creationId xmlns:a16="http://schemas.microsoft.com/office/drawing/2014/main" id="{5A22589B-C086-07DF-3776-4FB131F080E6}"/>
+                </a:ext>
+              </a:extLst>
+            </p:cNvPr>
+            <p:cNvSpPr txBox="1"/>
+            <p:nvPr/>
+          </p:nvSpPr>
+          <p:spPr>
+            <a:xfrm>
+              <a:off x="1404432" y="3455320"/>
+              <a:ext cx="375920" cy="369332"/>
+            </a:xfrm>
+            <a:prstGeom prst="rect">
+              <a:avLst/>
+            </a:prstGeom>
+            <a:noFill/>
+          </p:spPr>
+          <p:txBody>
+            <a:bodyPr wrap="square" rtlCol="0">
+              <a:spAutoFit/>
+            </a:bodyPr>
+            <a:lstStyle/>
+            <a:p>
+              <a:r>
+                <a:rPr lang="en-US" dirty="0"/>
+                <a:t>c)</a:t>
+              </a:r>
+              <a:endParaRPr lang="nl-NL" dirty="0"/>
+            </a:p>
+          </p:txBody>
+        </p:sp>
+        <p:sp>
+          <p:nvSpPr>
+            <p:cNvPr id="7" name="TextBox 6">
+              <a:extLst>
+                <a:ext uri="{FF2B5EF4-FFF2-40B4-BE49-F238E27FC236}">
+                  <a16:creationId xmlns:a16="http://schemas.microsoft.com/office/drawing/2014/main" id="{A147E225-D42D-F835-BCFD-9397F288119A}"/>
+                </a:ext>
+              </a:extLst>
+            </p:cNvPr>
+            <p:cNvSpPr txBox="1"/>
+            <p:nvPr/>
+          </p:nvSpPr>
+          <p:spPr>
+            <a:xfrm>
+              <a:off x="6560793" y="3455320"/>
+              <a:ext cx="433531" cy="369332"/>
+            </a:xfrm>
+            <a:prstGeom prst="rect">
+              <a:avLst/>
+            </a:prstGeom>
+            <a:noFill/>
+          </p:spPr>
+          <p:txBody>
+            <a:bodyPr wrap="square" rtlCol="0">
+              <a:spAutoFit/>
+            </a:bodyPr>
+            <a:lstStyle/>
+            <a:p>
+              <a:r>
+                <a:rPr lang="en-US" dirty="0"/>
+                <a:t>d)</a:t>
+              </a:r>
+              <a:endParaRPr lang="nl-NL" dirty="0"/>
+            </a:p>
+          </p:txBody>
+        </p:sp>
+      </p:grpSp>
     </p:spTree>
     <p:extLst>
       <p:ext uri="{BB962C8B-B14F-4D97-AF65-F5344CB8AC3E}">
@@ -3805,40 +4192,205 @@
           <a:chExt cx="0" cy="0"/>
         </a:xfrm>
       </p:grpSpPr>
-      <p:pic>
-        <p:nvPicPr>
-          <p:cNvPr id="3" name="Picture 2">
-            <a:extLst>
-              <a:ext uri="{FF2B5EF4-FFF2-40B4-BE49-F238E27FC236}">
-                <a16:creationId xmlns:a16="http://schemas.microsoft.com/office/drawing/2014/main" id="{ED9AB142-3592-BC17-3899-BB2DBFD5F77B}"/>
-              </a:ext>
-            </a:extLst>
-          </p:cNvPr>
-          <p:cNvPicPr>
-            <a:picLocks noChangeAspect="1"/>
-          </p:cNvPicPr>
+      <p:grpSp>
+        <p:nvGrpSpPr>
+          <p:cNvPr id="7" name="Group 6">
+            <a:extLst>
+              <a:ext uri="{FF2B5EF4-FFF2-40B4-BE49-F238E27FC236}">
+                <a16:creationId xmlns:a16="http://schemas.microsoft.com/office/drawing/2014/main" id="{2AFC0572-1F18-C8E5-8A9A-446B39C915C3}"/>
+              </a:ext>
+            </a:extLst>
+          </p:cNvPr>
+          <p:cNvGrpSpPr/>
           <p:nvPr/>
-        </p:nvPicPr>
-        <p:blipFill>
-          <a:blip r:embed="rId2"/>
-          <a:stretch>
-            <a:fillRect/>
-          </a:stretch>
-        </p:blipFill>
-        <p:spPr>
+        </p:nvGrpSpPr>
+        <p:grpSpPr>
           <a:xfrm>
-            <a:off x="913910" y="0"/>
-            <a:ext cx="10364180" cy="6858000"/>
+            <a:off x="200025" y="237306"/>
+            <a:ext cx="11791950" cy="6211119"/>
+            <a:chOff x="200025" y="237306"/>
+            <a:chExt cx="11791950" cy="6211119"/>
           </a:xfrm>
-          <a:prstGeom prst="rect">
-            <a:avLst/>
-          </a:prstGeom>
-        </p:spPr>
-      </p:pic>
+        </p:grpSpPr>
+        <p:pic>
+          <p:nvPicPr>
+            <p:cNvPr id="5" name="Picture 4">
+              <a:extLst>
+                <a:ext uri="{FF2B5EF4-FFF2-40B4-BE49-F238E27FC236}">
+                  <a16:creationId xmlns:a16="http://schemas.microsoft.com/office/drawing/2014/main" id="{73C35B72-1607-8968-919C-39D108BADC71}"/>
+                </a:ext>
+              </a:extLst>
+            </p:cNvPr>
+            <p:cNvPicPr>
+              <a:picLocks noChangeAspect="1"/>
+            </p:cNvPicPr>
+            <p:nvPr/>
+          </p:nvPicPr>
+          <p:blipFill>
+            <a:blip r:embed="rId2"/>
+            <a:stretch>
+              <a:fillRect/>
+            </a:stretch>
+          </p:blipFill>
+          <p:spPr>
+            <a:xfrm>
+              <a:off x="200025" y="409575"/>
+              <a:ext cx="11791950" cy="6038850"/>
+            </a:xfrm>
+            <a:prstGeom prst="rect">
+              <a:avLst/>
+            </a:prstGeom>
+          </p:spPr>
+        </p:pic>
+        <p:sp>
+          <p:nvSpPr>
+            <p:cNvPr id="2" name="TextBox 1">
+              <a:extLst>
+                <a:ext uri="{FF2B5EF4-FFF2-40B4-BE49-F238E27FC236}">
+                  <a16:creationId xmlns:a16="http://schemas.microsoft.com/office/drawing/2014/main" id="{29DA8EBD-2CE8-E098-18B6-771F5CDD8E14}"/>
+                </a:ext>
+              </a:extLst>
+            </p:cNvPr>
+            <p:cNvSpPr txBox="1"/>
+            <p:nvPr/>
+          </p:nvSpPr>
+          <p:spPr>
+            <a:xfrm>
+              <a:off x="200472" y="237306"/>
+              <a:ext cx="375920" cy="369332"/>
+            </a:xfrm>
+            <a:prstGeom prst="rect">
+              <a:avLst/>
+            </a:prstGeom>
+            <a:noFill/>
+          </p:spPr>
+          <p:txBody>
+            <a:bodyPr wrap="square" rtlCol="0">
+              <a:spAutoFit/>
+            </a:bodyPr>
+            <a:lstStyle/>
+            <a:p>
+              <a:r>
+                <a:rPr lang="en-US" dirty="0"/>
+                <a:t>a)</a:t>
+              </a:r>
+              <a:endParaRPr lang="nl-NL" dirty="0"/>
+            </a:p>
+          </p:txBody>
+        </p:sp>
+        <p:sp>
+          <p:nvSpPr>
+            <p:cNvPr id="3" name="TextBox 2">
+              <a:extLst>
+                <a:ext uri="{FF2B5EF4-FFF2-40B4-BE49-F238E27FC236}">
+                  <a16:creationId xmlns:a16="http://schemas.microsoft.com/office/drawing/2014/main" id="{E7323A9E-2F63-F3A6-2926-458D08D35441}"/>
+                </a:ext>
+              </a:extLst>
+            </p:cNvPr>
+            <p:cNvSpPr txBox="1"/>
+            <p:nvPr/>
+          </p:nvSpPr>
+          <p:spPr>
+            <a:xfrm>
+              <a:off x="5850428" y="237306"/>
+              <a:ext cx="433531" cy="369332"/>
+            </a:xfrm>
+            <a:prstGeom prst="rect">
+              <a:avLst/>
+            </a:prstGeom>
+            <a:noFill/>
+          </p:spPr>
+          <p:txBody>
+            <a:bodyPr wrap="square" rtlCol="0">
+              <a:spAutoFit/>
+            </a:bodyPr>
+            <a:lstStyle/>
+            <a:p>
+              <a:r>
+                <a:rPr lang="en-US" dirty="0"/>
+                <a:t>b)</a:t>
+              </a:r>
+              <a:endParaRPr lang="nl-NL" dirty="0"/>
+            </a:p>
+          </p:txBody>
+        </p:sp>
+        <p:sp>
+          <p:nvSpPr>
+            <p:cNvPr id="4" name="TextBox 3">
+              <a:extLst>
+                <a:ext uri="{FF2B5EF4-FFF2-40B4-BE49-F238E27FC236}">
+                  <a16:creationId xmlns:a16="http://schemas.microsoft.com/office/drawing/2014/main" id="{37E1EF98-2184-C560-CAFA-4925AE870505}"/>
+                </a:ext>
+              </a:extLst>
+            </p:cNvPr>
+            <p:cNvSpPr txBox="1"/>
+            <p:nvPr/>
+          </p:nvSpPr>
+          <p:spPr>
+            <a:xfrm>
+              <a:off x="200025" y="4044600"/>
+              <a:ext cx="375920" cy="369332"/>
+            </a:xfrm>
+            <a:prstGeom prst="rect">
+              <a:avLst/>
+            </a:prstGeom>
+            <a:noFill/>
+          </p:spPr>
+          <p:txBody>
+            <a:bodyPr wrap="square" rtlCol="0">
+              <a:spAutoFit/>
+            </a:bodyPr>
+            <a:lstStyle/>
+            <a:p>
+              <a:r>
+                <a:rPr lang="en-US" dirty="0"/>
+                <a:t>c)</a:t>
+              </a:r>
+              <a:endParaRPr lang="nl-NL" dirty="0"/>
+            </a:p>
+          </p:txBody>
+        </p:sp>
+        <p:sp>
+          <p:nvSpPr>
+            <p:cNvPr id="6" name="TextBox 5">
+              <a:extLst>
+                <a:ext uri="{FF2B5EF4-FFF2-40B4-BE49-F238E27FC236}">
+                  <a16:creationId xmlns:a16="http://schemas.microsoft.com/office/drawing/2014/main" id="{E1156A50-82B9-EA3B-428C-FF7D29A4C8B5}"/>
+                </a:ext>
+              </a:extLst>
+            </p:cNvPr>
+            <p:cNvSpPr txBox="1"/>
+            <p:nvPr/>
+          </p:nvSpPr>
+          <p:spPr>
+            <a:xfrm>
+              <a:off x="6067194" y="4044600"/>
+              <a:ext cx="433531" cy="369332"/>
+            </a:xfrm>
+            <a:prstGeom prst="rect">
+              <a:avLst/>
+            </a:prstGeom>
+            <a:noFill/>
+          </p:spPr>
+          <p:txBody>
+            <a:bodyPr wrap="square" rtlCol="0">
+              <a:spAutoFit/>
+            </a:bodyPr>
+            <a:lstStyle/>
+            <a:p>
+              <a:r>
+                <a:rPr lang="en-US" dirty="0"/>
+                <a:t>d)</a:t>
+              </a:r>
+              <a:endParaRPr lang="nl-NL" dirty="0"/>
+            </a:p>
+          </p:txBody>
+        </p:sp>
+      </p:grpSp>
     </p:spTree>
     <p:extLst>
       <p:ext uri="{BB962C8B-B14F-4D97-AF65-F5344CB8AC3E}">
-        <p14:creationId xmlns:p14="http://schemas.microsoft.com/office/powerpoint/2010/main" val="2044737450"/>
+        <p14:creationId xmlns:p14="http://schemas.microsoft.com/office/powerpoint/2010/main" val="3032026409"/>
       </p:ext>
     </p:extLst>
   </p:cSld>
@@ -3865,40 +4417,205 @@
           <a:chExt cx="0" cy="0"/>
         </a:xfrm>
       </p:grpSpPr>
-      <p:pic>
-        <p:nvPicPr>
-          <p:cNvPr id="5" name="Picture 4">
-            <a:extLst>
-              <a:ext uri="{FF2B5EF4-FFF2-40B4-BE49-F238E27FC236}">
-                <a16:creationId xmlns:a16="http://schemas.microsoft.com/office/drawing/2014/main" id="{C7CA17EA-66DF-C264-5B69-20BE4A0B40E2}"/>
-              </a:ext>
-            </a:extLst>
-          </p:cNvPr>
-          <p:cNvPicPr>
-            <a:picLocks noChangeAspect="1"/>
-          </p:cNvPicPr>
+      <p:grpSp>
+        <p:nvGrpSpPr>
+          <p:cNvPr id="7" name="Group 6">
+            <a:extLst>
+              <a:ext uri="{FF2B5EF4-FFF2-40B4-BE49-F238E27FC236}">
+                <a16:creationId xmlns:a16="http://schemas.microsoft.com/office/drawing/2014/main" id="{4268E94E-D925-7731-1AA2-B20E5EC7C14A}"/>
+              </a:ext>
+            </a:extLst>
+          </p:cNvPr>
+          <p:cNvGrpSpPr/>
           <p:nvPr/>
-        </p:nvPicPr>
-        <p:blipFill>
-          <a:blip r:embed="rId2"/>
-          <a:stretch>
-            <a:fillRect/>
-          </a:stretch>
-        </p:blipFill>
-        <p:spPr>
+        </p:nvGrpSpPr>
+        <p:grpSpPr>
           <a:xfrm>
-            <a:off x="572988" y="0"/>
-            <a:ext cx="11046023" cy="6858000"/>
+            <a:off x="1373952" y="0"/>
+            <a:ext cx="9152687" cy="6858000"/>
+            <a:chOff x="1373952" y="0"/>
+            <a:chExt cx="9152687" cy="6858000"/>
           </a:xfrm>
-          <a:prstGeom prst="rect">
-            <a:avLst/>
-          </a:prstGeom>
-        </p:spPr>
-      </p:pic>
+        </p:grpSpPr>
+        <p:pic>
+          <p:nvPicPr>
+            <p:cNvPr id="5" name="Picture 4">
+              <a:extLst>
+                <a:ext uri="{FF2B5EF4-FFF2-40B4-BE49-F238E27FC236}">
+                  <a16:creationId xmlns:a16="http://schemas.microsoft.com/office/drawing/2014/main" id="{70BF40F3-13FE-CF4B-D79A-F16290B50A64}"/>
+                </a:ext>
+              </a:extLst>
+            </p:cNvPr>
+            <p:cNvPicPr>
+              <a:picLocks noChangeAspect="1"/>
+            </p:cNvPicPr>
+            <p:nvPr/>
+          </p:nvPicPr>
+          <p:blipFill>
+            <a:blip r:embed="rId2"/>
+            <a:stretch>
+              <a:fillRect/>
+            </a:stretch>
+          </p:blipFill>
+          <p:spPr>
+            <a:xfrm>
+              <a:off x="1665360" y="0"/>
+              <a:ext cx="8861279" cy="6858000"/>
+            </a:xfrm>
+            <a:prstGeom prst="rect">
+              <a:avLst/>
+            </a:prstGeom>
+          </p:spPr>
+        </p:pic>
+        <p:sp>
+          <p:nvSpPr>
+            <p:cNvPr id="2" name="TextBox 1">
+              <a:extLst>
+                <a:ext uri="{FF2B5EF4-FFF2-40B4-BE49-F238E27FC236}">
+                  <a16:creationId xmlns:a16="http://schemas.microsoft.com/office/drawing/2014/main" id="{FE9238D6-A74D-A1B3-E7AF-8297FC577CF3}"/>
+                </a:ext>
+              </a:extLst>
+            </p:cNvPr>
+            <p:cNvSpPr txBox="1"/>
+            <p:nvPr/>
+          </p:nvSpPr>
+          <p:spPr>
+            <a:xfrm>
+              <a:off x="1477400" y="405278"/>
+              <a:ext cx="375920" cy="369332"/>
+            </a:xfrm>
+            <a:prstGeom prst="rect">
+              <a:avLst/>
+            </a:prstGeom>
+            <a:noFill/>
+          </p:spPr>
+          <p:txBody>
+            <a:bodyPr wrap="square" rtlCol="0">
+              <a:spAutoFit/>
+            </a:bodyPr>
+            <a:lstStyle/>
+            <a:p>
+              <a:r>
+                <a:rPr lang="en-US" dirty="0"/>
+                <a:t>a)</a:t>
+              </a:r>
+              <a:endParaRPr lang="nl-NL" dirty="0"/>
+            </a:p>
+          </p:txBody>
+        </p:sp>
+        <p:sp>
+          <p:nvSpPr>
+            <p:cNvPr id="3" name="TextBox 2">
+              <a:extLst>
+                <a:ext uri="{FF2B5EF4-FFF2-40B4-BE49-F238E27FC236}">
+                  <a16:creationId xmlns:a16="http://schemas.microsoft.com/office/drawing/2014/main" id="{C077A244-F58A-3AB2-9C8D-07196C877BB1}"/>
+                </a:ext>
+              </a:extLst>
+            </p:cNvPr>
+            <p:cNvSpPr txBox="1"/>
+            <p:nvPr/>
+          </p:nvSpPr>
+          <p:spPr>
+            <a:xfrm>
+              <a:off x="6095999" y="410026"/>
+              <a:ext cx="433531" cy="369332"/>
+            </a:xfrm>
+            <a:prstGeom prst="rect">
+              <a:avLst/>
+            </a:prstGeom>
+            <a:noFill/>
+          </p:spPr>
+          <p:txBody>
+            <a:bodyPr wrap="square" rtlCol="0">
+              <a:spAutoFit/>
+            </a:bodyPr>
+            <a:lstStyle/>
+            <a:p>
+              <a:r>
+                <a:rPr lang="en-US" dirty="0"/>
+                <a:t>b)</a:t>
+              </a:r>
+              <a:endParaRPr lang="nl-NL" dirty="0"/>
+            </a:p>
+          </p:txBody>
+        </p:sp>
+        <p:sp>
+          <p:nvSpPr>
+            <p:cNvPr id="4" name="TextBox 3">
+              <a:extLst>
+                <a:ext uri="{FF2B5EF4-FFF2-40B4-BE49-F238E27FC236}">
+                  <a16:creationId xmlns:a16="http://schemas.microsoft.com/office/drawing/2014/main" id="{6988A365-918C-843A-ED32-5F026E70EE2E}"/>
+                </a:ext>
+              </a:extLst>
+            </p:cNvPr>
+            <p:cNvSpPr txBox="1"/>
+            <p:nvPr/>
+          </p:nvSpPr>
+          <p:spPr>
+            <a:xfrm>
+              <a:off x="1373952" y="3717484"/>
+              <a:ext cx="375920" cy="369332"/>
+            </a:xfrm>
+            <a:prstGeom prst="rect">
+              <a:avLst/>
+            </a:prstGeom>
+            <a:noFill/>
+          </p:spPr>
+          <p:txBody>
+            <a:bodyPr wrap="square" rtlCol="0">
+              <a:spAutoFit/>
+            </a:bodyPr>
+            <a:lstStyle/>
+            <a:p>
+              <a:r>
+                <a:rPr lang="en-US" dirty="0"/>
+                <a:t>c)</a:t>
+              </a:r>
+              <a:endParaRPr lang="nl-NL" dirty="0"/>
+            </a:p>
+          </p:txBody>
+        </p:sp>
+        <p:sp>
+          <p:nvSpPr>
+            <p:cNvPr id="6" name="TextBox 5">
+              <a:extLst>
+                <a:ext uri="{FF2B5EF4-FFF2-40B4-BE49-F238E27FC236}">
+                  <a16:creationId xmlns:a16="http://schemas.microsoft.com/office/drawing/2014/main" id="{59B3D20F-EF12-AE57-1B8A-335728DBB308}"/>
+                </a:ext>
+              </a:extLst>
+            </p:cNvPr>
+            <p:cNvSpPr txBox="1"/>
+            <p:nvPr/>
+          </p:nvSpPr>
+          <p:spPr>
+            <a:xfrm>
+              <a:off x="6235673" y="3681569"/>
+              <a:ext cx="433531" cy="369332"/>
+            </a:xfrm>
+            <a:prstGeom prst="rect">
+              <a:avLst/>
+            </a:prstGeom>
+            <a:noFill/>
+          </p:spPr>
+          <p:txBody>
+            <a:bodyPr wrap="square" rtlCol="0">
+              <a:spAutoFit/>
+            </a:bodyPr>
+            <a:lstStyle/>
+            <a:p>
+              <a:r>
+                <a:rPr lang="en-US" dirty="0"/>
+                <a:t>d)</a:t>
+              </a:r>
+              <a:endParaRPr lang="nl-NL" dirty="0"/>
+            </a:p>
+          </p:txBody>
+        </p:sp>
+      </p:grpSp>
     </p:spTree>
     <p:extLst>
       <p:ext uri="{BB962C8B-B14F-4D97-AF65-F5344CB8AC3E}">
-        <p14:creationId xmlns:p14="http://schemas.microsoft.com/office/powerpoint/2010/main" val="1787045235"/>
+        <p14:creationId xmlns:p14="http://schemas.microsoft.com/office/powerpoint/2010/main" val="3156988752"/>
       </p:ext>
     </p:extLst>
   </p:cSld>
@@ -3925,40 +4642,295 @@
           <a:chExt cx="0" cy="0"/>
         </a:xfrm>
       </p:grpSpPr>
-      <p:pic>
-        <p:nvPicPr>
-          <p:cNvPr id="5" name="Picture 4">
-            <a:extLst>
-              <a:ext uri="{FF2B5EF4-FFF2-40B4-BE49-F238E27FC236}">
-                <a16:creationId xmlns:a16="http://schemas.microsoft.com/office/drawing/2014/main" id="{73C35B72-1607-8968-919C-39D108BADC71}"/>
-              </a:ext>
-            </a:extLst>
-          </p:cNvPr>
-          <p:cNvPicPr>
-            <a:picLocks noChangeAspect="1"/>
-          </p:cNvPicPr>
+      <p:grpSp>
+        <p:nvGrpSpPr>
+          <p:cNvPr id="10" name="Group 9">
+            <a:extLst>
+              <a:ext uri="{FF2B5EF4-FFF2-40B4-BE49-F238E27FC236}">
+                <a16:creationId xmlns:a16="http://schemas.microsoft.com/office/drawing/2014/main" id="{AE73A01B-2092-52A6-AE0C-7E6912583B15}"/>
+              </a:ext>
+            </a:extLst>
+          </p:cNvPr>
+          <p:cNvGrpSpPr/>
           <p:nvPr/>
-        </p:nvPicPr>
-        <p:blipFill>
-          <a:blip r:embed="rId2"/>
-          <a:stretch>
-            <a:fillRect/>
-          </a:stretch>
-        </p:blipFill>
-        <p:spPr>
+        </p:nvGrpSpPr>
+        <p:grpSpPr>
           <a:xfrm>
-            <a:off x="200025" y="409575"/>
-            <a:ext cx="11791950" cy="6038850"/>
+            <a:off x="296992" y="38198"/>
+            <a:ext cx="11090356" cy="6710299"/>
+            <a:chOff x="296992" y="38198"/>
+            <a:chExt cx="11090356" cy="6710299"/>
           </a:xfrm>
-          <a:prstGeom prst="rect">
-            <a:avLst/>
-          </a:prstGeom>
-        </p:spPr>
-      </p:pic>
+        </p:grpSpPr>
+        <p:pic>
+          <p:nvPicPr>
+            <p:cNvPr id="3" name="Picture 2">
+              <a:extLst>
+                <a:ext uri="{FF2B5EF4-FFF2-40B4-BE49-F238E27FC236}">
+                  <a16:creationId xmlns:a16="http://schemas.microsoft.com/office/drawing/2014/main" id="{39642A5A-A614-567B-255F-9FE3EE94BA15}"/>
+                </a:ext>
+              </a:extLst>
+            </p:cNvPr>
+            <p:cNvPicPr>
+              <a:picLocks noChangeAspect="1"/>
+            </p:cNvPicPr>
+            <p:nvPr/>
+          </p:nvPicPr>
+          <p:blipFill>
+            <a:blip r:embed="rId2"/>
+            <a:stretch>
+              <a:fillRect/>
+            </a:stretch>
+          </p:blipFill>
+          <p:spPr>
+            <a:xfrm>
+              <a:off x="6296690" y="3429000"/>
+              <a:ext cx="5090658" cy="3160570"/>
+            </a:xfrm>
+            <a:prstGeom prst="rect">
+              <a:avLst/>
+            </a:prstGeom>
+          </p:spPr>
+        </p:pic>
+        <p:pic>
+          <p:nvPicPr>
+            <p:cNvPr id="4" name="Picture 3">
+              <a:extLst>
+                <a:ext uri="{FF2B5EF4-FFF2-40B4-BE49-F238E27FC236}">
+                  <a16:creationId xmlns:a16="http://schemas.microsoft.com/office/drawing/2014/main" id="{3028407F-0064-E630-2E5E-BF9DEF672AAD}"/>
+                </a:ext>
+              </a:extLst>
+            </p:cNvPr>
+            <p:cNvPicPr>
+              <a:picLocks noChangeAspect="1"/>
+            </p:cNvPicPr>
+            <p:nvPr/>
+          </p:nvPicPr>
+          <p:blipFill>
+            <a:blip r:embed="rId3"/>
+            <a:stretch>
+              <a:fillRect/>
+            </a:stretch>
+          </p:blipFill>
+          <p:spPr>
+            <a:xfrm>
+              <a:off x="5952923" y="252779"/>
+              <a:ext cx="5434425" cy="2783058"/>
+            </a:xfrm>
+            <a:prstGeom prst="rect">
+              <a:avLst/>
+            </a:prstGeom>
+          </p:spPr>
+        </p:pic>
+        <p:pic>
+          <p:nvPicPr>
+            <p:cNvPr id="5" name="Picture 4">
+              <a:extLst>
+                <a:ext uri="{FF2B5EF4-FFF2-40B4-BE49-F238E27FC236}">
+                  <a16:creationId xmlns:a16="http://schemas.microsoft.com/office/drawing/2014/main" id="{D3483F40-1A91-9E60-46FB-B3BF119E9A4D}"/>
+                </a:ext>
+              </a:extLst>
+            </p:cNvPr>
+            <p:cNvPicPr>
+              <a:picLocks noChangeAspect="1"/>
+            </p:cNvPicPr>
+            <p:nvPr/>
+          </p:nvPicPr>
+          <p:blipFill>
+            <a:blip r:embed="rId4"/>
+            <a:stretch>
+              <a:fillRect/>
+            </a:stretch>
+          </p:blipFill>
+          <p:spPr>
+            <a:xfrm>
+              <a:off x="752678" y="3587927"/>
+              <a:ext cx="4083799" cy="3160570"/>
+            </a:xfrm>
+            <a:prstGeom prst="rect">
+              <a:avLst/>
+            </a:prstGeom>
+          </p:spPr>
+        </p:pic>
+        <p:pic>
+          <p:nvPicPr>
+            <p:cNvPr id="7" name="Picture 6">
+              <a:extLst>
+                <a:ext uri="{FF2B5EF4-FFF2-40B4-BE49-F238E27FC236}">
+                  <a16:creationId xmlns:a16="http://schemas.microsoft.com/office/drawing/2014/main" id="{81A45E4F-1D74-3C33-5DCB-5F5722FD117C}"/>
+                </a:ext>
+              </a:extLst>
+            </p:cNvPr>
+            <p:cNvPicPr>
+              <a:picLocks noChangeAspect="1"/>
+            </p:cNvPicPr>
+            <p:nvPr/>
+          </p:nvPicPr>
+          <p:blipFill>
+            <a:blip r:embed="rId5"/>
+            <a:stretch>
+              <a:fillRect/>
+            </a:stretch>
+          </p:blipFill>
+          <p:spPr>
+            <a:xfrm>
+              <a:off x="518498" y="117276"/>
+              <a:ext cx="5434425" cy="3470651"/>
+            </a:xfrm>
+            <a:prstGeom prst="rect">
+              <a:avLst/>
+            </a:prstGeom>
+          </p:spPr>
+        </p:pic>
+        <p:sp>
+          <p:nvSpPr>
+            <p:cNvPr id="2" name="TextBox 1">
+              <a:extLst>
+                <a:ext uri="{FF2B5EF4-FFF2-40B4-BE49-F238E27FC236}">
+                  <a16:creationId xmlns:a16="http://schemas.microsoft.com/office/drawing/2014/main" id="{184952FB-D8EB-9FF4-0373-EBFA14BACBFA}"/>
+                </a:ext>
+              </a:extLst>
+            </p:cNvPr>
+            <p:cNvSpPr txBox="1"/>
+            <p:nvPr/>
+          </p:nvSpPr>
+          <p:spPr>
+            <a:xfrm>
+              <a:off x="296992" y="38198"/>
+              <a:ext cx="375920" cy="369332"/>
+            </a:xfrm>
+            <a:prstGeom prst="rect">
+              <a:avLst/>
+            </a:prstGeom>
+            <a:noFill/>
+          </p:spPr>
+          <p:txBody>
+            <a:bodyPr wrap="square" rtlCol="0">
+              <a:spAutoFit/>
+            </a:bodyPr>
+            <a:lstStyle/>
+            <a:p>
+              <a:r>
+                <a:rPr lang="en-US" dirty="0"/>
+                <a:t>a)</a:t>
+              </a:r>
+              <a:endParaRPr lang="nl-NL" dirty="0"/>
+            </a:p>
+          </p:txBody>
+        </p:sp>
+        <p:sp>
+          <p:nvSpPr>
+            <p:cNvPr id="6" name="TextBox 5">
+              <a:extLst>
+                <a:ext uri="{FF2B5EF4-FFF2-40B4-BE49-F238E27FC236}">
+                  <a16:creationId xmlns:a16="http://schemas.microsoft.com/office/drawing/2014/main" id="{0D6B52A0-F488-60D5-4A79-6F3B67DD7E2D}"/>
+                </a:ext>
+              </a:extLst>
+            </p:cNvPr>
+            <p:cNvSpPr txBox="1"/>
+            <p:nvPr/>
+          </p:nvSpPr>
+          <p:spPr>
+            <a:xfrm>
+              <a:off x="5863158" y="68113"/>
+              <a:ext cx="433531" cy="369332"/>
+            </a:xfrm>
+            <a:prstGeom prst="rect">
+              <a:avLst/>
+            </a:prstGeom>
+            <a:noFill/>
+          </p:spPr>
+          <p:txBody>
+            <a:bodyPr wrap="square" rtlCol="0">
+              <a:spAutoFit/>
+            </a:bodyPr>
+            <a:lstStyle/>
+            <a:p>
+              <a:r>
+                <a:rPr lang="en-US" dirty="0"/>
+                <a:t>b)</a:t>
+              </a:r>
+              <a:endParaRPr lang="nl-NL" dirty="0"/>
+            </a:p>
+          </p:txBody>
+        </p:sp>
+        <p:sp>
+          <p:nvSpPr>
+            <p:cNvPr id="8" name="TextBox 7">
+              <a:extLst>
+                <a:ext uri="{FF2B5EF4-FFF2-40B4-BE49-F238E27FC236}">
+                  <a16:creationId xmlns:a16="http://schemas.microsoft.com/office/drawing/2014/main" id="{7163F39A-319A-0FA3-10F0-56E9B7346F5B}"/>
+                </a:ext>
+              </a:extLst>
+            </p:cNvPr>
+            <p:cNvSpPr txBox="1"/>
+            <p:nvPr/>
+          </p:nvSpPr>
+          <p:spPr>
+            <a:xfrm>
+              <a:off x="456147" y="3478934"/>
+              <a:ext cx="375920" cy="369332"/>
+            </a:xfrm>
+            <a:prstGeom prst="rect">
+              <a:avLst/>
+            </a:prstGeom>
+            <a:noFill/>
+          </p:spPr>
+          <p:txBody>
+            <a:bodyPr wrap="square" rtlCol="0">
+              <a:spAutoFit/>
+            </a:bodyPr>
+            <a:lstStyle/>
+            <a:p>
+              <a:r>
+                <a:rPr lang="en-US" dirty="0"/>
+                <a:t>c)</a:t>
+              </a:r>
+              <a:endParaRPr lang="nl-NL" dirty="0"/>
+            </a:p>
+          </p:txBody>
+        </p:sp>
+        <p:sp>
+          <p:nvSpPr>
+            <p:cNvPr id="9" name="TextBox 8">
+              <a:extLst>
+                <a:ext uri="{FF2B5EF4-FFF2-40B4-BE49-F238E27FC236}">
+                  <a16:creationId xmlns:a16="http://schemas.microsoft.com/office/drawing/2014/main" id="{A42CF29A-64AA-6539-7C5D-D7729DB4D132}"/>
+                </a:ext>
+              </a:extLst>
+            </p:cNvPr>
+            <p:cNvSpPr txBox="1"/>
+            <p:nvPr/>
+          </p:nvSpPr>
+          <p:spPr>
+            <a:xfrm>
+              <a:off x="6022313" y="3508849"/>
+              <a:ext cx="433531" cy="369332"/>
+            </a:xfrm>
+            <a:prstGeom prst="rect">
+              <a:avLst/>
+            </a:prstGeom>
+            <a:noFill/>
+          </p:spPr>
+          <p:txBody>
+            <a:bodyPr wrap="square" rtlCol="0">
+              <a:spAutoFit/>
+            </a:bodyPr>
+            <a:lstStyle/>
+            <a:p>
+              <a:r>
+                <a:rPr lang="en-US" dirty="0"/>
+                <a:t>d)</a:t>
+              </a:r>
+              <a:endParaRPr lang="nl-NL" dirty="0"/>
+            </a:p>
+          </p:txBody>
+        </p:sp>
+      </p:grpSp>
     </p:spTree>
     <p:extLst>
       <p:ext uri="{BB962C8B-B14F-4D97-AF65-F5344CB8AC3E}">
-        <p14:creationId xmlns:p14="http://schemas.microsoft.com/office/powerpoint/2010/main" val="3032026409"/>
+        <p14:creationId xmlns:p14="http://schemas.microsoft.com/office/powerpoint/2010/main" val="472822931"/>
       </p:ext>
     </p:extLst>
   </p:cSld>
@@ -3985,40 +4957,235 @@
           <a:chExt cx="0" cy="0"/>
         </a:xfrm>
       </p:grpSpPr>
-      <p:pic>
-        <p:nvPicPr>
-          <p:cNvPr id="5" name="Picture 4">
-            <a:extLst>
-              <a:ext uri="{FF2B5EF4-FFF2-40B4-BE49-F238E27FC236}">
-                <a16:creationId xmlns:a16="http://schemas.microsoft.com/office/drawing/2014/main" id="{70BF40F3-13FE-CF4B-D79A-F16290B50A64}"/>
-              </a:ext>
-            </a:extLst>
-          </p:cNvPr>
-          <p:cNvPicPr>
-            <a:picLocks noChangeAspect="1"/>
-          </p:cNvPicPr>
+      <p:grpSp>
+        <p:nvGrpSpPr>
+          <p:cNvPr id="7" name="Group 6">
+            <a:extLst>
+              <a:ext uri="{FF2B5EF4-FFF2-40B4-BE49-F238E27FC236}">
+                <a16:creationId xmlns:a16="http://schemas.microsoft.com/office/drawing/2014/main" id="{CC8675EF-9432-4856-873A-DEC7DE7096FE}"/>
+              </a:ext>
+            </a:extLst>
+          </p:cNvPr>
+          <p:cNvGrpSpPr/>
           <p:nvPr/>
-        </p:nvPicPr>
-        <p:blipFill>
-          <a:blip r:embed="rId2"/>
-          <a:stretch>
-            <a:fillRect/>
-          </a:stretch>
-        </p:blipFill>
-        <p:spPr>
+        </p:nvGrpSpPr>
+        <p:grpSpPr>
           <a:xfrm>
-            <a:off x="1665360" y="0"/>
-            <a:ext cx="8861279" cy="6858000"/>
+            <a:off x="296992" y="0"/>
+            <a:ext cx="11135905" cy="6858000"/>
+            <a:chOff x="296992" y="0"/>
+            <a:chExt cx="11135905" cy="6858000"/>
           </a:xfrm>
-          <a:prstGeom prst="rect">
-            <a:avLst/>
-          </a:prstGeom>
-        </p:spPr>
-      </p:pic>
+        </p:grpSpPr>
+        <p:pic>
+          <p:nvPicPr>
+            <p:cNvPr id="10" name="Picture 9">
+              <a:extLst>
+                <a:ext uri="{FF2B5EF4-FFF2-40B4-BE49-F238E27FC236}">
+                  <a16:creationId xmlns:a16="http://schemas.microsoft.com/office/drawing/2014/main" id="{C1A6A3B6-8EA0-194D-3093-C04C25FA34AD}"/>
+                </a:ext>
+              </a:extLst>
+            </p:cNvPr>
+            <p:cNvPicPr>
+              <a:picLocks noChangeAspect="1"/>
+            </p:cNvPicPr>
+            <p:nvPr/>
+          </p:nvPicPr>
+          <p:blipFill>
+            <a:blip r:embed="rId2"/>
+            <a:stretch>
+              <a:fillRect/>
+            </a:stretch>
+          </p:blipFill>
+          <p:spPr>
+            <a:xfrm>
+              <a:off x="749486" y="592944"/>
+              <a:ext cx="4251588" cy="2536336"/>
+            </a:xfrm>
+            <a:prstGeom prst="rect">
+              <a:avLst/>
+            </a:prstGeom>
+          </p:spPr>
+        </p:pic>
+        <p:pic>
+          <p:nvPicPr>
+            <p:cNvPr id="3" name="Picture 2">
+              <a:extLst>
+                <a:ext uri="{FF2B5EF4-FFF2-40B4-BE49-F238E27FC236}">
+                  <a16:creationId xmlns:a16="http://schemas.microsoft.com/office/drawing/2014/main" id="{D119DCAE-9696-CADF-A443-AE43DDC2E141}"/>
+                </a:ext>
+              </a:extLst>
+            </p:cNvPr>
+            <p:cNvPicPr>
+              <a:picLocks noChangeAspect="1"/>
+            </p:cNvPicPr>
+            <p:nvPr/>
+          </p:nvPicPr>
+          <p:blipFill>
+            <a:blip r:embed="rId3"/>
+            <a:stretch>
+              <a:fillRect/>
+            </a:stretch>
+          </p:blipFill>
+          <p:spPr>
+            <a:xfrm>
+              <a:off x="759102" y="0"/>
+              <a:ext cx="10673795" cy="6858000"/>
+            </a:xfrm>
+            <a:prstGeom prst="rect">
+              <a:avLst/>
+            </a:prstGeom>
+          </p:spPr>
+        </p:pic>
+        <p:sp>
+          <p:nvSpPr>
+            <p:cNvPr id="2" name="TextBox 1">
+              <a:extLst>
+                <a:ext uri="{FF2B5EF4-FFF2-40B4-BE49-F238E27FC236}">
+                  <a16:creationId xmlns:a16="http://schemas.microsoft.com/office/drawing/2014/main" id="{518CC7F2-0DFF-8A83-2C69-CA17AB0C7B6E}"/>
+                </a:ext>
+              </a:extLst>
+            </p:cNvPr>
+            <p:cNvSpPr txBox="1"/>
+            <p:nvPr/>
+          </p:nvSpPr>
+          <p:spPr>
+            <a:xfrm>
+              <a:off x="296992" y="38198"/>
+              <a:ext cx="375920" cy="369332"/>
+            </a:xfrm>
+            <a:prstGeom prst="rect">
+              <a:avLst/>
+            </a:prstGeom>
+            <a:noFill/>
+          </p:spPr>
+          <p:txBody>
+            <a:bodyPr wrap="square" rtlCol="0">
+              <a:spAutoFit/>
+            </a:bodyPr>
+            <a:lstStyle/>
+            <a:p>
+              <a:r>
+                <a:rPr lang="en-US" dirty="0"/>
+                <a:t>a)</a:t>
+              </a:r>
+              <a:endParaRPr lang="nl-NL" dirty="0"/>
+            </a:p>
+          </p:txBody>
+        </p:sp>
+        <p:sp>
+          <p:nvSpPr>
+            <p:cNvPr id="4" name="TextBox 3">
+              <a:extLst>
+                <a:ext uri="{FF2B5EF4-FFF2-40B4-BE49-F238E27FC236}">
+                  <a16:creationId xmlns:a16="http://schemas.microsoft.com/office/drawing/2014/main" id="{0EDA08CE-A679-68C4-91C3-D0164DBB4369}"/>
+                </a:ext>
+              </a:extLst>
+            </p:cNvPr>
+            <p:cNvSpPr txBox="1"/>
+            <p:nvPr/>
+          </p:nvSpPr>
+          <p:spPr>
+            <a:xfrm>
+              <a:off x="5863158" y="68113"/>
+              <a:ext cx="433531" cy="369332"/>
+            </a:xfrm>
+            <a:prstGeom prst="rect">
+              <a:avLst/>
+            </a:prstGeom>
+            <a:noFill/>
+          </p:spPr>
+          <p:txBody>
+            <a:bodyPr wrap="square" rtlCol="0">
+              <a:spAutoFit/>
+            </a:bodyPr>
+            <a:lstStyle/>
+            <a:p>
+              <a:r>
+                <a:rPr lang="en-US" dirty="0"/>
+                <a:t>b)</a:t>
+              </a:r>
+              <a:endParaRPr lang="nl-NL" dirty="0"/>
+            </a:p>
+          </p:txBody>
+        </p:sp>
+        <p:sp>
+          <p:nvSpPr>
+            <p:cNvPr id="5" name="TextBox 4">
+              <a:extLst>
+                <a:ext uri="{FF2B5EF4-FFF2-40B4-BE49-F238E27FC236}">
+                  <a16:creationId xmlns:a16="http://schemas.microsoft.com/office/drawing/2014/main" id="{A09726C1-3927-3BDF-DB2F-A8E0B0B5F3E4}"/>
+                </a:ext>
+              </a:extLst>
+            </p:cNvPr>
+            <p:cNvSpPr txBox="1"/>
+            <p:nvPr/>
+          </p:nvSpPr>
+          <p:spPr>
+            <a:xfrm>
+              <a:off x="456147" y="3478934"/>
+              <a:ext cx="375920" cy="369332"/>
+            </a:xfrm>
+            <a:prstGeom prst="rect">
+              <a:avLst/>
+            </a:prstGeom>
+            <a:noFill/>
+          </p:spPr>
+          <p:txBody>
+            <a:bodyPr wrap="square" rtlCol="0">
+              <a:spAutoFit/>
+            </a:bodyPr>
+            <a:lstStyle/>
+            <a:p>
+              <a:r>
+                <a:rPr lang="en-US" dirty="0"/>
+                <a:t>c)</a:t>
+              </a:r>
+              <a:endParaRPr lang="nl-NL" dirty="0"/>
+            </a:p>
+          </p:txBody>
+        </p:sp>
+        <p:sp>
+          <p:nvSpPr>
+            <p:cNvPr id="6" name="TextBox 5">
+              <a:extLst>
+                <a:ext uri="{FF2B5EF4-FFF2-40B4-BE49-F238E27FC236}">
+                  <a16:creationId xmlns:a16="http://schemas.microsoft.com/office/drawing/2014/main" id="{955AD063-0EFE-EFD0-4CE4-9E3BAE26E588}"/>
+                </a:ext>
+              </a:extLst>
+            </p:cNvPr>
+            <p:cNvSpPr txBox="1"/>
+            <p:nvPr/>
+          </p:nvSpPr>
+          <p:spPr>
+            <a:xfrm>
+              <a:off x="6022313" y="3417409"/>
+              <a:ext cx="433531" cy="369332"/>
+            </a:xfrm>
+            <a:prstGeom prst="rect">
+              <a:avLst/>
+            </a:prstGeom>
+            <a:noFill/>
+          </p:spPr>
+          <p:txBody>
+            <a:bodyPr wrap="square" rtlCol="0">
+              <a:spAutoFit/>
+            </a:bodyPr>
+            <a:lstStyle/>
+            <a:p>
+              <a:r>
+                <a:rPr lang="en-US" dirty="0"/>
+                <a:t>d)</a:t>
+              </a:r>
+              <a:endParaRPr lang="nl-NL" dirty="0"/>
+            </a:p>
+          </p:txBody>
+        </p:sp>
+      </p:grpSp>
     </p:spTree>
     <p:extLst>
       <p:ext uri="{BB962C8B-B14F-4D97-AF65-F5344CB8AC3E}">
-        <p14:creationId xmlns:p14="http://schemas.microsoft.com/office/powerpoint/2010/main" val="3156988752"/>
+        <p14:creationId xmlns:p14="http://schemas.microsoft.com/office/powerpoint/2010/main" val="740189018"/>
       </p:ext>
     </p:extLst>
   </p:cSld>
@@ -4045,130 +5212,307 @@
           <a:chExt cx="0" cy="0"/>
         </a:xfrm>
       </p:grpSpPr>
-      <p:pic>
-        <p:nvPicPr>
-          <p:cNvPr id="3" name="Picture 2">
-            <a:extLst>
-              <a:ext uri="{FF2B5EF4-FFF2-40B4-BE49-F238E27FC236}">
-                <a16:creationId xmlns:a16="http://schemas.microsoft.com/office/drawing/2014/main" id="{39642A5A-A614-567B-255F-9FE3EE94BA15}"/>
-              </a:ext>
-            </a:extLst>
-          </p:cNvPr>
-          <p:cNvPicPr>
-            <a:picLocks noChangeAspect="1"/>
-          </p:cNvPicPr>
+      <p:grpSp>
+        <p:nvGrpSpPr>
+          <p:cNvPr id="8" name="Group 7">
+            <a:extLst>
+              <a:ext uri="{FF2B5EF4-FFF2-40B4-BE49-F238E27FC236}">
+                <a16:creationId xmlns:a16="http://schemas.microsoft.com/office/drawing/2014/main" id="{D312BB59-A881-AB71-FF06-C3AED75FC913}"/>
+              </a:ext>
+            </a:extLst>
+          </p:cNvPr>
+          <p:cNvGrpSpPr/>
           <p:nvPr/>
-        </p:nvPicPr>
-        <p:blipFill>
-          <a:blip r:embed="rId2"/>
-          <a:stretch>
-            <a:fillRect/>
-          </a:stretch>
-        </p:blipFill>
-        <p:spPr>
+        </p:nvGrpSpPr>
+        <p:grpSpPr>
           <a:xfrm>
-            <a:off x="6296690" y="3429000"/>
-            <a:ext cx="5090658" cy="3160570"/>
+            <a:off x="254386" y="-93882"/>
+            <a:ext cx="11555004" cy="6993401"/>
+            <a:chOff x="254386" y="-93882"/>
+            <a:chExt cx="11555004" cy="6993401"/>
           </a:xfrm>
-          <a:prstGeom prst="rect">
-            <a:avLst/>
-          </a:prstGeom>
-        </p:spPr>
-      </p:pic>
-      <p:pic>
-        <p:nvPicPr>
-          <p:cNvPr id="4" name="Picture 3">
-            <a:extLst>
-              <a:ext uri="{FF2B5EF4-FFF2-40B4-BE49-F238E27FC236}">
-                <a16:creationId xmlns:a16="http://schemas.microsoft.com/office/drawing/2014/main" id="{3028407F-0064-E630-2E5E-BF9DEF672AAD}"/>
-              </a:ext>
-            </a:extLst>
-          </p:cNvPr>
-          <p:cNvPicPr>
-            <a:picLocks noChangeAspect="1"/>
-          </p:cNvPicPr>
-          <p:nvPr/>
-        </p:nvPicPr>
-        <p:blipFill>
-          <a:blip r:embed="rId3"/>
-          <a:stretch>
-            <a:fillRect/>
-          </a:stretch>
-        </p:blipFill>
-        <p:spPr>
-          <a:xfrm>
-            <a:off x="5952923" y="252779"/>
-            <a:ext cx="5434425" cy="2783058"/>
-          </a:xfrm>
-          <a:prstGeom prst="rect">
-            <a:avLst/>
-          </a:prstGeom>
-        </p:spPr>
-      </p:pic>
-      <p:pic>
-        <p:nvPicPr>
-          <p:cNvPr id="5" name="Picture 4">
-            <a:extLst>
-              <a:ext uri="{FF2B5EF4-FFF2-40B4-BE49-F238E27FC236}">
-                <a16:creationId xmlns:a16="http://schemas.microsoft.com/office/drawing/2014/main" id="{D3483F40-1A91-9E60-46FB-B3BF119E9A4D}"/>
-              </a:ext>
-            </a:extLst>
-          </p:cNvPr>
-          <p:cNvPicPr>
-            <a:picLocks noChangeAspect="1"/>
-          </p:cNvPicPr>
-          <p:nvPr/>
-        </p:nvPicPr>
-        <p:blipFill>
-          <a:blip r:embed="rId4"/>
-          <a:stretch>
-            <a:fillRect/>
-          </a:stretch>
-        </p:blipFill>
-        <p:spPr>
-          <a:xfrm>
-            <a:off x="752678" y="3587927"/>
-            <a:ext cx="4083799" cy="3160570"/>
-          </a:xfrm>
-          <a:prstGeom prst="rect">
-            <a:avLst/>
-          </a:prstGeom>
-        </p:spPr>
-      </p:pic>
-      <p:pic>
-        <p:nvPicPr>
-          <p:cNvPr id="7" name="Picture 6">
-            <a:extLst>
-              <a:ext uri="{FF2B5EF4-FFF2-40B4-BE49-F238E27FC236}">
-                <a16:creationId xmlns:a16="http://schemas.microsoft.com/office/drawing/2014/main" id="{81A45E4F-1D74-3C33-5DCB-5F5722FD117C}"/>
-              </a:ext>
-            </a:extLst>
-          </p:cNvPr>
-          <p:cNvPicPr>
-            <a:picLocks noChangeAspect="1"/>
-          </p:cNvPicPr>
-          <p:nvPr/>
-        </p:nvPicPr>
-        <p:blipFill>
-          <a:blip r:embed="rId5"/>
-          <a:stretch>
-            <a:fillRect/>
-          </a:stretch>
-        </p:blipFill>
-        <p:spPr>
-          <a:xfrm>
-            <a:off x="518498" y="117276"/>
-            <a:ext cx="5434425" cy="3470651"/>
-          </a:xfrm>
-          <a:prstGeom prst="rect">
-            <a:avLst/>
-          </a:prstGeom>
-        </p:spPr>
-      </p:pic>
+        </p:grpSpPr>
+        <p:pic>
+          <p:nvPicPr>
+            <p:cNvPr id="3" name="Picture 2" descr="A graph of different colored lines&#10;&#10;AI-generated content may be incorrect.">
+              <a:extLst>
+                <a:ext uri="{FF2B5EF4-FFF2-40B4-BE49-F238E27FC236}">
+                  <a16:creationId xmlns:a16="http://schemas.microsoft.com/office/drawing/2014/main" id="{D2A068CB-A2D8-7CC3-831C-C8CED7A641A4}"/>
+                </a:ext>
+              </a:extLst>
+            </p:cNvPr>
+            <p:cNvPicPr>
+              <a:picLocks noChangeAspect="1"/>
+            </p:cNvPicPr>
+            <p:nvPr/>
+          </p:nvPicPr>
+          <p:blipFill>
+            <a:blip r:embed="rId2">
+              <a:extLst>
+                <a:ext uri="{28A0092B-C50C-407E-A947-70E740481C1C}">
+                  <a14:useLocalDpi xmlns:a14="http://schemas.microsoft.com/office/drawing/2010/main" val="0"/>
+                </a:ext>
+              </a:extLst>
+            </a:blip>
+            <a:stretch>
+              <a:fillRect/>
+            </a:stretch>
+          </p:blipFill>
+          <p:spPr>
+            <a:xfrm>
+              <a:off x="5954148" y="-21101"/>
+              <a:ext cx="5780650" cy="3468391"/>
+            </a:xfrm>
+            <a:prstGeom prst="rect">
+              <a:avLst/>
+            </a:prstGeom>
+          </p:spPr>
+        </p:pic>
+        <p:pic>
+          <p:nvPicPr>
+            <p:cNvPr id="5" name="Picture 4" descr="A graph of a normal distribution&#10;&#10;AI-generated content may be incorrect.">
+              <a:extLst>
+                <a:ext uri="{FF2B5EF4-FFF2-40B4-BE49-F238E27FC236}">
+                  <a16:creationId xmlns:a16="http://schemas.microsoft.com/office/drawing/2014/main" id="{E74EA201-C69D-74D1-D74F-E414E8FFD898}"/>
+                </a:ext>
+              </a:extLst>
+            </p:cNvPr>
+            <p:cNvPicPr>
+              <a:picLocks noChangeAspect="1"/>
+            </p:cNvPicPr>
+            <p:nvPr/>
+          </p:nvPicPr>
+          <p:blipFill>
+            <a:blip r:embed="rId3">
+              <a:extLst>
+                <a:ext uri="{28A0092B-C50C-407E-A947-70E740481C1C}">
+                  <a14:useLocalDpi xmlns:a14="http://schemas.microsoft.com/office/drawing/2010/main" val="0"/>
+                </a:ext>
+              </a:extLst>
+            </a:blip>
+            <a:stretch>
+              <a:fillRect/>
+            </a:stretch>
+          </p:blipFill>
+          <p:spPr>
+            <a:xfrm>
+              <a:off x="5969389" y="3395519"/>
+              <a:ext cx="5840001" cy="3504000"/>
+            </a:xfrm>
+            <a:prstGeom prst="rect">
+              <a:avLst/>
+            </a:prstGeom>
+          </p:spPr>
+        </p:pic>
+        <p:pic>
+          <p:nvPicPr>
+            <p:cNvPr id="9" name="Picture 8">
+              <a:extLst>
+                <a:ext uri="{FF2B5EF4-FFF2-40B4-BE49-F238E27FC236}">
+                  <a16:creationId xmlns:a16="http://schemas.microsoft.com/office/drawing/2014/main" id="{39BEBDF6-BF2A-D72E-90D2-8CBF5BDE0D9F}"/>
+                </a:ext>
+              </a:extLst>
+            </p:cNvPr>
+            <p:cNvPicPr>
+              <a:picLocks noChangeAspect="1"/>
+            </p:cNvPicPr>
+            <p:nvPr/>
+          </p:nvPicPr>
+          <p:blipFill>
+            <a:blip r:embed="rId4"/>
+            <a:stretch>
+              <a:fillRect/>
+            </a:stretch>
+          </p:blipFill>
+          <p:spPr>
+            <a:xfrm>
+              <a:off x="254386" y="46921"/>
+              <a:ext cx="5669280" cy="3382079"/>
+            </a:xfrm>
+            <a:prstGeom prst="rect">
+              <a:avLst/>
+            </a:prstGeom>
+          </p:spPr>
+        </p:pic>
+        <p:pic>
+          <p:nvPicPr>
+            <p:cNvPr id="13" name="Picture 12">
+              <a:extLst>
+                <a:ext uri="{FF2B5EF4-FFF2-40B4-BE49-F238E27FC236}">
+                  <a16:creationId xmlns:a16="http://schemas.microsoft.com/office/drawing/2014/main" id="{702C77C0-B13E-6191-B7B7-743E80FFBB36}"/>
+                </a:ext>
+              </a:extLst>
+            </p:cNvPr>
+            <p:cNvPicPr>
+              <a:picLocks noChangeAspect="1"/>
+            </p:cNvPicPr>
+            <p:nvPr/>
+          </p:nvPicPr>
+          <p:blipFill>
+            <a:blip r:embed="rId5"/>
+            <a:stretch>
+              <a:fillRect/>
+            </a:stretch>
+          </p:blipFill>
+          <p:spPr>
+            <a:xfrm>
+              <a:off x="269627" y="3410711"/>
+              <a:ext cx="5669280" cy="3382079"/>
+            </a:xfrm>
+            <a:prstGeom prst="rect">
+              <a:avLst/>
+            </a:prstGeom>
+          </p:spPr>
+        </p:pic>
+        <p:sp>
+          <p:nvSpPr>
+            <p:cNvPr id="2" name="TextBox 1">
+              <a:extLst>
+                <a:ext uri="{FF2B5EF4-FFF2-40B4-BE49-F238E27FC236}">
+                  <a16:creationId xmlns:a16="http://schemas.microsoft.com/office/drawing/2014/main" id="{C4D72208-76C2-5056-A25F-6CAE4313B363}"/>
+                </a:ext>
+              </a:extLst>
+            </p:cNvPr>
+            <p:cNvSpPr txBox="1"/>
+            <p:nvPr/>
+          </p:nvSpPr>
+          <p:spPr>
+            <a:xfrm>
+              <a:off x="296992" y="-93882"/>
+              <a:ext cx="375920" cy="369332"/>
+            </a:xfrm>
+            <a:prstGeom prst="rect">
+              <a:avLst/>
+            </a:prstGeom>
+            <a:noFill/>
+          </p:spPr>
+          <p:txBody>
+            <a:bodyPr wrap="square" rtlCol="0">
+              <a:spAutoFit/>
+            </a:bodyPr>
+            <a:lstStyle/>
+            <a:p>
+              <a:r>
+                <a:rPr lang="en-US" dirty="0"/>
+                <a:t>a)</a:t>
+              </a:r>
+              <a:endParaRPr lang="nl-NL" dirty="0"/>
+            </a:p>
+          </p:txBody>
+        </p:sp>
+        <p:sp>
+          <p:nvSpPr>
+            <p:cNvPr id="4" name="TextBox 3">
+              <a:extLst>
+                <a:ext uri="{FF2B5EF4-FFF2-40B4-BE49-F238E27FC236}">
+                  <a16:creationId xmlns:a16="http://schemas.microsoft.com/office/drawing/2014/main" id="{DAB4A57A-B406-E124-0343-FE1AC694A667}"/>
+                </a:ext>
+              </a:extLst>
+            </p:cNvPr>
+            <p:cNvSpPr txBox="1"/>
+            <p:nvPr/>
+          </p:nvSpPr>
+          <p:spPr>
+            <a:xfrm>
+              <a:off x="5863158" y="68113"/>
+              <a:ext cx="433531" cy="369332"/>
+            </a:xfrm>
+            <a:prstGeom prst="rect">
+              <a:avLst/>
+            </a:prstGeom>
+            <a:noFill/>
+          </p:spPr>
+          <p:txBody>
+            <a:bodyPr wrap="square" rtlCol="0">
+              <a:spAutoFit/>
+            </a:bodyPr>
+            <a:lstStyle/>
+            <a:p>
+              <a:r>
+                <a:rPr lang="en-US" dirty="0"/>
+                <a:t>b)</a:t>
+              </a:r>
+              <a:endParaRPr lang="nl-NL" dirty="0"/>
+            </a:p>
+          </p:txBody>
+        </p:sp>
+        <p:sp>
+          <p:nvSpPr>
+            <p:cNvPr id="6" name="TextBox 5">
+              <a:extLst>
+                <a:ext uri="{FF2B5EF4-FFF2-40B4-BE49-F238E27FC236}">
+                  <a16:creationId xmlns:a16="http://schemas.microsoft.com/office/drawing/2014/main" id="{B556D0F5-F69B-8B1A-58B4-A8AD69505795}"/>
+                </a:ext>
+              </a:extLst>
+            </p:cNvPr>
+            <p:cNvSpPr txBox="1"/>
+            <p:nvPr/>
+          </p:nvSpPr>
+          <p:spPr>
+            <a:xfrm>
+              <a:off x="283427" y="3316374"/>
+              <a:ext cx="375920" cy="369332"/>
+            </a:xfrm>
+            <a:prstGeom prst="rect">
+              <a:avLst/>
+            </a:prstGeom>
+            <a:noFill/>
+          </p:spPr>
+          <p:txBody>
+            <a:bodyPr wrap="square" rtlCol="0">
+              <a:spAutoFit/>
+            </a:bodyPr>
+            <a:lstStyle/>
+            <a:p>
+              <a:r>
+                <a:rPr lang="en-US" dirty="0"/>
+                <a:t>c)</a:t>
+              </a:r>
+              <a:endParaRPr lang="nl-NL" dirty="0"/>
+            </a:p>
+          </p:txBody>
+        </p:sp>
+        <p:sp>
+          <p:nvSpPr>
+            <p:cNvPr id="7" name="TextBox 6">
+              <a:extLst>
+                <a:ext uri="{FF2B5EF4-FFF2-40B4-BE49-F238E27FC236}">
+                  <a16:creationId xmlns:a16="http://schemas.microsoft.com/office/drawing/2014/main" id="{4964CC0A-7BFF-88D4-5C78-F890100AF027}"/>
+                </a:ext>
+              </a:extLst>
+            </p:cNvPr>
+            <p:cNvSpPr txBox="1"/>
+            <p:nvPr/>
+          </p:nvSpPr>
+          <p:spPr>
+            <a:xfrm>
+              <a:off x="5930873" y="3336129"/>
+              <a:ext cx="433531" cy="369332"/>
+            </a:xfrm>
+            <a:prstGeom prst="rect">
+              <a:avLst/>
+            </a:prstGeom>
+            <a:noFill/>
+          </p:spPr>
+          <p:txBody>
+            <a:bodyPr wrap="square" rtlCol="0">
+              <a:spAutoFit/>
+            </a:bodyPr>
+            <a:lstStyle/>
+            <a:p>
+              <a:r>
+                <a:rPr lang="en-US" dirty="0"/>
+                <a:t>d)</a:t>
+              </a:r>
+              <a:endParaRPr lang="nl-NL" dirty="0"/>
+            </a:p>
+          </p:txBody>
+        </p:sp>
+      </p:grpSp>
     </p:spTree>
     <p:extLst>
       <p:ext uri="{BB962C8B-B14F-4D97-AF65-F5344CB8AC3E}">
-        <p14:creationId xmlns:p14="http://schemas.microsoft.com/office/powerpoint/2010/main" val="472822931"/>
+        <p14:creationId xmlns:p14="http://schemas.microsoft.com/office/powerpoint/2010/main" val="3033432455"/>
       </p:ext>
     </p:extLst>
   </p:cSld>
@@ -4195,70 +5539,295 @@
           <a:chExt cx="0" cy="0"/>
         </a:xfrm>
       </p:grpSpPr>
-      <p:pic>
-        <p:nvPicPr>
-          <p:cNvPr id="10" name="Picture 9">
-            <a:extLst>
-              <a:ext uri="{FF2B5EF4-FFF2-40B4-BE49-F238E27FC236}">
-                <a16:creationId xmlns:a16="http://schemas.microsoft.com/office/drawing/2014/main" id="{C1A6A3B6-8EA0-194D-3093-C04C25FA34AD}"/>
-              </a:ext>
-            </a:extLst>
-          </p:cNvPr>
-          <p:cNvPicPr>
-            <a:picLocks noChangeAspect="1"/>
-          </p:cNvPicPr>
+      <p:grpSp>
+        <p:nvGrpSpPr>
+          <p:cNvPr id="6" name="Group 5">
+            <a:extLst>
+              <a:ext uri="{FF2B5EF4-FFF2-40B4-BE49-F238E27FC236}">
+                <a16:creationId xmlns:a16="http://schemas.microsoft.com/office/drawing/2014/main" id="{CF93D7C2-3104-F9D4-D7A4-2AD0777A6449}"/>
+              </a:ext>
+            </a:extLst>
+          </p:cNvPr>
+          <p:cNvGrpSpPr/>
           <p:nvPr/>
-        </p:nvPicPr>
-        <p:blipFill>
-          <a:blip r:embed="rId2"/>
-          <a:stretch>
-            <a:fillRect/>
-          </a:stretch>
-        </p:blipFill>
-        <p:spPr>
+        </p:nvGrpSpPr>
+        <p:grpSpPr>
           <a:xfrm>
-            <a:off x="749486" y="592944"/>
-            <a:ext cx="4251588" cy="2536336"/>
+            <a:off x="59907" y="7718"/>
+            <a:ext cx="11764965" cy="6850282"/>
+            <a:chOff x="59907" y="7718"/>
+            <a:chExt cx="11764965" cy="6850282"/>
           </a:xfrm>
-          <a:prstGeom prst="rect">
-            <a:avLst/>
-          </a:prstGeom>
-        </p:spPr>
-      </p:pic>
-      <p:pic>
-        <p:nvPicPr>
-          <p:cNvPr id="3" name="Picture 2">
-            <a:extLst>
-              <a:ext uri="{FF2B5EF4-FFF2-40B4-BE49-F238E27FC236}">
-                <a16:creationId xmlns:a16="http://schemas.microsoft.com/office/drawing/2014/main" id="{D119DCAE-9696-CADF-A443-AE43DDC2E141}"/>
-              </a:ext>
-            </a:extLst>
-          </p:cNvPr>
-          <p:cNvPicPr>
-            <a:picLocks noChangeAspect="1"/>
-          </p:cNvPicPr>
-          <p:nvPr/>
-        </p:nvPicPr>
-        <p:blipFill>
-          <a:blip r:embed="rId3"/>
-          <a:stretch>
-            <a:fillRect/>
-          </a:stretch>
-        </p:blipFill>
-        <p:spPr>
-          <a:xfrm>
-            <a:off x="759102" y="0"/>
-            <a:ext cx="10673795" cy="6858000"/>
-          </a:xfrm>
-          <a:prstGeom prst="rect">
-            <a:avLst/>
-          </a:prstGeom>
-        </p:spPr>
-      </p:pic>
+        </p:grpSpPr>
+        <p:pic>
+          <p:nvPicPr>
+            <p:cNvPr id="10" name="Picture 9">
+              <a:extLst>
+                <a:ext uri="{FF2B5EF4-FFF2-40B4-BE49-F238E27FC236}">
+                  <a16:creationId xmlns:a16="http://schemas.microsoft.com/office/drawing/2014/main" id="{99DFC3DA-B4C6-C8DB-14B3-8D92816E5701}"/>
+                </a:ext>
+              </a:extLst>
+            </p:cNvPr>
+            <p:cNvPicPr>
+              <a:picLocks noChangeAspect="1"/>
+            </p:cNvPicPr>
+            <p:nvPr/>
+          </p:nvPicPr>
+          <p:blipFill>
+            <a:blip r:embed="rId2"/>
+            <a:stretch>
+              <a:fillRect/>
+            </a:stretch>
+          </p:blipFill>
+          <p:spPr>
+            <a:xfrm>
+              <a:off x="160819" y="3405652"/>
+              <a:ext cx="5787072" cy="3452348"/>
+            </a:xfrm>
+            <a:prstGeom prst="rect">
+              <a:avLst/>
+            </a:prstGeom>
+          </p:spPr>
+        </p:pic>
+        <p:pic>
+          <p:nvPicPr>
+            <p:cNvPr id="12" name="Picture 11">
+              <a:extLst>
+                <a:ext uri="{FF2B5EF4-FFF2-40B4-BE49-F238E27FC236}">
+                  <a16:creationId xmlns:a16="http://schemas.microsoft.com/office/drawing/2014/main" id="{E0B63F82-AE97-90ED-DDE9-3957D22C3EC9}"/>
+                </a:ext>
+              </a:extLst>
+            </p:cNvPr>
+            <p:cNvPicPr>
+              <a:picLocks noChangeAspect="1"/>
+            </p:cNvPicPr>
+            <p:nvPr/>
+          </p:nvPicPr>
+          <p:blipFill>
+            <a:blip r:embed="rId3"/>
+            <a:stretch>
+              <a:fillRect/>
+            </a:stretch>
+          </p:blipFill>
+          <p:spPr>
+            <a:xfrm>
+              <a:off x="171871" y="91440"/>
+              <a:ext cx="5787072" cy="3452348"/>
+            </a:xfrm>
+            <a:prstGeom prst="rect">
+              <a:avLst/>
+            </a:prstGeom>
+          </p:spPr>
+        </p:pic>
+        <p:pic>
+          <p:nvPicPr>
+            <p:cNvPr id="14" name="Picture 13">
+              <a:extLst>
+                <a:ext uri="{FF2B5EF4-FFF2-40B4-BE49-F238E27FC236}">
+                  <a16:creationId xmlns:a16="http://schemas.microsoft.com/office/drawing/2014/main" id="{20851FAC-2EFE-7971-7C7E-26112B970197}"/>
+                </a:ext>
+              </a:extLst>
+            </p:cNvPr>
+            <p:cNvPicPr>
+              <a:picLocks noChangeAspect="1"/>
+            </p:cNvPicPr>
+            <p:nvPr/>
+          </p:nvPicPr>
+          <p:blipFill>
+            <a:blip r:embed="rId4"/>
+            <a:stretch>
+              <a:fillRect/>
+            </a:stretch>
+          </p:blipFill>
+          <p:spPr>
+            <a:xfrm>
+              <a:off x="6030955" y="91440"/>
+              <a:ext cx="5793917" cy="3456432"/>
+            </a:xfrm>
+            <a:prstGeom prst="rect">
+              <a:avLst/>
+            </a:prstGeom>
+          </p:spPr>
+        </p:pic>
+        <p:pic>
+          <p:nvPicPr>
+            <p:cNvPr id="16" name="Picture 15">
+              <a:extLst>
+                <a:ext uri="{FF2B5EF4-FFF2-40B4-BE49-F238E27FC236}">
+                  <a16:creationId xmlns:a16="http://schemas.microsoft.com/office/drawing/2014/main" id="{FAF8ABFB-6861-940F-5BF6-80DC8FF4F346}"/>
+                </a:ext>
+              </a:extLst>
+            </p:cNvPr>
+            <p:cNvPicPr>
+              <a:picLocks noChangeAspect="1"/>
+            </p:cNvPicPr>
+            <p:nvPr/>
+          </p:nvPicPr>
+          <p:blipFill>
+            <a:blip r:embed="rId5"/>
+            <a:stretch>
+              <a:fillRect/>
+            </a:stretch>
+          </p:blipFill>
+          <p:spPr>
+            <a:xfrm>
+              <a:off x="6030954" y="3398520"/>
+              <a:ext cx="5793917" cy="3456432"/>
+            </a:xfrm>
+            <a:prstGeom prst="rect">
+              <a:avLst/>
+            </a:prstGeom>
+          </p:spPr>
+        </p:pic>
+        <p:sp>
+          <p:nvSpPr>
+            <p:cNvPr id="2" name="TextBox 1">
+              <a:extLst>
+                <a:ext uri="{FF2B5EF4-FFF2-40B4-BE49-F238E27FC236}">
+                  <a16:creationId xmlns:a16="http://schemas.microsoft.com/office/drawing/2014/main" id="{2130016C-3922-3EA7-B69A-0B2736E1CA3F}"/>
+                </a:ext>
+              </a:extLst>
+            </p:cNvPr>
+            <p:cNvSpPr txBox="1"/>
+            <p:nvPr/>
+          </p:nvSpPr>
+          <p:spPr>
+            <a:xfrm>
+              <a:off x="114112" y="7718"/>
+              <a:ext cx="375920" cy="369332"/>
+            </a:xfrm>
+            <a:prstGeom prst="rect">
+              <a:avLst/>
+            </a:prstGeom>
+            <a:noFill/>
+          </p:spPr>
+          <p:txBody>
+            <a:bodyPr wrap="square" rtlCol="0">
+              <a:spAutoFit/>
+            </a:bodyPr>
+            <a:lstStyle/>
+            <a:p>
+              <a:r>
+                <a:rPr lang="en-US" dirty="0"/>
+                <a:t>a)</a:t>
+              </a:r>
+              <a:endParaRPr lang="nl-NL" dirty="0"/>
+            </a:p>
+          </p:txBody>
+        </p:sp>
+        <p:sp>
+          <p:nvSpPr>
+            <p:cNvPr id="3" name="TextBox 2">
+              <a:extLst>
+                <a:ext uri="{FF2B5EF4-FFF2-40B4-BE49-F238E27FC236}">
+                  <a16:creationId xmlns:a16="http://schemas.microsoft.com/office/drawing/2014/main" id="{601F2CBB-03B7-142E-8DF0-D5833B8DE430}"/>
+                </a:ext>
+              </a:extLst>
+            </p:cNvPr>
+            <p:cNvSpPr txBox="1"/>
+            <p:nvPr/>
+          </p:nvSpPr>
+          <p:spPr>
+            <a:xfrm>
+              <a:off x="5863158" y="68113"/>
+              <a:ext cx="433531" cy="369332"/>
+            </a:xfrm>
+            <a:prstGeom prst="rect">
+              <a:avLst/>
+            </a:prstGeom>
+            <a:noFill/>
+          </p:spPr>
+          <p:txBody>
+            <a:bodyPr wrap="square" rtlCol="0">
+              <a:spAutoFit/>
+            </a:bodyPr>
+            <a:lstStyle/>
+            <a:p>
+              <a:r>
+                <a:rPr lang="en-US" dirty="0"/>
+                <a:t>b)</a:t>
+              </a:r>
+              <a:endParaRPr lang="nl-NL" dirty="0"/>
+            </a:p>
+          </p:txBody>
+        </p:sp>
+        <p:sp>
+          <p:nvSpPr>
+            <p:cNvPr id="4" name="TextBox 3">
+              <a:extLst>
+                <a:ext uri="{FF2B5EF4-FFF2-40B4-BE49-F238E27FC236}">
+                  <a16:creationId xmlns:a16="http://schemas.microsoft.com/office/drawing/2014/main" id="{3EAFAC1B-AD66-A7E3-4D32-8A2690B97BF0}"/>
+                </a:ext>
+              </a:extLst>
+            </p:cNvPr>
+            <p:cNvSpPr txBox="1"/>
+            <p:nvPr/>
+          </p:nvSpPr>
+          <p:spPr>
+            <a:xfrm>
+              <a:off x="59907" y="3478934"/>
+              <a:ext cx="375920" cy="369332"/>
+            </a:xfrm>
+            <a:prstGeom prst="rect">
+              <a:avLst/>
+            </a:prstGeom>
+            <a:noFill/>
+          </p:spPr>
+          <p:txBody>
+            <a:bodyPr wrap="square" rtlCol="0">
+              <a:spAutoFit/>
+            </a:bodyPr>
+            <a:lstStyle/>
+            <a:p>
+              <a:r>
+                <a:rPr lang="en-US" dirty="0"/>
+                <a:t>c)</a:t>
+              </a:r>
+              <a:endParaRPr lang="nl-NL" dirty="0"/>
+            </a:p>
+          </p:txBody>
+        </p:sp>
+        <p:sp>
+          <p:nvSpPr>
+            <p:cNvPr id="5" name="TextBox 4">
+              <a:extLst>
+                <a:ext uri="{FF2B5EF4-FFF2-40B4-BE49-F238E27FC236}">
+                  <a16:creationId xmlns:a16="http://schemas.microsoft.com/office/drawing/2014/main" id="{53C3EDEF-A846-F7AE-23A6-305FA79675E1}"/>
+                </a:ext>
+              </a:extLst>
+            </p:cNvPr>
+            <p:cNvSpPr txBox="1"/>
+            <p:nvPr/>
+          </p:nvSpPr>
+          <p:spPr>
+            <a:xfrm>
+              <a:off x="5981673" y="3325969"/>
+              <a:ext cx="433531" cy="369332"/>
+            </a:xfrm>
+            <a:prstGeom prst="rect">
+              <a:avLst/>
+            </a:prstGeom>
+            <a:noFill/>
+          </p:spPr>
+          <p:txBody>
+            <a:bodyPr wrap="square" rtlCol="0">
+              <a:spAutoFit/>
+            </a:bodyPr>
+            <a:lstStyle/>
+            <a:p>
+              <a:r>
+                <a:rPr lang="en-US" dirty="0"/>
+                <a:t>d)</a:t>
+              </a:r>
+              <a:endParaRPr lang="nl-NL" dirty="0"/>
+            </a:p>
+          </p:txBody>
+        </p:sp>
+      </p:grpSp>
     </p:spTree>
     <p:extLst>
       <p:ext uri="{BB962C8B-B14F-4D97-AF65-F5344CB8AC3E}">
-        <p14:creationId xmlns:p14="http://schemas.microsoft.com/office/powerpoint/2010/main" val="740189018"/>
+        <p14:creationId xmlns:p14="http://schemas.microsoft.com/office/powerpoint/2010/main" val="2741206739"/>
       </p:ext>
     </p:extLst>
   </p:cSld>
@@ -4285,142 +5854,233 @@
           <a:chExt cx="0" cy="0"/>
         </a:xfrm>
       </p:grpSpPr>
-      <p:pic>
-        <p:nvPicPr>
-          <p:cNvPr id="3" name="Picture 2" descr="A graph of different colored lines&#10;&#10;AI-generated content may be incorrect.">
-            <a:extLst>
-              <a:ext uri="{FF2B5EF4-FFF2-40B4-BE49-F238E27FC236}">
-                <a16:creationId xmlns:a16="http://schemas.microsoft.com/office/drawing/2014/main" id="{D2A068CB-A2D8-7CC3-831C-C8CED7A641A4}"/>
-              </a:ext>
-            </a:extLst>
-          </p:cNvPr>
-          <p:cNvPicPr>
-            <a:picLocks noChangeAspect="1"/>
-          </p:cNvPicPr>
+      <p:grpSp>
+        <p:nvGrpSpPr>
+          <p:cNvPr id="8" name="Group 7">
+            <a:extLst>
+              <a:ext uri="{FF2B5EF4-FFF2-40B4-BE49-F238E27FC236}">
+                <a16:creationId xmlns:a16="http://schemas.microsoft.com/office/drawing/2014/main" id="{5987CBB1-1F71-E071-6F6B-AD3A9BD292BA}"/>
+              </a:ext>
+            </a:extLst>
+          </p:cNvPr>
+          <p:cNvGrpSpPr/>
           <p:nvPr/>
-        </p:nvPicPr>
-        <p:blipFill>
-          <a:blip r:embed="rId2">
-            <a:extLst>
-              <a:ext uri="{28A0092B-C50C-407E-A947-70E740481C1C}">
-                <a14:useLocalDpi xmlns:a14="http://schemas.microsoft.com/office/drawing/2010/main" val="0"/>
-              </a:ext>
-            </a:extLst>
-          </a:blip>
-          <a:stretch>
-            <a:fillRect/>
-          </a:stretch>
-        </p:blipFill>
-        <p:spPr>
+        </p:nvGrpSpPr>
+        <p:grpSpPr>
           <a:xfrm>
-            <a:off x="5954148" y="-21101"/>
-            <a:ext cx="5780650" cy="3468391"/>
+            <a:off x="12512" y="0"/>
+            <a:ext cx="10371008" cy="6858000"/>
+            <a:chOff x="12512" y="0"/>
+            <a:chExt cx="10371008" cy="6858000"/>
           </a:xfrm>
-          <a:prstGeom prst="rect">
-            <a:avLst/>
-          </a:prstGeom>
-        </p:spPr>
-      </p:pic>
-      <p:pic>
-        <p:nvPicPr>
-          <p:cNvPr id="5" name="Picture 4" descr="A graph of a normal distribution&#10;&#10;AI-generated content may be incorrect.">
-            <a:extLst>
-              <a:ext uri="{FF2B5EF4-FFF2-40B4-BE49-F238E27FC236}">
-                <a16:creationId xmlns:a16="http://schemas.microsoft.com/office/drawing/2014/main" id="{E74EA201-C69D-74D1-D74F-E414E8FFD898}"/>
-              </a:ext>
-            </a:extLst>
-          </p:cNvPr>
-          <p:cNvPicPr>
-            <a:picLocks noChangeAspect="1"/>
-          </p:cNvPicPr>
-          <p:nvPr/>
-        </p:nvPicPr>
-        <p:blipFill>
-          <a:blip r:embed="rId3">
-            <a:extLst>
-              <a:ext uri="{28A0092B-C50C-407E-A947-70E740481C1C}">
-                <a14:useLocalDpi xmlns:a14="http://schemas.microsoft.com/office/drawing/2010/main" val="0"/>
-              </a:ext>
-            </a:extLst>
-          </a:blip>
-          <a:stretch>
-            <a:fillRect/>
-          </a:stretch>
-        </p:blipFill>
-        <p:spPr>
-          <a:xfrm>
-            <a:off x="5969389" y="3395519"/>
-            <a:ext cx="5840001" cy="3504000"/>
-          </a:xfrm>
-          <a:prstGeom prst="rect">
-            <a:avLst/>
-          </a:prstGeom>
-        </p:spPr>
-      </p:pic>
-      <p:pic>
-        <p:nvPicPr>
-          <p:cNvPr id="9" name="Picture 8">
-            <a:extLst>
-              <a:ext uri="{FF2B5EF4-FFF2-40B4-BE49-F238E27FC236}">
-                <a16:creationId xmlns:a16="http://schemas.microsoft.com/office/drawing/2014/main" id="{39BEBDF6-BF2A-D72E-90D2-8CBF5BDE0D9F}"/>
-              </a:ext>
-            </a:extLst>
-          </p:cNvPr>
-          <p:cNvPicPr>
-            <a:picLocks noChangeAspect="1"/>
-          </p:cNvPicPr>
-          <p:nvPr/>
-        </p:nvPicPr>
-        <p:blipFill>
-          <a:blip r:embed="rId4"/>
-          <a:stretch>
-            <a:fillRect/>
-          </a:stretch>
-        </p:blipFill>
-        <p:spPr>
-          <a:xfrm>
-            <a:off x="254386" y="46921"/>
-            <a:ext cx="5669280" cy="3382079"/>
-          </a:xfrm>
-          <a:prstGeom prst="rect">
-            <a:avLst/>
-          </a:prstGeom>
-        </p:spPr>
-      </p:pic>
-      <p:pic>
-        <p:nvPicPr>
-          <p:cNvPr id="13" name="Picture 12">
-            <a:extLst>
-              <a:ext uri="{FF2B5EF4-FFF2-40B4-BE49-F238E27FC236}">
-                <a16:creationId xmlns:a16="http://schemas.microsoft.com/office/drawing/2014/main" id="{702C77C0-B13E-6191-B7B7-743E80FFBB36}"/>
-              </a:ext>
-            </a:extLst>
-          </p:cNvPr>
-          <p:cNvPicPr>
-            <a:picLocks noChangeAspect="1"/>
-          </p:cNvPicPr>
-          <p:nvPr/>
-        </p:nvPicPr>
-        <p:blipFill>
-          <a:blip r:embed="rId5"/>
-          <a:stretch>
-            <a:fillRect/>
-          </a:stretch>
-        </p:blipFill>
-        <p:spPr>
-          <a:xfrm>
-            <a:off x="269627" y="3410711"/>
-            <a:ext cx="5669280" cy="3382079"/>
-          </a:xfrm>
-          <a:prstGeom prst="rect">
-            <a:avLst/>
-          </a:prstGeom>
-        </p:spPr>
-      </p:pic>
+        </p:grpSpPr>
+        <p:pic>
+          <p:nvPicPr>
+            <p:cNvPr id="3" name="Picture 2">
+              <a:extLst>
+                <a:ext uri="{FF2B5EF4-FFF2-40B4-BE49-F238E27FC236}">
+                  <a16:creationId xmlns:a16="http://schemas.microsoft.com/office/drawing/2014/main" id="{98824164-2DEF-E45F-0CC2-1580082C75E3}"/>
+                </a:ext>
+              </a:extLst>
+            </p:cNvPr>
+            <p:cNvPicPr>
+              <a:picLocks noChangeAspect="1"/>
+            </p:cNvPicPr>
+            <p:nvPr/>
+          </p:nvPicPr>
+          <p:blipFill>
+            <a:blip r:embed="rId2"/>
+            <a:srcRect r="9895"/>
+            <a:stretch/>
+          </p:blipFill>
+          <p:spPr>
+            <a:xfrm>
+              <a:off x="134239" y="0"/>
+              <a:ext cx="10249281" cy="6858000"/>
+            </a:xfrm>
+            <a:prstGeom prst="rect">
+              <a:avLst/>
+            </a:prstGeom>
+          </p:spPr>
+        </p:pic>
+        <p:pic>
+          <p:nvPicPr>
+            <p:cNvPr id="2" name="Picture 1">
+              <a:extLst>
+                <a:ext uri="{FF2B5EF4-FFF2-40B4-BE49-F238E27FC236}">
+                  <a16:creationId xmlns:a16="http://schemas.microsoft.com/office/drawing/2014/main" id="{1EB2DD14-4F7A-29FC-13F3-C4C4B9AD41D9}"/>
+                </a:ext>
+              </a:extLst>
+            </p:cNvPr>
+            <p:cNvPicPr>
+              <a:picLocks noChangeAspect="1"/>
+            </p:cNvPicPr>
+            <p:nvPr/>
+          </p:nvPicPr>
+          <p:blipFill>
+            <a:blip r:embed="rId2"/>
+            <a:srcRect l="90462" t="43851" b="42815"/>
+            <a:stretch/>
+          </p:blipFill>
+          <p:spPr>
+            <a:xfrm>
+              <a:off x="5011040" y="3230880"/>
+              <a:ext cx="1084960" cy="914400"/>
+            </a:xfrm>
+            <a:prstGeom prst="rect">
+              <a:avLst/>
+            </a:prstGeom>
+          </p:spPr>
+        </p:pic>
+        <p:sp>
+          <p:nvSpPr>
+            <p:cNvPr id="4" name="TextBox 3">
+              <a:extLst>
+                <a:ext uri="{FF2B5EF4-FFF2-40B4-BE49-F238E27FC236}">
+                  <a16:creationId xmlns:a16="http://schemas.microsoft.com/office/drawing/2014/main" id="{8B6376F6-289C-FCE1-845F-CA09EF377CDA}"/>
+                </a:ext>
+              </a:extLst>
+            </p:cNvPr>
+            <p:cNvSpPr txBox="1"/>
+            <p:nvPr/>
+          </p:nvSpPr>
+          <p:spPr>
+            <a:xfrm>
+              <a:off x="200472" y="237306"/>
+              <a:ext cx="375920" cy="369332"/>
+            </a:xfrm>
+            <a:prstGeom prst="rect">
+              <a:avLst/>
+            </a:prstGeom>
+            <a:noFill/>
+          </p:spPr>
+          <p:txBody>
+            <a:bodyPr wrap="square" rtlCol="0">
+              <a:spAutoFit/>
+            </a:bodyPr>
+            <a:lstStyle/>
+            <a:p>
+              <a:r>
+                <a:rPr lang="en-US" dirty="0"/>
+                <a:t>a)</a:t>
+              </a:r>
+              <a:endParaRPr lang="nl-NL" dirty="0"/>
+            </a:p>
+          </p:txBody>
+        </p:sp>
+        <p:sp>
+          <p:nvSpPr>
+            <p:cNvPr id="5" name="TextBox 4">
+              <a:extLst>
+                <a:ext uri="{FF2B5EF4-FFF2-40B4-BE49-F238E27FC236}">
+                  <a16:creationId xmlns:a16="http://schemas.microsoft.com/office/drawing/2014/main" id="{9760130D-3A91-681F-0030-4350360EAD11}"/>
+                </a:ext>
+              </a:extLst>
+            </p:cNvPr>
+            <p:cNvSpPr txBox="1"/>
+            <p:nvPr/>
+          </p:nvSpPr>
+          <p:spPr>
+            <a:xfrm>
+              <a:off x="5456758" y="333494"/>
+              <a:ext cx="433531" cy="369332"/>
+            </a:xfrm>
+            <a:prstGeom prst="rect">
+              <a:avLst/>
+            </a:prstGeom>
+            <a:noFill/>
+          </p:spPr>
+          <p:txBody>
+            <a:bodyPr wrap="square" rtlCol="0">
+              <a:spAutoFit/>
+            </a:bodyPr>
+            <a:lstStyle/>
+            <a:p>
+              <a:r>
+                <a:rPr lang="en-US" dirty="0"/>
+                <a:t>b)</a:t>
+              </a:r>
+              <a:endParaRPr lang="nl-NL" dirty="0"/>
+            </a:p>
+          </p:txBody>
+        </p:sp>
+        <p:sp>
+          <p:nvSpPr>
+            <p:cNvPr id="6" name="TextBox 5">
+              <a:extLst>
+                <a:ext uri="{FF2B5EF4-FFF2-40B4-BE49-F238E27FC236}">
+                  <a16:creationId xmlns:a16="http://schemas.microsoft.com/office/drawing/2014/main" id="{40482C42-E0E8-3763-B182-5A3F941AA91A}"/>
+                </a:ext>
+              </a:extLst>
+            </p:cNvPr>
+            <p:cNvSpPr txBox="1"/>
+            <p:nvPr/>
+          </p:nvSpPr>
+          <p:spPr>
+            <a:xfrm>
+              <a:off x="12512" y="3455320"/>
+              <a:ext cx="375920" cy="369332"/>
+            </a:xfrm>
+            <a:prstGeom prst="rect">
+              <a:avLst/>
+            </a:prstGeom>
+            <a:noFill/>
+          </p:spPr>
+          <p:txBody>
+            <a:bodyPr wrap="square" rtlCol="0">
+              <a:spAutoFit/>
+            </a:bodyPr>
+            <a:lstStyle/>
+            <a:p>
+              <a:r>
+                <a:rPr lang="en-US" dirty="0"/>
+                <a:t>c)</a:t>
+              </a:r>
+              <a:endParaRPr lang="nl-NL" dirty="0"/>
+            </a:p>
+          </p:txBody>
+        </p:sp>
+        <p:sp>
+          <p:nvSpPr>
+            <p:cNvPr id="7" name="TextBox 6">
+              <a:extLst>
+                <a:ext uri="{FF2B5EF4-FFF2-40B4-BE49-F238E27FC236}">
+                  <a16:creationId xmlns:a16="http://schemas.microsoft.com/office/drawing/2014/main" id="{84229EC2-C0B8-31EC-0853-42F580E369C9}"/>
+                </a:ext>
+              </a:extLst>
+            </p:cNvPr>
+            <p:cNvSpPr txBox="1"/>
+            <p:nvPr/>
+          </p:nvSpPr>
+          <p:spPr>
+            <a:xfrm>
+              <a:off x="6022313" y="3508849"/>
+              <a:ext cx="433531" cy="369332"/>
+            </a:xfrm>
+            <a:prstGeom prst="rect">
+              <a:avLst/>
+            </a:prstGeom>
+            <a:noFill/>
+          </p:spPr>
+          <p:txBody>
+            <a:bodyPr wrap="square" rtlCol="0">
+              <a:spAutoFit/>
+            </a:bodyPr>
+            <a:lstStyle/>
+            <a:p>
+              <a:r>
+                <a:rPr lang="en-US" dirty="0"/>
+                <a:t>d)</a:t>
+              </a:r>
+              <a:endParaRPr lang="nl-NL" dirty="0"/>
+            </a:p>
+          </p:txBody>
+        </p:sp>
+      </p:grpSp>
     </p:spTree>
     <p:extLst>
       <p:ext uri="{BB962C8B-B14F-4D97-AF65-F5344CB8AC3E}">
-        <p14:creationId xmlns:p14="http://schemas.microsoft.com/office/powerpoint/2010/main" val="3033432455"/>
+        <p14:creationId xmlns:p14="http://schemas.microsoft.com/office/powerpoint/2010/main" val="1338863895"/>
       </p:ext>
     </p:extLst>
   </p:cSld>
@@ -4447,130 +6107,229 @@
           <a:chExt cx="0" cy="0"/>
         </a:xfrm>
       </p:grpSpPr>
-      <p:pic>
-        <p:nvPicPr>
-          <p:cNvPr id="10" name="Picture 9">
-            <a:extLst>
-              <a:ext uri="{FF2B5EF4-FFF2-40B4-BE49-F238E27FC236}">
-                <a16:creationId xmlns:a16="http://schemas.microsoft.com/office/drawing/2014/main" id="{99DFC3DA-B4C6-C8DB-14B3-8D92816E5701}"/>
-              </a:ext>
-            </a:extLst>
-          </p:cNvPr>
-          <p:cNvPicPr>
-            <a:picLocks noChangeAspect="1"/>
-          </p:cNvPicPr>
+      <p:grpSp>
+        <p:nvGrpSpPr>
+          <p:cNvPr id="9" name="Group 8">
+            <a:extLst>
+              <a:ext uri="{FF2B5EF4-FFF2-40B4-BE49-F238E27FC236}">
+                <a16:creationId xmlns:a16="http://schemas.microsoft.com/office/drawing/2014/main" id="{8A14C0C4-AAE9-8131-A7C8-F8FDCA5CAE80}"/>
+              </a:ext>
+            </a:extLst>
+          </p:cNvPr>
+          <p:cNvGrpSpPr/>
           <p:nvPr/>
-        </p:nvPicPr>
-        <p:blipFill>
-          <a:blip r:embed="rId2"/>
-          <a:stretch>
-            <a:fillRect/>
-          </a:stretch>
-        </p:blipFill>
-        <p:spPr>
+        </p:nvGrpSpPr>
+        <p:grpSpPr>
           <a:xfrm>
-            <a:off x="160819" y="3405652"/>
-            <a:ext cx="5787072" cy="3452348"/>
+            <a:off x="217487" y="-93882"/>
+            <a:ext cx="11452227" cy="6647717"/>
+            <a:chOff x="217487" y="-93882"/>
+            <a:chExt cx="11452227" cy="6647717"/>
           </a:xfrm>
-          <a:prstGeom prst="rect">
-            <a:avLst/>
-          </a:prstGeom>
-        </p:spPr>
-      </p:pic>
-      <p:pic>
-        <p:nvPicPr>
-          <p:cNvPr id="12" name="Picture 11">
-            <a:extLst>
-              <a:ext uri="{FF2B5EF4-FFF2-40B4-BE49-F238E27FC236}">
-                <a16:creationId xmlns:a16="http://schemas.microsoft.com/office/drawing/2014/main" id="{E0B63F82-AE97-90ED-DDE9-3957D22C3EC9}"/>
-              </a:ext>
-            </a:extLst>
-          </p:cNvPr>
-          <p:cNvPicPr>
-            <a:picLocks noChangeAspect="1"/>
-          </p:cNvPicPr>
-          <p:nvPr/>
-        </p:nvPicPr>
-        <p:blipFill>
-          <a:blip r:embed="rId3"/>
-          <a:stretch>
-            <a:fillRect/>
-          </a:stretch>
-        </p:blipFill>
-        <p:spPr>
-          <a:xfrm>
-            <a:off x="171871" y="91440"/>
-            <a:ext cx="5787072" cy="3452348"/>
-          </a:xfrm>
-          <a:prstGeom prst="rect">
-            <a:avLst/>
-          </a:prstGeom>
-        </p:spPr>
-      </p:pic>
-      <p:pic>
-        <p:nvPicPr>
-          <p:cNvPr id="14" name="Picture 13">
-            <a:extLst>
-              <a:ext uri="{FF2B5EF4-FFF2-40B4-BE49-F238E27FC236}">
-                <a16:creationId xmlns:a16="http://schemas.microsoft.com/office/drawing/2014/main" id="{20851FAC-2EFE-7971-7C7E-26112B970197}"/>
-              </a:ext>
-            </a:extLst>
-          </p:cNvPr>
-          <p:cNvPicPr>
-            <a:picLocks noChangeAspect="1"/>
-          </p:cNvPicPr>
-          <p:nvPr/>
-        </p:nvPicPr>
-        <p:blipFill>
-          <a:blip r:embed="rId4"/>
-          <a:stretch>
-            <a:fillRect/>
-          </a:stretch>
-        </p:blipFill>
-        <p:spPr>
-          <a:xfrm>
-            <a:off x="6030955" y="91440"/>
-            <a:ext cx="5793917" cy="3456432"/>
-          </a:xfrm>
-          <a:prstGeom prst="rect">
-            <a:avLst/>
-          </a:prstGeom>
-        </p:spPr>
-      </p:pic>
-      <p:pic>
-        <p:nvPicPr>
-          <p:cNvPr id="16" name="Picture 15">
-            <a:extLst>
-              <a:ext uri="{FF2B5EF4-FFF2-40B4-BE49-F238E27FC236}">
-                <a16:creationId xmlns:a16="http://schemas.microsoft.com/office/drawing/2014/main" id="{FAF8ABFB-6861-940F-5BF6-80DC8FF4F346}"/>
-              </a:ext>
-            </a:extLst>
-          </p:cNvPr>
-          <p:cNvPicPr>
-            <a:picLocks noChangeAspect="1"/>
-          </p:cNvPicPr>
-          <p:nvPr/>
-        </p:nvPicPr>
-        <p:blipFill>
-          <a:blip r:embed="rId5"/>
-          <a:stretch>
-            <a:fillRect/>
-          </a:stretch>
-        </p:blipFill>
-        <p:spPr>
-          <a:xfrm>
-            <a:off x="6030954" y="3398520"/>
-            <a:ext cx="5793917" cy="3456432"/>
-          </a:xfrm>
-          <a:prstGeom prst="rect">
-            <a:avLst/>
-          </a:prstGeom>
-        </p:spPr>
-      </p:pic>
+        </p:grpSpPr>
+        <p:pic>
+          <p:nvPicPr>
+            <p:cNvPr id="3" name="Picture 2">
+              <a:extLst>
+                <a:ext uri="{FF2B5EF4-FFF2-40B4-BE49-F238E27FC236}">
+                  <a16:creationId xmlns:a16="http://schemas.microsoft.com/office/drawing/2014/main" id="{37BD88A7-A799-7EE7-4588-88F94B32C308}"/>
+                </a:ext>
+              </a:extLst>
+            </p:cNvPr>
+            <p:cNvPicPr>
+              <a:picLocks noChangeAspect="1"/>
+            </p:cNvPicPr>
+            <p:nvPr/>
+          </p:nvPicPr>
+          <p:blipFill>
+            <a:blip r:embed="rId2"/>
+            <a:stretch>
+              <a:fillRect/>
+            </a:stretch>
+          </p:blipFill>
+          <p:spPr>
+            <a:xfrm>
+              <a:off x="217487" y="141605"/>
+              <a:ext cx="5726113" cy="3415982"/>
+            </a:xfrm>
+            <a:prstGeom prst="rect">
+              <a:avLst/>
+            </a:prstGeom>
+          </p:spPr>
+        </p:pic>
+        <p:pic>
+          <p:nvPicPr>
+            <p:cNvPr id="5" name="Picture 4">
+              <a:extLst>
+                <a:ext uri="{FF2B5EF4-FFF2-40B4-BE49-F238E27FC236}">
+                  <a16:creationId xmlns:a16="http://schemas.microsoft.com/office/drawing/2014/main" id="{06C69711-057C-65D2-7B24-CEE9AEEE9D26}"/>
+                </a:ext>
+              </a:extLst>
+            </p:cNvPr>
+            <p:cNvPicPr>
+              <a:picLocks noChangeAspect="1"/>
+            </p:cNvPicPr>
+            <p:nvPr/>
+          </p:nvPicPr>
+          <p:blipFill>
+            <a:blip r:embed="rId3"/>
+            <a:stretch>
+              <a:fillRect/>
+            </a:stretch>
+          </p:blipFill>
+          <p:spPr>
+            <a:xfrm>
+              <a:off x="5943600" y="141604"/>
+              <a:ext cx="5726114" cy="3415983"/>
+            </a:xfrm>
+            <a:prstGeom prst="rect">
+              <a:avLst/>
+            </a:prstGeom>
+          </p:spPr>
+        </p:pic>
+        <p:pic>
+          <p:nvPicPr>
+            <p:cNvPr id="4" name="Picture 3">
+              <a:extLst>
+                <a:ext uri="{FF2B5EF4-FFF2-40B4-BE49-F238E27FC236}">
+                  <a16:creationId xmlns:a16="http://schemas.microsoft.com/office/drawing/2014/main" id="{7C12F1BC-0514-5B9D-F7A7-D369759644A7}"/>
+                </a:ext>
+              </a:extLst>
+            </p:cNvPr>
+            <p:cNvPicPr>
+              <a:picLocks noChangeAspect="1"/>
+            </p:cNvPicPr>
+            <p:nvPr/>
+          </p:nvPicPr>
+          <p:blipFill>
+            <a:blip r:embed="rId4"/>
+            <a:stretch>
+              <a:fillRect/>
+            </a:stretch>
+          </p:blipFill>
+          <p:spPr>
+            <a:xfrm>
+              <a:off x="833260" y="3872547"/>
+              <a:ext cx="4494566" cy="2681288"/>
+            </a:xfrm>
+            <a:prstGeom prst="rect">
+              <a:avLst/>
+            </a:prstGeom>
+          </p:spPr>
+        </p:pic>
+        <p:sp>
+          <p:nvSpPr>
+            <p:cNvPr id="2" name="TextBox 1">
+              <a:extLst>
+                <a:ext uri="{FF2B5EF4-FFF2-40B4-BE49-F238E27FC236}">
+                  <a16:creationId xmlns:a16="http://schemas.microsoft.com/office/drawing/2014/main" id="{5D00874C-A307-4798-EADD-45DD60D5D441}"/>
+                </a:ext>
+              </a:extLst>
+            </p:cNvPr>
+            <p:cNvSpPr txBox="1"/>
+            <p:nvPr/>
+          </p:nvSpPr>
+          <p:spPr>
+            <a:xfrm>
+              <a:off x="296992" y="-93882"/>
+              <a:ext cx="375920" cy="369332"/>
+            </a:xfrm>
+            <a:prstGeom prst="rect">
+              <a:avLst/>
+            </a:prstGeom>
+            <a:noFill/>
+          </p:spPr>
+          <p:txBody>
+            <a:bodyPr wrap="square" rtlCol="0">
+              <a:spAutoFit/>
+            </a:bodyPr>
+            <a:lstStyle/>
+            <a:p>
+              <a:r>
+                <a:rPr lang="en-US" dirty="0"/>
+                <a:t>a)</a:t>
+              </a:r>
+              <a:endParaRPr lang="nl-NL" dirty="0"/>
+            </a:p>
+          </p:txBody>
+        </p:sp>
+        <p:sp>
+          <p:nvSpPr>
+            <p:cNvPr id="6" name="TextBox 5">
+              <a:extLst>
+                <a:ext uri="{FF2B5EF4-FFF2-40B4-BE49-F238E27FC236}">
+                  <a16:creationId xmlns:a16="http://schemas.microsoft.com/office/drawing/2014/main" id="{0E18AE0F-F72D-A7E3-CA19-30B724EC8A6E}"/>
+                </a:ext>
+              </a:extLst>
+            </p:cNvPr>
+            <p:cNvSpPr txBox="1"/>
+            <p:nvPr/>
+          </p:nvSpPr>
+          <p:spPr>
+            <a:xfrm>
+              <a:off x="6248402" y="-43063"/>
+              <a:ext cx="433531" cy="369332"/>
+            </a:xfrm>
+            <a:prstGeom prst="rect">
+              <a:avLst/>
+            </a:prstGeom>
+            <a:noFill/>
+          </p:spPr>
+          <p:txBody>
+            <a:bodyPr wrap="square" rtlCol="0">
+              <a:spAutoFit/>
+            </a:bodyPr>
+            <a:lstStyle/>
+            <a:p>
+              <a:r>
+                <a:rPr lang="en-US" dirty="0"/>
+                <a:t>b)</a:t>
+              </a:r>
+              <a:endParaRPr lang="nl-NL" dirty="0"/>
+            </a:p>
+          </p:txBody>
+        </p:sp>
+        <p:sp>
+          <p:nvSpPr>
+            <p:cNvPr id="7" name="TextBox 6">
+              <a:extLst>
+                <a:ext uri="{FF2B5EF4-FFF2-40B4-BE49-F238E27FC236}">
+                  <a16:creationId xmlns:a16="http://schemas.microsoft.com/office/drawing/2014/main" id="{3CBF309A-C49F-5E99-83DD-613D08CD8D13}"/>
+                </a:ext>
+              </a:extLst>
+            </p:cNvPr>
+            <p:cNvSpPr txBox="1"/>
+            <p:nvPr/>
+          </p:nvSpPr>
+          <p:spPr>
+            <a:xfrm>
+              <a:off x="923507" y="3608408"/>
+              <a:ext cx="375920" cy="369332"/>
+            </a:xfrm>
+            <a:prstGeom prst="rect">
+              <a:avLst/>
+            </a:prstGeom>
+            <a:noFill/>
+          </p:spPr>
+          <p:txBody>
+            <a:bodyPr wrap="square" rtlCol="0">
+              <a:spAutoFit/>
+            </a:bodyPr>
+            <a:lstStyle/>
+            <a:p>
+              <a:r>
+                <a:rPr lang="en-US" dirty="0"/>
+                <a:t>c)</a:t>
+              </a:r>
+              <a:endParaRPr lang="nl-NL" dirty="0"/>
+            </a:p>
+          </p:txBody>
+        </p:sp>
+      </p:grpSp>
     </p:spTree>
     <p:extLst>
       <p:ext uri="{BB962C8B-B14F-4D97-AF65-F5344CB8AC3E}">
-        <p14:creationId xmlns:p14="http://schemas.microsoft.com/office/powerpoint/2010/main" val="2741206739"/>
+        <p14:creationId xmlns:p14="http://schemas.microsoft.com/office/powerpoint/2010/main" val="730969210"/>
       </p:ext>
     </p:extLst>
   </p:cSld>

--- a/Presentation1.pptx
+++ b/Presentation1.pptx
@@ -4,6 +4,9 @@
   <p:sldMasterIdLst>
     <p:sldMasterId id="2147483648" r:id="rId1"/>
   </p:sldMasterIdLst>
+  <p:notesMasterIdLst>
+    <p:notesMasterId r:id="rId13"/>
+  </p:notesMasterIdLst>
   <p:sldIdLst>
     <p:sldId id="258" r:id="rId2"/>
     <p:sldId id="259" r:id="rId3"/>
@@ -122,6 +125,1378 @@
 </p:presentation>
 </file>
 
+<file path=ppt/notesMasters/notesMaster1.xml><?xml version="1.0" encoding="utf-8"?>
+<p:notesMaster xmlns:a="http://schemas.openxmlformats.org/drawingml/2006/main" xmlns:r="http://schemas.openxmlformats.org/officeDocument/2006/relationships" xmlns:p="http://schemas.openxmlformats.org/presentationml/2006/main">
+  <p:cSld>
+    <p:bg>
+      <p:bgRef idx="1001">
+        <a:schemeClr val="bg1"/>
+      </p:bgRef>
+    </p:bg>
+    <p:spTree>
+      <p:nvGrpSpPr>
+        <p:cNvPr id="1" name=""/>
+        <p:cNvGrpSpPr/>
+        <p:nvPr/>
+      </p:nvGrpSpPr>
+      <p:grpSpPr>
+        <a:xfrm>
+          <a:off x="0" y="0"/>
+          <a:ext cx="0" cy="0"/>
+          <a:chOff x="0" y="0"/>
+          <a:chExt cx="0" cy="0"/>
+        </a:xfrm>
+      </p:grpSpPr>
+      <p:sp>
+        <p:nvSpPr>
+          <p:cNvPr id="2" name="Header Placeholder 1"/>
+          <p:cNvSpPr>
+            <a:spLocks noGrp="1"/>
+          </p:cNvSpPr>
+          <p:nvPr>
+            <p:ph type="hdr" sz="quarter"/>
+          </p:nvPr>
+        </p:nvSpPr>
+        <p:spPr>
+          <a:xfrm>
+            <a:off x="0" y="0"/>
+            <a:ext cx="2971800" cy="458788"/>
+          </a:xfrm>
+          <a:prstGeom prst="rect">
+            <a:avLst/>
+          </a:prstGeom>
+        </p:spPr>
+        <p:txBody>
+          <a:bodyPr vert="horz" lIns="91440" tIns="45720" rIns="91440" bIns="45720" rtlCol="0"/>
+          <a:lstStyle>
+            <a:lvl1pPr algn="l">
+              <a:defRPr sz="1200"/>
+            </a:lvl1pPr>
+          </a:lstStyle>
+          <a:p>
+            <a:endParaRPr lang="nl-NL"/>
+          </a:p>
+        </p:txBody>
+      </p:sp>
+      <p:sp>
+        <p:nvSpPr>
+          <p:cNvPr id="3" name="Date Placeholder 2"/>
+          <p:cNvSpPr>
+            <a:spLocks noGrp="1"/>
+          </p:cNvSpPr>
+          <p:nvPr>
+            <p:ph type="dt" idx="1"/>
+          </p:nvPr>
+        </p:nvSpPr>
+        <p:spPr>
+          <a:xfrm>
+            <a:off x="3884613" y="0"/>
+            <a:ext cx="2971800" cy="458788"/>
+          </a:xfrm>
+          <a:prstGeom prst="rect">
+            <a:avLst/>
+          </a:prstGeom>
+        </p:spPr>
+        <p:txBody>
+          <a:bodyPr vert="horz" lIns="91440" tIns="45720" rIns="91440" bIns="45720" rtlCol="0"/>
+          <a:lstStyle>
+            <a:lvl1pPr algn="r">
+              <a:defRPr sz="1200"/>
+            </a:lvl1pPr>
+          </a:lstStyle>
+          <a:p>
+            <a:fld id="{9F1D2C37-97C8-4F57-A043-6B0B5EA551A5}" type="datetimeFigureOut">
+              <a:rPr lang="nl-NL" smtClean="0"/>
+              <a:t>2-5-2025</a:t>
+            </a:fld>
+            <a:endParaRPr lang="nl-NL"/>
+          </a:p>
+        </p:txBody>
+      </p:sp>
+      <p:sp>
+        <p:nvSpPr>
+          <p:cNvPr id="4" name="Slide Image Placeholder 3"/>
+          <p:cNvSpPr>
+            <a:spLocks noGrp="1" noRot="1" noChangeAspect="1"/>
+          </p:cNvSpPr>
+          <p:nvPr>
+            <p:ph type="sldImg" idx="2"/>
+          </p:nvPr>
+        </p:nvSpPr>
+        <p:spPr>
+          <a:xfrm>
+            <a:off x="685800" y="1143000"/>
+            <a:ext cx="5486400" cy="3086100"/>
+          </a:xfrm>
+          <a:prstGeom prst="rect">
+            <a:avLst/>
+          </a:prstGeom>
+          <a:noFill/>
+          <a:ln w="12700">
+            <a:solidFill>
+              <a:prstClr val="black"/>
+            </a:solidFill>
+          </a:ln>
+        </p:spPr>
+        <p:txBody>
+          <a:bodyPr vert="horz" lIns="91440" tIns="45720" rIns="91440" bIns="45720" rtlCol="0" anchor="ctr"/>
+          <a:lstStyle/>
+          <a:p>
+            <a:endParaRPr lang="nl-NL"/>
+          </a:p>
+        </p:txBody>
+      </p:sp>
+      <p:sp>
+        <p:nvSpPr>
+          <p:cNvPr id="5" name="Notes Placeholder 4"/>
+          <p:cNvSpPr>
+            <a:spLocks noGrp="1"/>
+          </p:cNvSpPr>
+          <p:nvPr>
+            <p:ph type="body" sz="quarter" idx="3"/>
+          </p:nvPr>
+        </p:nvSpPr>
+        <p:spPr>
+          <a:xfrm>
+            <a:off x="685800" y="4400550"/>
+            <a:ext cx="5486400" cy="3600450"/>
+          </a:xfrm>
+          <a:prstGeom prst="rect">
+            <a:avLst/>
+          </a:prstGeom>
+        </p:spPr>
+        <p:txBody>
+          <a:bodyPr vert="horz" lIns="91440" tIns="45720" rIns="91440" bIns="45720" rtlCol="0"/>
+          <a:lstStyle/>
+          <a:p>
+            <a:pPr lvl="0"/>
+            <a:r>
+              <a:rPr lang="en-US"/>
+              <a:t>Click to edit Master text styles</a:t>
+            </a:r>
+          </a:p>
+          <a:p>
+            <a:pPr lvl="1"/>
+            <a:r>
+              <a:rPr lang="en-US"/>
+              <a:t>Second level</a:t>
+            </a:r>
+          </a:p>
+          <a:p>
+            <a:pPr lvl="2"/>
+            <a:r>
+              <a:rPr lang="en-US"/>
+              <a:t>Third level</a:t>
+            </a:r>
+          </a:p>
+          <a:p>
+            <a:pPr lvl="3"/>
+            <a:r>
+              <a:rPr lang="en-US"/>
+              <a:t>Fourth level</a:t>
+            </a:r>
+          </a:p>
+          <a:p>
+            <a:pPr lvl="4"/>
+            <a:r>
+              <a:rPr lang="en-US"/>
+              <a:t>Fifth level</a:t>
+            </a:r>
+            <a:endParaRPr lang="nl-NL"/>
+          </a:p>
+        </p:txBody>
+      </p:sp>
+      <p:sp>
+        <p:nvSpPr>
+          <p:cNvPr id="6" name="Footer Placeholder 5"/>
+          <p:cNvSpPr>
+            <a:spLocks noGrp="1"/>
+          </p:cNvSpPr>
+          <p:nvPr>
+            <p:ph type="ftr" sz="quarter" idx="4"/>
+          </p:nvPr>
+        </p:nvSpPr>
+        <p:spPr>
+          <a:xfrm>
+            <a:off x="0" y="8685213"/>
+            <a:ext cx="2971800" cy="458787"/>
+          </a:xfrm>
+          <a:prstGeom prst="rect">
+            <a:avLst/>
+          </a:prstGeom>
+        </p:spPr>
+        <p:txBody>
+          <a:bodyPr vert="horz" lIns="91440" tIns="45720" rIns="91440" bIns="45720" rtlCol="0" anchor="b"/>
+          <a:lstStyle>
+            <a:lvl1pPr algn="l">
+              <a:defRPr sz="1200"/>
+            </a:lvl1pPr>
+          </a:lstStyle>
+          <a:p>
+            <a:endParaRPr lang="nl-NL"/>
+          </a:p>
+        </p:txBody>
+      </p:sp>
+      <p:sp>
+        <p:nvSpPr>
+          <p:cNvPr id="7" name="Slide Number Placeholder 6"/>
+          <p:cNvSpPr>
+            <a:spLocks noGrp="1"/>
+          </p:cNvSpPr>
+          <p:nvPr>
+            <p:ph type="sldNum" sz="quarter" idx="5"/>
+          </p:nvPr>
+        </p:nvSpPr>
+        <p:spPr>
+          <a:xfrm>
+            <a:off x="3884613" y="8685213"/>
+            <a:ext cx="2971800" cy="458787"/>
+          </a:xfrm>
+          <a:prstGeom prst="rect">
+            <a:avLst/>
+          </a:prstGeom>
+        </p:spPr>
+        <p:txBody>
+          <a:bodyPr vert="horz" lIns="91440" tIns="45720" rIns="91440" bIns="45720" rtlCol="0" anchor="b"/>
+          <a:lstStyle>
+            <a:lvl1pPr algn="r">
+              <a:defRPr sz="1200"/>
+            </a:lvl1pPr>
+          </a:lstStyle>
+          <a:p>
+            <a:fld id="{CF211AA5-FF67-4171-A23C-F195C260B421}" type="slidenum">
+              <a:rPr lang="nl-NL" smtClean="0"/>
+              <a:t>‹#›</a:t>
+            </a:fld>
+            <a:endParaRPr lang="nl-NL"/>
+          </a:p>
+        </p:txBody>
+      </p:sp>
+    </p:spTree>
+    <p:extLst>
+      <p:ext uri="{BB962C8B-B14F-4D97-AF65-F5344CB8AC3E}">
+        <p14:creationId xmlns:p14="http://schemas.microsoft.com/office/powerpoint/2010/main" val="2382069746"/>
+      </p:ext>
+    </p:extLst>
+  </p:cSld>
+  <p:clrMap bg1="lt1" tx1="dk1" bg2="lt2" tx2="dk2" accent1="accent1" accent2="accent2" accent3="accent3" accent4="accent4" accent5="accent5" accent6="accent6" hlink="hlink" folHlink="folHlink"/>
+  <p:notesStyle>
+    <a:lvl1pPr marL="0" algn="l" defTabSz="914400" rtl="0" eaLnBrk="1" latinLnBrk="0" hangingPunct="1">
+      <a:defRPr sz="1200" kern="1200">
+        <a:solidFill>
+          <a:schemeClr val="tx1"/>
+        </a:solidFill>
+        <a:latin typeface="+mn-lt"/>
+        <a:ea typeface="+mn-ea"/>
+        <a:cs typeface="+mn-cs"/>
+      </a:defRPr>
+    </a:lvl1pPr>
+    <a:lvl2pPr marL="457200" algn="l" defTabSz="914400" rtl="0" eaLnBrk="1" latinLnBrk="0" hangingPunct="1">
+      <a:defRPr sz="1200" kern="1200">
+        <a:solidFill>
+          <a:schemeClr val="tx1"/>
+        </a:solidFill>
+        <a:latin typeface="+mn-lt"/>
+        <a:ea typeface="+mn-ea"/>
+        <a:cs typeface="+mn-cs"/>
+      </a:defRPr>
+    </a:lvl2pPr>
+    <a:lvl3pPr marL="914400" algn="l" defTabSz="914400" rtl="0" eaLnBrk="1" latinLnBrk="0" hangingPunct="1">
+      <a:defRPr sz="1200" kern="1200">
+        <a:solidFill>
+          <a:schemeClr val="tx1"/>
+        </a:solidFill>
+        <a:latin typeface="+mn-lt"/>
+        <a:ea typeface="+mn-ea"/>
+        <a:cs typeface="+mn-cs"/>
+      </a:defRPr>
+    </a:lvl3pPr>
+    <a:lvl4pPr marL="1371600" algn="l" defTabSz="914400" rtl="0" eaLnBrk="1" latinLnBrk="0" hangingPunct="1">
+      <a:defRPr sz="1200" kern="1200">
+        <a:solidFill>
+          <a:schemeClr val="tx1"/>
+        </a:solidFill>
+        <a:latin typeface="+mn-lt"/>
+        <a:ea typeface="+mn-ea"/>
+        <a:cs typeface="+mn-cs"/>
+      </a:defRPr>
+    </a:lvl4pPr>
+    <a:lvl5pPr marL="1828800" algn="l" defTabSz="914400" rtl="0" eaLnBrk="1" latinLnBrk="0" hangingPunct="1">
+      <a:defRPr sz="1200" kern="1200">
+        <a:solidFill>
+          <a:schemeClr val="tx1"/>
+        </a:solidFill>
+        <a:latin typeface="+mn-lt"/>
+        <a:ea typeface="+mn-ea"/>
+        <a:cs typeface="+mn-cs"/>
+      </a:defRPr>
+    </a:lvl5pPr>
+    <a:lvl6pPr marL="2286000" algn="l" defTabSz="914400" rtl="0" eaLnBrk="1" latinLnBrk="0" hangingPunct="1">
+      <a:defRPr sz="1200" kern="1200">
+        <a:solidFill>
+          <a:schemeClr val="tx1"/>
+        </a:solidFill>
+        <a:latin typeface="+mn-lt"/>
+        <a:ea typeface="+mn-ea"/>
+        <a:cs typeface="+mn-cs"/>
+      </a:defRPr>
+    </a:lvl6pPr>
+    <a:lvl7pPr marL="2743200" algn="l" defTabSz="914400" rtl="0" eaLnBrk="1" latinLnBrk="0" hangingPunct="1">
+      <a:defRPr sz="1200" kern="1200">
+        <a:solidFill>
+          <a:schemeClr val="tx1"/>
+        </a:solidFill>
+        <a:latin typeface="+mn-lt"/>
+        <a:ea typeface="+mn-ea"/>
+        <a:cs typeface="+mn-cs"/>
+      </a:defRPr>
+    </a:lvl7pPr>
+    <a:lvl8pPr marL="3200400" algn="l" defTabSz="914400" rtl="0" eaLnBrk="1" latinLnBrk="0" hangingPunct="1">
+      <a:defRPr sz="1200" kern="1200">
+        <a:solidFill>
+          <a:schemeClr val="tx1"/>
+        </a:solidFill>
+        <a:latin typeface="+mn-lt"/>
+        <a:ea typeface="+mn-ea"/>
+        <a:cs typeface="+mn-cs"/>
+      </a:defRPr>
+    </a:lvl8pPr>
+    <a:lvl9pPr marL="3657600" algn="l" defTabSz="914400" rtl="0" eaLnBrk="1" latinLnBrk="0" hangingPunct="1">
+      <a:defRPr sz="1200" kern="1200">
+        <a:solidFill>
+          <a:schemeClr val="tx1"/>
+        </a:solidFill>
+        <a:latin typeface="+mn-lt"/>
+        <a:ea typeface="+mn-ea"/>
+        <a:cs typeface="+mn-cs"/>
+      </a:defRPr>
+    </a:lvl9pPr>
+  </p:notesStyle>
+</p:notesMaster>
+</file>
+
+<file path=ppt/notesSlides/notesSlide1.xml><?xml version="1.0" encoding="utf-8"?>
+<p:notes xmlns:a="http://schemas.openxmlformats.org/drawingml/2006/main" xmlns:r="http://schemas.openxmlformats.org/officeDocument/2006/relationships" xmlns:p="http://schemas.openxmlformats.org/presentationml/2006/main">
+  <p:cSld>
+    <p:spTree>
+      <p:nvGrpSpPr>
+        <p:cNvPr id="1" name=""/>
+        <p:cNvGrpSpPr/>
+        <p:nvPr/>
+      </p:nvGrpSpPr>
+      <p:grpSpPr>
+        <a:xfrm>
+          <a:off x="0" y="0"/>
+          <a:ext cx="0" cy="0"/>
+          <a:chOff x="0" y="0"/>
+          <a:chExt cx="0" cy="0"/>
+        </a:xfrm>
+      </p:grpSpPr>
+      <p:sp>
+        <p:nvSpPr>
+          <p:cNvPr id="2" name="Slide Image Placeholder 1"/>
+          <p:cNvSpPr>
+            <a:spLocks noGrp="1" noRot="1" noChangeAspect="1"/>
+          </p:cNvSpPr>
+          <p:nvPr>
+            <p:ph type="sldImg"/>
+          </p:nvPr>
+        </p:nvSpPr>
+        <p:spPr/>
+      </p:sp>
+      <p:sp>
+        <p:nvSpPr>
+          <p:cNvPr id="3" name="Notes Placeholder 2"/>
+          <p:cNvSpPr>
+            <a:spLocks noGrp="1"/>
+          </p:cNvSpPr>
+          <p:nvPr>
+            <p:ph type="body" idx="1"/>
+          </p:nvPr>
+        </p:nvSpPr>
+        <p:spPr/>
+        <p:txBody>
+          <a:bodyPr/>
+          <a:lstStyle/>
+          <a:p>
+            <a:r>
+              <a:rPr lang="en-GB" dirty="0"/>
+              <a:t>From 2000 to 2024, Nairobi and Kinshasa exhibit significant declines in urban thermal stress as reflected in widespread cooling, while Lagos and Johannesburg show relatively stable UTFVI patterns with minimal change.</a:t>
+            </a:r>
+          </a:p>
+          <a:p>
+            <a:r>
+              <a:rPr lang="en-GB" b="1" dirty="0"/>
+              <a:t>a) Nairobi (2000–2024)</a:t>
+            </a:r>
+          </a:p>
+          <a:p>
+            <a:r>
+              <a:rPr lang="en-GB" dirty="0"/>
+              <a:t>Nairobi's UTFVI maps show a clear spatial shift from moderately warm zones (yellow-orange) in 2000 and 2010 toward cooler green areas by 2020 and especially in 2024, indicating widespread reduction in urban thermal stress.</a:t>
+            </a:r>
+          </a:p>
+          <a:p>
+            <a:r>
+              <a:rPr lang="en-GB" b="1" dirty="0"/>
+              <a:t>b) Lagos (2000–2024)</a:t>
+            </a:r>
+          </a:p>
+          <a:p>
+            <a:r>
+              <a:rPr lang="en-GB" dirty="0"/>
+              <a:t>Lagos remains relatively stable across all years, with minimal visible change in UTFVI values, suggesting consistent thermal conditions and limited expansion of heat-stressed zones.</a:t>
+            </a:r>
+          </a:p>
+          <a:p>
+            <a:r>
+              <a:rPr lang="en-GB" b="1" dirty="0"/>
+              <a:t>c) Johannesburg (2000–2024)</a:t>
+            </a:r>
+          </a:p>
+          <a:p>
+            <a:r>
+              <a:rPr lang="en-GB" dirty="0"/>
+              <a:t>Johannesburg shows a persistent yellow-green pattern across all years, with minor reductions in warm zones by 2024, pointing to moderate but stable urban heat levels over time.</a:t>
+            </a:r>
+          </a:p>
+          <a:p>
+            <a:r>
+              <a:rPr lang="en-GB" b="1" dirty="0"/>
+              <a:t>d) Kinshasa (2000–2024)</a:t>
+            </a:r>
+          </a:p>
+          <a:p>
+            <a:r>
+              <a:rPr lang="en-GB" dirty="0"/>
+              <a:t>Kinshasa’s thermal conditions improve noticeably from 2000 to 2024, with a significant decline in reddish heat-stressed areas and a rise in green, cooler zones, particularly after 2010.</a:t>
+            </a:r>
+          </a:p>
+          <a:p>
+            <a:endParaRPr lang="nl-NL" dirty="0"/>
+          </a:p>
+        </p:txBody>
+      </p:sp>
+      <p:sp>
+        <p:nvSpPr>
+          <p:cNvPr id="4" name="Slide Number Placeholder 3"/>
+          <p:cNvSpPr>
+            <a:spLocks noGrp="1"/>
+          </p:cNvSpPr>
+          <p:nvPr>
+            <p:ph type="sldNum" sz="quarter" idx="5"/>
+          </p:nvPr>
+        </p:nvSpPr>
+        <p:spPr/>
+        <p:txBody>
+          <a:bodyPr/>
+          <a:lstStyle/>
+          <a:p>
+            <a:fld id="{CF211AA5-FF67-4171-A23C-F195C260B421}" type="slidenum">
+              <a:rPr lang="nl-NL" smtClean="0"/>
+              <a:t>4</a:t>
+            </a:fld>
+            <a:endParaRPr lang="nl-NL"/>
+          </a:p>
+        </p:txBody>
+      </p:sp>
+    </p:spTree>
+    <p:extLst>
+      <p:ext uri="{BB962C8B-B14F-4D97-AF65-F5344CB8AC3E}">
+        <p14:creationId xmlns:p14="http://schemas.microsoft.com/office/powerpoint/2010/main" val="2567070209"/>
+      </p:ext>
+    </p:extLst>
+  </p:cSld>
+  <p:clrMapOvr>
+    <a:masterClrMapping/>
+  </p:clrMapOvr>
+</p:notes>
+</file>
+
+<file path=ppt/notesSlides/notesSlide2.xml><?xml version="1.0" encoding="utf-8"?>
+<p:notes xmlns:a="http://schemas.openxmlformats.org/drawingml/2006/main" xmlns:r="http://schemas.openxmlformats.org/officeDocument/2006/relationships" xmlns:p="http://schemas.openxmlformats.org/presentationml/2006/main">
+  <p:cSld>
+    <p:spTree>
+      <p:nvGrpSpPr>
+        <p:cNvPr id="1" name=""/>
+        <p:cNvGrpSpPr/>
+        <p:nvPr/>
+      </p:nvGrpSpPr>
+      <p:grpSpPr>
+        <a:xfrm>
+          <a:off x="0" y="0"/>
+          <a:ext cx="0" cy="0"/>
+          <a:chOff x="0" y="0"/>
+          <a:chExt cx="0" cy="0"/>
+        </a:xfrm>
+      </p:grpSpPr>
+      <p:sp>
+        <p:nvSpPr>
+          <p:cNvPr id="2" name="Slide Image Placeholder 1"/>
+          <p:cNvSpPr>
+            <a:spLocks noGrp="1" noRot="1" noChangeAspect="1"/>
+          </p:cNvSpPr>
+          <p:nvPr>
+            <p:ph type="sldImg"/>
+          </p:nvPr>
+        </p:nvSpPr>
+        <p:spPr/>
+      </p:sp>
+      <p:sp>
+        <p:nvSpPr>
+          <p:cNvPr id="3" name="Notes Placeholder 2"/>
+          <p:cNvSpPr>
+            <a:spLocks noGrp="1"/>
+          </p:cNvSpPr>
+          <p:nvPr>
+            <p:ph type="body" idx="1"/>
+          </p:nvPr>
+        </p:nvSpPr>
+        <p:spPr/>
+        <p:txBody>
+          <a:bodyPr/>
+          <a:lstStyle/>
+          <a:p>
+            <a:r>
+              <a:rPr lang="en-GB" dirty="0"/>
+              <a:t>Temperature anomalies are increasingly shifting toward cooler values in Johannesburg and Nairobi, while Kinshasa and Lagos show a clear warming trend, especially by 2024, indicating diverging climate dynamics across the cities.</a:t>
+            </a:r>
+          </a:p>
+          <a:p>
+            <a:r>
+              <a:rPr lang="en-GB" b="1" dirty="0"/>
+              <a:t>a) Nairobi</a:t>
+            </a:r>
+            <a:br>
+              <a:rPr lang="en-GB" dirty="0"/>
+            </a:br>
+            <a:r>
+              <a:rPr lang="en-GB" dirty="0"/>
+              <a:t>In Nairobi, the temperature anomaly distributions for 2000 and 2020 are relatively </a:t>
+            </a:r>
+            <a:r>
+              <a:rPr lang="en-GB" dirty="0" err="1"/>
+              <a:t>centered</a:t>
+            </a:r>
+            <a:r>
+              <a:rPr lang="en-GB" dirty="0"/>
+              <a:t> near zero, while 2010 shows a leftward shift indicating cooler conditions. By 2024, the distribution broadens and slightly shifts left again, suggesting increased variability and potential cooling compared to 2020.</a:t>
+            </a:r>
+          </a:p>
+          <a:p>
+            <a:r>
+              <a:rPr lang="en-GB" b="1" dirty="0"/>
+              <a:t>b) Johannesburg</a:t>
+            </a:r>
+            <a:br>
+              <a:rPr lang="en-GB" dirty="0"/>
+            </a:br>
+            <a:r>
+              <a:rPr lang="en-GB" dirty="0" err="1"/>
+              <a:t>Johannesburg</a:t>
+            </a:r>
+            <a:r>
+              <a:rPr lang="en-GB" dirty="0"/>
+              <a:t> exhibits a clear warming trend, with the 2000 distribution </a:t>
+            </a:r>
+            <a:r>
+              <a:rPr lang="en-GB" dirty="0" err="1"/>
+              <a:t>centered</a:t>
+            </a:r>
+            <a:r>
+              <a:rPr lang="en-GB" dirty="0"/>
+              <a:t> above zero, while 2010, 2020, and 2024 shift progressively leftward into negative anomalies. This indicates a transition from warm anomalies in 2000 to consistently cooler conditions over time, with 2024 showing the most pronounced cooling.</a:t>
+            </a:r>
+          </a:p>
+          <a:p>
+            <a:r>
+              <a:rPr lang="en-GB" b="1" dirty="0"/>
+              <a:t>c) Kinshasa</a:t>
+            </a:r>
+            <a:br>
+              <a:rPr lang="en-GB" dirty="0"/>
+            </a:br>
+            <a:r>
+              <a:rPr lang="en-GB" dirty="0"/>
+              <a:t>Kinshasa's temperature anomaly distribution for 2000 and 2010 remains skewed toward negative values, suggesting cooler conditions during these years. However, by 2024 the distribution shifts markedly to the right, indicating a warming trend with higher frequencies of positive temperature anomalies.</a:t>
+            </a:r>
+          </a:p>
+          <a:p>
+            <a:r>
+              <a:rPr lang="en-GB" b="1" dirty="0"/>
+              <a:t>d) Lagos</a:t>
+            </a:r>
+            <a:br>
+              <a:rPr lang="en-GB" dirty="0"/>
+            </a:br>
+            <a:r>
+              <a:rPr lang="en-GB" dirty="0" err="1"/>
+              <a:t>Lagos</a:t>
+            </a:r>
+            <a:r>
+              <a:rPr lang="en-GB" dirty="0"/>
+              <a:t> shows overlapping distributions from 2000 through 2020, generally </a:t>
+            </a:r>
+            <a:r>
+              <a:rPr lang="en-GB" dirty="0" err="1"/>
+              <a:t>centered</a:t>
+            </a:r>
+            <a:r>
+              <a:rPr lang="en-GB" dirty="0"/>
+              <a:t> near or slightly below zero, indicating moderate and relatively stable anomalies. In contrast, the 2024 distribution shifts distinctly to the right, reflecting a significant rise in temperature anomalies and a shift toward warmer conditions.</a:t>
+            </a:r>
+          </a:p>
+          <a:p>
+            <a:endParaRPr lang="nl-NL" dirty="0"/>
+          </a:p>
+        </p:txBody>
+      </p:sp>
+      <p:sp>
+        <p:nvSpPr>
+          <p:cNvPr id="4" name="Slide Number Placeholder 3"/>
+          <p:cNvSpPr>
+            <a:spLocks noGrp="1"/>
+          </p:cNvSpPr>
+          <p:nvPr>
+            <p:ph type="sldNum" sz="quarter" idx="5"/>
+          </p:nvPr>
+        </p:nvSpPr>
+        <p:spPr/>
+        <p:txBody>
+          <a:bodyPr/>
+          <a:lstStyle/>
+          <a:p>
+            <a:fld id="{CF211AA5-FF67-4171-A23C-F195C260B421}" type="slidenum">
+              <a:rPr lang="nl-NL" smtClean="0"/>
+              <a:t>6</a:t>
+            </a:fld>
+            <a:endParaRPr lang="nl-NL"/>
+          </a:p>
+        </p:txBody>
+      </p:sp>
+    </p:spTree>
+    <p:extLst>
+      <p:ext uri="{BB962C8B-B14F-4D97-AF65-F5344CB8AC3E}">
+        <p14:creationId xmlns:p14="http://schemas.microsoft.com/office/powerpoint/2010/main" val="1689700821"/>
+      </p:ext>
+    </p:extLst>
+  </p:cSld>
+  <p:clrMapOvr>
+    <a:masterClrMapping/>
+  </p:clrMapOvr>
+</p:notes>
+</file>
+
+<file path=ppt/notesSlides/notesSlide3.xml><?xml version="1.0" encoding="utf-8"?>
+<p:notes xmlns:a="http://schemas.openxmlformats.org/drawingml/2006/main" xmlns:r="http://schemas.openxmlformats.org/officeDocument/2006/relationships" xmlns:p="http://schemas.openxmlformats.org/presentationml/2006/main">
+  <p:cSld>
+    <p:spTree>
+      <p:nvGrpSpPr>
+        <p:cNvPr id="1" name=""/>
+        <p:cNvGrpSpPr/>
+        <p:nvPr/>
+      </p:nvGrpSpPr>
+      <p:grpSpPr>
+        <a:xfrm>
+          <a:off x="0" y="0"/>
+          <a:ext cx="0" cy="0"/>
+          <a:chOff x="0" y="0"/>
+          <a:chExt cx="0" cy="0"/>
+        </a:xfrm>
+      </p:grpSpPr>
+      <p:sp>
+        <p:nvSpPr>
+          <p:cNvPr id="2" name="Slide Image Placeholder 1"/>
+          <p:cNvSpPr>
+            <a:spLocks noGrp="1" noRot="1" noChangeAspect="1"/>
+          </p:cNvSpPr>
+          <p:nvPr>
+            <p:ph type="sldImg"/>
+          </p:nvPr>
+        </p:nvSpPr>
+        <p:spPr/>
+      </p:sp>
+      <p:sp>
+        <p:nvSpPr>
+          <p:cNvPr id="3" name="Notes Placeholder 2"/>
+          <p:cNvSpPr>
+            <a:spLocks noGrp="1"/>
+          </p:cNvSpPr>
+          <p:nvPr>
+            <p:ph type="body" idx="1"/>
+          </p:nvPr>
+        </p:nvSpPr>
+        <p:spPr/>
+        <p:txBody>
+          <a:bodyPr/>
+          <a:lstStyle/>
+          <a:p>
+            <a:r>
+              <a:rPr lang="en-GB" dirty="0"/>
+              <a:t>Urban thermal stress is intensifying in Nairobi and gradually emerging in Kinshasa, while Johannesburg and Lagos remain relatively stable with minimal change in urban heat variability over time.</a:t>
+            </a:r>
+          </a:p>
+          <a:p>
+            <a:endParaRPr lang="nl-NL" dirty="0"/>
+          </a:p>
+        </p:txBody>
+      </p:sp>
+      <p:sp>
+        <p:nvSpPr>
+          <p:cNvPr id="4" name="Slide Number Placeholder 3"/>
+          <p:cNvSpPr>
+            <a:spLocks noGrp="1"/>
+          </p:cNvSpPr>
+          <p:nvPr>
+            <p:ph type="sldNum" sz="quarter" idx="5"/>
+          </p:nvPr>
+        </p:nvSpPr>
+        <p:spPr/>
+        <p:txBody>
+          <a:bodyPr/>
+          <a:lstStyle/>
+          <a:p>
+            <a:fld id="{CF211AA5-FF67-4171-A23C-F195C260B421}" type="slidenum">
+              <a:rPr lang="nl-NL" smtClean="0"/>
+              <a:t>7</a:t>
+            </a:fld>
+            <a:endParaRPr lang="nl-NL"/>
+          </a:p>
+        </p:txBody>
+      </p:sp>
+    </p:spTree>
+    <p:extLst>
+      <p:ext uri="{BB962C8B-B14F-4D97-AF65-F5344CB8AC3E}">
+        <p14:creationId xmlns:p14="http://schemas.microsoft.com/office/powerpoint/2010/main" val="1225148974"/>
+      </p:ext>
+    </p:extLst>
+  </p:cSld>
+  <p:clrMapOvr>
+    <a:masterClrMapping/>
+  </p:clrMapOvr>
+</p:notes>
+</file>
+
+<file path=ppt/notesSlides/notesSlide4.xml><?xml version="1.0" encoding="utf-8"?>
+<p:notes xmlns:a="http://schemas.openxmlformats.org/drawingml/2006/main" xmlns:r="http://schemas.openxmlformats.org/officeDocument/2006/relationships" xmlns:p="http://schemas.openxmlformats.org/presentationml/2006/main">
+  <p:cSld>
+    <p:spTree>
+      <p:nvGrpSpPr>
+        <p:cNvPr id="1" name=""/>
+        <p:cNvGrpSpPr/>
+        <p:nvPr/>
+      </p:nvGrpSpPr>
+      <p:grpSpPr>
+        <a:xfrm>
+          <a:off x="0" y="0"/>
+          <a:ext cx="0" cy="0"/>
+          <a:chOff x="0" y="0"/>
+          <a:chExt cx="0" cy="0"/>
+        </a:xfrm>
+      </p:grpSpPr>
+      <p:sp>
+        <p:nvSpPr>
+          <p:cNvPr id="2" name="Slide Image Placeholder 1"/>
+          <p:cNvSpPr>
+            <a:spLocks noGrp="1" noRot="1" noChangeAspect="1"/>
+          </p:cNvSpPr>
+          <p:nvPr>
+            <p:ph type="sldImg"/>
+          </p:nvPr>
+        </p:nvSpPr>
+        <p:spPr/>
+      </p:sp>
+      <p:sp>
+        <p:nvSpPr>
+          <p:cNvPr id="3" name="Notes Placeholder 2"/>
+          <p:cNvSpPr>
+            <a:spLocks noGrp="1"/>
+          </p:cNvSpPr>
+          <p:nvPr>
+            <p:ph type="body" idx="1"/>
+          </p:nvPr>
+        </p:nvSpPr>
+        <p:spPr/>
+        <p:txBody>
+          <a:bodyPr/>
+          <a:lstStyle/>
+          <a:p>
+            <a:pPr marL="0" marR="0" lvl="0" indent="0" algn="l" defTabSz="914400" rtl="0" eaLnBrk="1" fontAlgn="auto" latinLnBrk="0" hangingPunct="1">
+              <a:lnSpc>
+                <a:spcPct val="100000"/>
+              </a:lnSpc>
+              <a:spcBef>
+                <a:spcPts val="0"/>
+              </a:spcBef>
+              <a:spcAft>
+                <a:spcPts val="0"/>
+              </a:spcAft>
+              <a:buClrTx/>
+              <a:buSzTx/>
+              <a:buFontTx/>
+              <a:buNone/>
+              <a:tabLst/>
+              <a:defRPr/>
+            </a:pPr>
+            <a:r>
+              <a:rPr lang="en-GB" dirty="0"/>
+              <a:t>Johannesburg is experiencing a steady and consistent shift toward surface cooling across all land cover types, especially in built-up areas, from 2000 to 2024.</a:t>
+            </a:r>
+            <a:endParaRPr lang="en-GB" b="1" dirty="0"/>
+          </a:p>
+          <a:p>
+            <a:r>
+              <a:rPr lang="en-GB" b="1" dirty="0"/>
+              <a:t>a) Year 2000</a:t>
+            </a:r>
+            <a:br>
+              <a:rPr lang="en-GB" dirty="0"/>
+            </a:br>
+            <a:r>
+              <a:rPr lang="en-GB" dirty="0"/>
+              <a:t>In 2000, temperature anomalies in Johannesburg showed mixed distributions, with vegetation and built-up areas clustered near zero while water bodies had a slightly cooler bias.</a:t>
+            </a:r>
+          </a:p>
+          <a:p>
+            <a:r>
+              <a:rPr lang="en-GB" b="1" dirty="0"/>
+              <a:t>b) Year 2010</a:t>
+            </a:r>
+            <a:br>
+              <a:rPr lang="en-GB" dirty="0"/>
+            </a:br>
+            <a:r>
+              <a:rPr lang="en-GB" dirty="0"/>
+              <a:t>By 2010, all three land cover classes—vegetation, built-up, and water—converged toward more compact distributions </a:t>
+            </a:r>
+            <a:r>
+              <a:rPr lang="en-GB" dirty="0" err="1"/>
+              <a:t>centered</a:t>
+            </a:r>
+            <a:r>
+              <a:rPr lang="en-GB" dirty="0"/>
+              <a:t> around slightly negative anomalies, indicating mild cooling.</a:t>
+            </a:r>
+          </a:p>
+          <a:p>
+            <a:r>
+              <a:rPr lang="en-GB" b="1" dirty="0"/>
+              <a:t>c) Year 2020</a:t>
+            </a:r>
+            <a:br>
+              <a:rPr lang="en-GB" dirty="0"/>
+            </a:br>
+            <a:r>
+              <a:rPr lang="en-GB" dirty="0"/>
+              <a:t>In 2020, the distributions for all LULC classes shifted more clearly into negative anomalies, with built-up areas showing the highest density of cooler values.</a:t>
+            </a:r>
+          </a:p>
+          <a:p>
+            <a:r>
+              <a:rPr lang="en-GB" b="1" dirty="0"/>
+              <a:t>d) Year 2024</a:t>
+            </a:r>
+            <a:br>
+              <a:rPr lang="en-GB" dirty="0"/>
+            </a:br>
+            <a:r>
+              <a:rPr lang="en-GB" dirty="0"/>
+              <a:t>By 2024, all land cover classes displayed consistently negative anomaly distributions, with little overlap near zero, highlighting intensified and uniform cooling across Johannesburg's surface.</a:t>
+            </a:r>
+          </a:p>
+          <a:p>
+            <a:endParaRPr lang="nl-NL" dirty="0"/>
+          </a:p>
+        </p:txBody>
+      </p:sp>
+      <p:sp>
+        <p:nvSpPr>
+          <p:cNvPr id="4" name="Slide Number Placeholder 3"/>
+          <p:cNvSpPr>
+            <a:spLocks noGrp="1"/>
+          </p:cNvSpPr>
+          <p:nvPr>
+            <p:ph type="sldNum" sz="quarter" idx="5"/>
+          </p:nvPr>
+        </p:nvSpPr>
+        <p:spPr/>
+        <p:txBody>
+          <a:bodyPr/>
+          <a:lstStyle/>
+          <a:p>
+            <a:fld id="{CF211AA5-FF67-4171-A23C-F195C260B421}" type="slidenum">
+              <a:rPr lang="nl-NL" smtClean="0"/>
+              <a:t>8</a:t>
+            </a:fld>
+            <a:endParaRPr lang="nl-NL"/>
+          </a:p>
+        </p:txBody>
+      </p:sp>
+    </p:spTree>
+    <p:extLst>
+      <p:ext uri="{BB962C8B-B14F-4D97-AF65-F5344CB8AC3E}">
+        <p14:creationId xmlns:p14="http://schemas.microsoft.com/office/powerpoint/2010/main" val="2184675498"/>
+      </p:ext>
+    </p:extLst>
+  </p:cSld>
+  <p:clrMapOvr>
+    <a:masterClrMapping/>
+  </p:clrMapOvr>
+</p:notes>
+</file>
+
+<file path=ppt/notesSlides/notesSlide5.xml><?xml version="1.0" encoding="utf-8"?>
+<p:notes xmlns:a="http://schemas.openxmlformats.org/drawingml/2006/main" xmlns:r="http://schemas.openxmlformats.org/officeDocument/2006/relationships" xmlns:p="http://schemas.openxmlformats.org/presentationml/2006/main">
+  <p:cSld>
+    <p:spTree>
+      <p:nvGrpSpPr>
+        <p:cNvPr id="1" name=""/>
+        <p:cNvGrpSpPr/>
+        <p:nvPr/>
+      </p:nvGrpSpPr>
+      <p:grpSpPr>
+        <a:xfrm>
+          <a:off x="0" y="0"/>
+          <a:ext cx="0" cy="0"/>
+          <a:chOff x="0" y="0"/>
+          <a:chExt cx="0" cy="0"/>
+        </a:xfrm>
+      </p:grpSpPr>
+      <p:sp>
+        <p:nvSpPr>
+          <p:cNvPr id="2" name="Slide Image Placeholder 1"/>
+          <p:cNvSpPr>
+            <a:spLocks noGrp="1" noRot="1" noChangeAspect="1"/>
+          </p:cNvSpPr>
+          <p:nvPr>
+            <p:ph type="sldImg"/>
+          </p:nvPr>
+        </p:nvSpPr>
+        <p:spPr/>
+      </p:sp>
+      <p:sp>
+        <p:nvSpPr>
+          <p:cNvPr id="3" name="Notes Placeholder 2"/>
+          <p:cNvSpPr>
+            <a:spLocks noGrp="1"/>
+          </p:cNvSpPr>
+          <p:nvPr>
+            <p:ph type="body" idx="1"/>
+          </p:nvPr>
+        </p:nvSpPr>
+        <p:spPr/>
+        <p:txBody>
+          <a:bodyPr/>
+          <a:lstStyle/>
+          <a:p>
+            <a:r>
+              <a:rPr lang="en-GB" dirty="0"/>
+              <a:t>In Johannesburg, built-up land cover is the primary driver of urban heat, strongly associated with higher UTFVI and cooler surface anomalies, while water and vegetation consistently mitigate thermal stress.</a:t>
+            </a:r>
+            <a:endParaRPr lang="en-GB" b="1" dirty="0"/>
+          </a:p>
+          <a:p>
+            <a:r>
+              <a:rPr lang="en-GB" b="1" dirty="0"/>
+              <a:t>a) Temperature Anomaly Distribution by LULC (2020)</a:t>
+            </a:r>
+            <a:br>
+              <a:rPr lang="en-GB" dirty="0"/>
+            </a:br>
+            <a:r>
+              <a:rPr lang="en-GB" dirty="0"/>
+              <a:t>In 2020, built-up areas in Johannesburg experienced the most consistent and pronounced negative temperature anomalies, while vegetation and water showed broader and less frequent cooler anomalies.</a:t>
+            </a:r>
+          </a:p>
+          <a:p>
+            <a:r>
+              <a:rPr lang="en-GB" b="1" dirty="0"/>
+              <a:t>b) UTFVI Distribution by LULC (2020)</a:t>
+            </a:r>
+            <a:br>
+              <a:rPr lang="en-GB" dirty="0"/>
+            </a:br>
+            <a:r>
+              <a:rPr lang="en-GB" dirty="0"/>
+              <a:t>UTFVI values were highest and most positive in built-up areas, while vegetation and especially water had more negative values, indicating lower urban heat stress in natural land cover types.</a:t>
+            </a:r>
+          </a:p>
+          <a:p>
+            <a:r>
+              <a:rPr lang="en-GB" b="1" dirty="0"/>
+              <a:t>c) LULC Predictors vs UTFVI – Regression Plot</a:t>
+            </a:r>
+            <a:br>
+              <a:rPr lang="en-GB" dirty="0"/>
+            </a:br>
+            <a:r>
+              <a:rPr lang="en-GB" dirty="0"/>
+              <a:t>Built-up areas showed the strongest positive correlation with UTFVI (r = 0.56), suggesting that increased urbanization significantly raises thermal stress, whereas water (r = -0.43) and vegetation (r = -0.36) were negatively correlated, confirming their cooling effects</a:t>
+            </a:r>
+          </a:p>
+          <a:p>
+            <a:endParaRPr lang="nl-NL" dirty="0"/>
+          </a:p>
+        </p:txBody>
+      </p:sp>
+      <p:sp>
+        <p:nvSpPr>
+          <p:cNvPr id="4" name="Slide Number Placeholder 3"/>
+          <p:cNvSpPr>
+            <a:spLocks noGrp="1"/>
+          </p:cNvSpPr>
+          <p:nvPr>
+            <p:ph type="sldNum" sz="quarter" idx="5"/>
+          </p:nvPr>
+        </p:nvSpPr>
+        <p:spPr/>
+        <p:txBody>
+          <a:bodyPr/>
+          <a:lstStyle/>
+          <a:p>
+            <a:fld id="{CF211AA5-FF67-4171-A23C-F195C260B421}" type="slidenum">
+              <a:rPr lang="nl-NL" smtClean="0"/>
+              <a:t>9</a:t>
+            </a:fld>
+            <a:endParaRPr lang="nl-NL"/>
+          </a:p>
+        </p:txBody>
+      </p:sp>
+    </p:spTree>
+    <p:extLst>
+      <p:ext uri="{BB962C8B-B14F-4D97-AF65-F5344CB8AC3E}">
+        <p14:creationId xmlns:p14="http://schemas.microsoft.com/office/powerpoint/2010/main" val="2303735743"/>
+      </p:ext>
+    </p:extLst>
+  </p:cSld>
+  <p:clrMapOvr>
+    <a:masterClrMapping/>
+  </p:clrMapOvr>
+</p:notes>
+</file>
+
+<file path=ppt/notesSlides/notesSlide6.xml><?xml version="1.0" encoding="utf-8"?>
+<p:notes xmlns:a="http://schemas.openxmlformats.org/drawingml/2006/main" xmlns:r="http://schemas.openxmlformats.org/officeDocument/2006/relationships" xmlns:p="http://schemas.openxmlformats.org/presentationml/2006/main">
+  <p:cSld>
+    <p:spTree>
+      <p:nvGrpSpPr>
+        <p:cNvPr id="1" name=""/>
+        <p:cNvGrpSpPr/>
+        <p:nvPr/>
+      </p:nvGrpSpPr>
+      <p:grpSpPr>
+        <a:xfrm>
+          <a:off x="0" y="0"/>
+          <a:ext cx="0" cy="0"/>
+          <a:chOff x="0" y="0"/>
+          <a:chExt cx="0" cy="0"/>
+        </a:xfrm>
+      </p:grpSpPr>
+      <p:sp>
+        <p:nvSpPr>
+          <p:cNvPr id="2" name="Slide Image Placeholder 1"/>
+          <p:cNvSpPr>
+            <a:spLocks noGrp="1" noRot="1" noChangeAspect="1"/>
+          </p:cNvSpPr>
+          <p:nvPr>
+            <p:ph type="sldImg"/>
+          </p:nvPr>
+        </p:nvSpPr>
+        <p:spPr/>
+      </p:sp>
+      <p:sp>
+        <p:nvSpPr>
+          <p:cNvPr id="3" name="Notes Placeholder 2"/>
+          <p:cNvSpPr>
+            <a:spLocks noGrp="1"/>
+          </p:cNvSpPr>
+          <p:nvPr>
+            <p:ph type="body" idx="1"/>
+          </p:nvPr>
+        </p:nvSpPr>
+        <p:spPr/>
+        <p:txBody>
+          <a:bodyPr/>
+          <a:lstStyle/>
+          <a:p>
+            <a:r>
+              <a:rPr lang="en-GB" dirty="0"/>
+              <a:t>Across all cities, gains or persistence in built-up areas consistently drive higher UTFVI values, while loss of vegetation contributes to thermal stress, confirming urban expansion and vegetation decline as key contributors to rising heat vulnerability.</a:t>
+            </a:r>
+          </a:p>
+          <a:p>
+            <a:r>
+              <a:rPr lang="en-GB" b="1" dirty="0"/>
+              <a:t>a) Johannesburg (UTFVI Change by LULC Transition)</a:t>
+            </a:r>
+            <a:br>
+              <a:rPr lang="en-GB" dirty="0"/>
+            </a:br>
+            <a:r>
+              <a:rPr lang="en-GB" dirty="0"/>
+              <a:t>In Johannesburg, stable built-up areas (code 11) and new gains in built land (code 1) are associated with positive UTFVI changes, suggesting increased urban heat stress.</a:t>
+            </a:r>
+          </a:p>
+          <a:p>
+            <a:r>
+              <a:rPr lang="en-GB" b="1" dirty="0"/>
+              <a:t>b) Nairobi (UTFVI Change by LULC Transition)</a:t>
+            </a:r>
+            <a:br>
+              <a:rPr lang="en-GB" dirty="0"/>
+            </a:br>
+            <a:r>
+              <a:rPr lang="en-GB" dirty="0"/>
+              <a:t>Nairobi shows a mix of positive and negative UTFVI changes, but vegetation loss (code -1) consistently leads to increased thermal stress.</a:t>
+            </a:r>
+          </a:p>
+          <a:p>
+            <a:r>
+              <a:rPr lang="en-GB" b="1" dirty="0"/>
+              <a:t>c) Lagos (UTFVI Change by LULC Transition)</a:t>
+            </a:r>
+            <a:br>
+              <a:rPr lang="en-GB" dirty="0"/>
+            </a:br>
+            <a:r>
+              <a:rPr lang="en-GB" dirty="0"/>
+              <a:t>Lagos exhibits relatively moderate UTFVI increases for both built and vegetation transitions, though built-up gains and stability (code 1 and 11) again show slight positive shifts.</a:t>
+            </a:r>
+          </a:p>
+          <a:p>
+            <a:r>
+              <a:rPr lang="en-GB" b="1" dirty="0"/>
+              <a:t>d) Kinshasa (UTFVI Change by LULC Transition)</a:t>
+            </a:r>
+            <a:br>
+              <a:rPr lang="en-GB" dirty="0"/>
+            </a:br>
+            <a:r>
+              <a:rPr lang="en-GB" dirty="0"/>
+              <a:t>Kinshasa has the most dispersed pattern, but built-up gains and vegetation loss are associated with higher UTFVI values, implying emerging heat pressure.</a:t>
+            </a:r>
+          </a:p>
+          <a:p>
+            <a:r>
+              <a:rPr lang="en-GB" b="1" dirty="0"/>
+              <a:t>e) Pixel-wise Correlation (Johannesburg)</a:t>
+            </a:r>
+            <a:br>
+              <a:rPr lang="en-GB" dirty="0"/>
+            </a:br>
+            <a:r>
+              <a:rPr lang="en-GB" dirty="0"/>
+              <a:t>In Johannesburg, built-up pixel gains are strongly positively correlated (r = 0.21) with increased UTFVI, while vegetation change has a weaker but significant negative correlation (r = -0.03).</a:t>
+            </a:r>
+          </a:p>
+          <a:p>
+            <a:r>
+              <a:rPr lang="en-GB" b="1" dirty="0"/>
+              <a:t>f) Regression Coefficients (All Cities)</a:t>
+            </a:r>
+            <a:br>
+              <a:rPr lang="en-GB" dirty="0"/>
+            </a:br>
+            <a:r>
+              <a:rPr lang="en-GB" dirty="0"/>
+              <a:t>Regression results confirm that vegetation and water have a small but consistent cooling effect on UTFVI across all cities, with vegetation having a slightly stronger influence.</a:t>
+            </a:r>
+          </a:p>
+          <a:p>
+            <a:endParaRPr lang="nl-NL" dirty="0"/>
+          </a:p>
+        </p:txBody>
+      </p:sp>
+      <p:sp>
+        <p:nvSpPr>
+          <p:cNvPr id="4" name="Slide Number Placeholder 3"/>
+          <p:cNvSpPr>
+            <a:spLocks noGrp="1"/>
+          </p:cNvSpPr>
+          <p:nvPr>
+            <p:ph type="sldNum" sz="quarter" idx="5"/>
+          </p:nvPr>
+        </p:nvSpPr>
+        <p:spPr/>
+        <p:txBody>
+          <a:bodyPr/>
+          <a:lstStyle/>
+          <a:p>
+            <a:fld id="{CF211AA5-FF67-4171-A23C-F195C260B421}" type="slidenum">
+              <a:rPr lang="nl-NL" smtClean="0"/>
+              <a:t>10</a:t>
+            </a:fld>
+            <a:endParaRPr lang="nl-NL"/>
+          </a:p>
+        </p:txBody>
+      </p:sp>
+    </p:spTree>
+    <p:extLst>
+      <p:ext uri="{BB962C8B-B14F-4D97-AF65-F5344CB8AC3E}">
+        <p14:creationId xmlns:p14="http://schemas.microsoft.com/office/powerpoint/2010/main" val="2228011068"/>
+      </p:ext>
+    </p:extLst>
+  </p:cSld>
+  <p:clrMapOvr>
+    <a:masterClrMapping/>
+  </p:clrMapOvr>
+</p:notes>
+</file>
+
+<file path=ppt/notesSlides/notesSlide7.xml><?xml version="1.0" encoding="utf-8"?>
+<p:notes xmlns:a="http://schemas.openxmlformats.org/drawingml/2006/main" xmlns:r="http://schemas.openxmlformats.org/officeDocument/2006/relationships" xmlns:p="http://schemas.openxmlformats.org/presentationml/2006/main">
+  <p:cSld>
+    <p:spTree>
+      <p:nvGrpSpPr>
+        <p:cNvPr id="1" name=""/>
+        <p:cNvGrpSpPr/>
+        <p:nvPr/>
+      </p:nvGrpSpPr>
+      <p:grpSpPr>
+        <a:xfrm>
+          <a:off x="0" y="0"/>
+          <a:ext cx="0" cy="0"/>
+          <a:chOff x="0" y="0"/>
+          <a:chExt cx="0" cy="0"/>
+        </a:xfrm>
+      </p:grpSpPr>
+      <p:sp>
+        <p:nvSpPr>
+          <p:cNvPr id="2" name="Slide Image Placeholder 1"/>
+          <p:cNvSpPr>
+            <a:spLocks noGrp="1" noRot="1" noChangeAspect="1"/>
+          </p:cNvSpPr>
+          <p:nvPr>
+            <p:ph type="sldImg"/>
+          </p:nvPr>
+        </p:nvSpPr>
+        <p:spPr/>
+      </p:sp>
+      <p:sp>
+        <p:nvSpPr>
+          <p:cNvPr id="3" name="Notes Placeholder 2"/>
+          <p:cNvSpPr>
+            <a:spLocks noGrp="1"/>
+          </p:cNvSpPr>
+          <p:nvPr>
+            <p:ph type="body" idx="1"/>
+          </p:nvPr>
+        </p:nvSpPr>
+        <p:spPr/>
+        <p:txBody>
+          <a:bodyPr/>
+          <a:lstStyle/>
+          <a:p>
+            <a:r>
+              <a:rPr lang="en-GB" dirty="0"/>
+              <a:t>Across all cities, built-up land consistently raises UTFVI values, while vegetation and water contribute to lowering urban thermal stress, though the strength of these effects varies by city.</a:t>
+            </a:r>
+          </a:p>
+          <a:p>
+            <a:r>
+              <a:rPr lang="en-GB" b="1" dirty="0"/>
+              <a:t>a) Nairobi</a:t>
+            </a:r>
+            <a:br>
+              <a:rPr lang="en-GB" dirty="0"/>
+            </a:br>
+            <a:r>
+              <a:rPr lang="en-GB" dirty="0"/>
+              <a:t>In Nairobi, built-up areas have a strong positive influence on UTFVI, while vegetation and water both contribute to lowering thermal stress, as indicated by their negative slopes.</a:t>
+            </a:r>
+          </a:p>
+          <a:p>
+            <a:r>
+              <a:rPr lang="en-GB" b="1" dirty="0"/>
+              <a:t>b) Lagos</a:t>
+            </a:r>
+            <a:br>
+              <a:rPr lang="en-GB" dirty="0"/>
+            </a:br>
+            <a:r>
+              <a:rPr lang="en-GB" dirty="0" err="1"/>
+              <a:t>Lagos</a:t>
+            </a:r>
+            <a:r>
+              <a:rPr lang="en-GB" dirty="0"/>
+              <a:t> exhibits weaker relationships, but the general trend still shows built-up areas increasing UTFVI and vegetation slightly reducing it, with minimal effect from water.</a:t>
+            </a:r>
+          </a:p>
+          <a:p>
+            <a:r>
+              <a:rPr lang="en-GB" b="1" dirty="0"/>
+              <a:t>c) Johannesburg</a:t>
+            </a:r>
+            <a:br>
+              <a:rPr lang="en-GB" dirty="0"/>
+            </a:br>
+            <a:r>
+              <a:rPr lang="en-GB" dirty="0" err="1"/>
+              <a:t>Johannesburg</a:t>
+            </a:r>
+            <a:r>
+              <a:rPr lang="en-GB" dirty="0"/>
+              <a:t> shows the clearest negative relationship between water and UTFVI, alongside strong positive effects from built-up areas and moderate cooling from vegetation.</a:t>
+            </a:r>
+          </a:p>
+          <a:p>
+            <a:r>
+              <a:rPr lang="en-GB" b="1" dirty="0"/>
+              <a:t>d) Kinshasa</a:t>
+            </a:r>
+            <a:br>
+              <a:rPr lang="en-GB" dirty="0"/>
+            </a:br>
+            <a:r>
+              <a:rPr lang="en-GB" dirty="0" err="1"/>
+              <a:t>Kinshasa</a:t>
+            </a:r>
+            <a:r>
+              <a:rPr lang="en-GB" dirty="0"/>
+              <a:t> demonstrates relatively flat trends, suggesting weaker associations overall, but built-up areas still slightly elevate UTFVI while vegetation and water have marginal cooling effects.</a:t>
+            </a:r>
+          </a:p>
+          <a:p>
+            <a:endParaRPr lang="nl-NL" dirty="0"/>
+          </a:p>
+        </p:txBody>
+      </p:sp>
+      <p:sp>
+        <p:nvSpPr>
+          <p:cNvPr id="4" name="Slide Number Placeholder 3"/>
+          <p:cNvSpPr>
+            <a:spLocks noGrp="1"/>
+          </p:cNvSpPr>
+          <p:nvPr>
+            <p:ph type="sldNum" sz="quarter" idx="5"/>
+          </p:nvPr>
+        </p:nvSpPr>
+        <p:spPr/>
+        <p:txBody>
+          <a:bodyPr/>
+          <a:lstStyle/>
+          <a:p>
+            <a:fld id="{CF211AA5-FF67-4171-A23C-F195C260B421}" type="slidenum">
+              <a:rPr lang="nl-NL" smtClean="0"/>
+              <a:t>11</a:t>
+            </a:fld>
+            <a:endParaRPr lang="nl-NL"/>
+          </a:p>
+        </p:txBody>
+      </p:sp>
+    </p:spTree>
+    <p:extLst>
+      <p:ext uri="{BB962C8B-B14F-4D97-AF65-F5344CB8AC3E}">
+        <p14:creationId xmlns:p14="http://schemas.microsoft.com/office/powerpoint/2010/main" val="370669545"/>
+      </p:ext>
+    </p:extLst>
+  </p:cSld>
+  <p:clrMapOvr>
+    <a:masterClrMapping/>
+  </p:clrMapOvr>
+</p:notes>
+</file>
+
 <file path=ppt/slideLayouts/slideLayout1.xml><?xml version="1.0" encoding="utf-8"?>
 <p:sldLayout xmlns:a="http://schemas.openxmlformats.org/drawingml/2006/main" xmlns:r="http://schemas.openxmlformats.org/officeDocument/2006/relationships" xmlns:p="http://schemas.openxmlformats.org/presentationml/2006/main" type="title" preserve="1">
   <p:cSld name="Title Slide">
@@ -271,7 +1646,7 @@
           <a:p>
             <a:fld id="{12C49015-4FBB-41D0-8620-221B27226985}" type="datetimeFigureOut">
               <a:rPr lang="nl-NL" smtClean="0"/>
-              <a:t>30-4-2025</a:t>
+              <a:t>2-5-2025</a:t>
             </a:fld>
             <a:endParaRPr lang="nl-NL"/>
           </a:p>
@@ -471,7 +1846,7 @@
           <a:p>
             <a:fld id="{12C49015-4FBB-41D0-8620-221B27226985}" type="datetimeFigureOut">
               <a:rPr lang="nl-NL" smtClean="0"/>
-              <a:t>30-4-2025</a:t>
+              <a:t>2-5-2025</a:t>
             </a:fld>
             <a:endParaRPr lang="nl-NL"/>
           </a:p>
@@ -681,7 +2056,7 @@
           <a:p>
             <a:fld id="{12C49015-4FBB-41D0-8620-221B27226985}" type="datetimeFigureOut">
               <a:rPr lang="nl-NL" smtClean="0"/>
-              <a:t>30-4-2025</a:t>
+              <a:t>2-5-2025</a:t>
             </a:fld>
             <a:endParaRPr lang="nl-NL"/>
           </a:p>
@@ -881,7 +2256,7 @@
           <a:p>
             <a:fld id="{12C49015-4FBB-41D0-8620-221B27226985}" type="datetimeFigureOut">
               <a:rPr lang="nl-NL" smtClean="0"/>
-              <a:t>30-4-2025</a:t>
+              <a:t>2-5-2025</a:t>
             </a:fld>
             <a:endParaRPr lang="nl-NL"/>
           </a:p>
@@ -1157,7 +2532,7 @@
           <a:p>
             <a:fld id="{12C49015-4FBB-41D0-8620-221B27226985}" type="datetimeFigureOut">
               <a:rPr lang="nl-NL" smtClean="0"/>
-              <a:t>30-4-2025</a:t>
+              <a:t>2-5-2025</a:t>
             </a:fld>
             <a:endParaRPr lang="nl-NL"/>
           </a:p>
@@ -1425,7 +2800,7 @@
           <a:p>
             <a:fld id="{12C49015-4FBB-41D0-8620-221B27226985}" type="datetimeFigureOut">
               <a:rPr lang="nl-NL" smtClean="0"/>
-              <a:t>30-4-2025</a:t>
+              <a:t>2-5-2025</a:t>
             </a:fld>
             <a:endParaRPr lang="nl-NL"/>
           </a:p>
@@ -1840,7 +3215,7 @@
           <a:p>
             <a:fld id="{12C49015-4FBB-41D0-8620-221B27226985}" type="datetimeFigureOut">
               <a:rPr lang="nl-NL" smtClean="0"/>
-              <a:t>30-4-2025</a:t>
+              <a:t>2-5-2025</a:t>
             </a:fld>
             <a:endParaRPr lang="nl-NL"/>
           </a:p>
@@ -1982,7 +3357,7 @@
           <a:p>
             <a:fld id="{12C49015-4FBB-41D0-8620-221B27226985}" type="datetimeFigureOut">
               <a:rPr lang="nl-NL" smtClean="0"/>
-              <a:t>30-4-2025</a:t>
+              <a:t>2-5-2025</a:t>
             </a:fld>
             <a:endParaRPr lang="nl-NL"/>
           </a:p>
@@ -2095,7 +3470,7 @@
           <a:p>
             <a:fld id="{12C49015-4FBB-41D0-8620-221B27226985}" type="datetimeFigureOut">
               <a:rPr lang="nl-NL" smtClean="0"/>
-              <a:t>30-4-2025</a:t>
+              <a:t>2-5-2025</a:t>
             </a:fld>
             <a:endParaRPr lang="nl-NL"/>
           </a:p>
@@ -2408,7 +3783,7 @@
           <a:p>
             <a:fld id="{12C49015-4FBB-41D0-8620-221B27226985}" type="datetimeFigureOut">
               <a:rPr lang="nl-NL" smtClean="0"/>
-              <a:t>30-4-2025</a:t>
+              <a:t>2-5-2025</a:t>
             </a:fld>
             <a:endParaRPr lang="nl-NL"/>
           </a:p>
@@ -2697,7 +4072,7 @@
           <a:p>
             <a:fld id="{12C49015-4FBB-41D0-8620-221B27226985}" type="datetimeFigureOut">
               <a:rPr lang="nl-NL" smtClean="0"/>
-              <a:t>30-4-2025</a:t>
+              <a:t>2-5-2025</a:t>
             </a:fld>
             <a:endParaRPr lang="nl-NL"/>
           </a:p>
@@ -2940,7 +4315,7 @@
           <a:p>
             <a:fld id="{12C49015-4FBB-41D0-8620-221B27226985}" type="datetimeFigureOut">
               <a:rPr lang="nl-NL" smtClean="0"/>
-              <a:t>30-4-2025</a:t>
+              <a:t>2-5-2025</a:t>
             </a:fld>
             <a:endParaRPr lang="nl-NL"/>
           </a:p>
@@ -3617,7 +4992,7 @@
             <p:nvPr/>
           </p:nvPicPr>
           <p:blipFill>
-            <a:blip r:embed="rId2"/>
+            <a:blip r:embed="rId3"/>
             <a:srcRect r="10632"/>
             <a:stretch/>
           </p:blipFill>
@@ -3646,7 +5021,7 @@
             <p:nvPr/>
           </p:nvPicPr>
           <p:blipFill>
-            <a:blip r:embed="rId2"/>
+            <a:blip r:embed="rId3"/>
             <a:srcRect l="89369" t="45185" b="45185"/>
             <a:stretch/>
           </p:blipFill>
@@ -3675,7 +5050,7 @@
             <p:nvPr/>
           </p:nvPicPr>
           <p:blipFill>
-            <a:blip r:embed="rId3"/>
+            <a:blip r:embed="rId4"/>
             <a:stretch>
               <a:fillRect/>
             </a:stretch>
@@ -3705,7 +5080,7 @@
             <p:nvPr/>
           </p:nvPicPr>
           <p:blipFill>
-            <a:blip r:embed="rId4"/>
+            <a:blip r:embed="rId5"/>
             <a:stretch>
               <a:fillRect/>
             </a:stretch>
@@ -4002,7 +5377,7 @@
             <p:nvPr/>
           </p:nvPicPr>
           <p:blipFill>
-            <a:blip r:embed="rId2"/>
+            <a:blip r:embed="rId3"/>
             <a:stretch>
               <a:fillRect/>
             </a:stretch>
@@ -4677,7 +6052,7 @@
             <p:nvPr/>
           </p:nvPicPr>
           <p:blipFill>
-            <a:blip r:embed="rId2"/>
+            <a:blip r:embed="rId3"/>
             <a:stretch>
               <a:fillRect/>
             </a:stretch>
@@ -4707,7 +6082,7 @@
             <p:nvPr/>
           </p:nvPicPr>
           <p:blipFill>
-            <a:blip r:embed="rId3"/>
+            <a:blip r:embed="rId4"/>
             <a:stretch>
               <a:fillRect/>
             </a:stretch>
@@ -4737,7 +6112,7 @@
             <p:nvPr/>
           </p:nvPicPr>
           <p:blipFill>
-            <a:blip r:embed="rId4"/>
+            <a:blip r:embed="rId5"/>
             <a:stretch>
               <a:fillRect/>
             </a:stretch>
@@ -4767,7 +6142,7 @@
             <p:nvPr/>
           </p:nvPicPr>
           <p:blipFill>
-            <a:blip r:embed="rId5"/>
+            <a:blip r:embed="rId6"/>
             <a:stretch>
               <a:fillRect/>
             </a:stretch>
@@ -5247,7 +6622,7 @@
             <p:nvPr/>
           </p:nvPicPr>
           <p:blipFill>
-            <a:blip r:embed="rId2">
+            <a:blip r:embed="rId3">
               <a:extLst>
                 <a:ext uri="{28A0092B-C50C-407E-A947-70E740481C1C}">
                   <a14:useLocalDpi xmlns:a14="http://schemas.microsoft.com/office/drawing/2010/main" val="0"/>
@@ -5283,7 +6658,7 @@
             <p:nvPr/>
           </p:nvPicPr>
           <p:blipFill>
-            <a:blip r:embed="rId3">
+            <a:blip r:embed="rId4">
               <a:extLst>
                 <a:ext uri="{28A0092B-C50C-407E-A947-70E740481C1C}">
                   <a14:useLocalDpi xmlns:a14="http://schemas.microsoft.com/office/drawing/2010/main" val="0"/>
@@ -5319,7 +6694,7 @@
             <p:nvPr/>
           </p:nvPicPr>
           <p:blipFill>
-            <a:blip r:embed="rId4"/>
+            <a:blip r:embed="rId5"/>
             <a:stretch>
               <a:fillRect/>
             </a:stretch>
@@ -5349,7 +6724,7 @@
             <p:nvPr/>
           </p:nvPicPr>
           <p:blipFill>
-            <a:blip r:embed="rId5"/>
+            <a:blip r:embed="rId6"/>
             <a:stretch>
               <a:fillRect/>
             </a:stretch>
@@ -5574,7 +6949,7 @@
             <p:nvPr/>
           </p:nvPicPr>
           <p:blipFill>
-            <a:blip r:embed="rId2"/>
+            <a:blip r:embed="rId3"/>
             <a:stretch>
               <a:fillRect/>
             </a:stretch>
@@ -5604,7 +6979,7 @@
             <p:nvPr/>
           </p:nvPicPr>
           <p:blipFill>
-            <a:blip r:embed="rId3"/>
+            <a:blip r:embed="rId4"/>
             <a:stretch>
               <a:fillRect/>
             </a:stretch>
@@ -5634,7 +7009,7 @@
             <p:nvPr/>
           </p:nvPicPr>
           <p:blipFill>
-            <a:blip r:embed="rId4"/>
+            <a:blip r:embed="rId5"/>
             <a:stretch>
               <a:fillRect/>
             </a:stretch>
@@ -5664,7 +7039,7 @@
             <p:nvPr/>
           </p:nvPicPr>
           <p:blipFill>
-            <a:blip r:embed="rId5"/>
+            <a:blip r:embed="rId6"/>
             <a:stretch>
               <a:fillRect/>
             </a:stretch>
@@ -5889,7 +7264,7 @@
             <p:nvPr/>
           </p:nvPicPr>
           <p:blipFill>
-            <a:blip r:embed="rId2"/>
+            <a:blip r:embed="rId3"/>
             <a:srcRect r="9895"/>
             <a:stretch/>
           </p:blipFill>
@@ -5918,7 +7293,7 @@
             <p:nvPr/>
           </p:nvPicPr>
           <p:blipFill>
-            <a:blip r:embed="rId2"/>
+            <a:blip r:embed="rId3"/>
             <a:srcRect l="90462" t="43851" b="42815"/>
             <a:stretch/>
           </p:blipFill>
@@ -6142,7 +7517,7 @@
             <p:nvPr/>
           </p:nvPicPr>
           <p:blipFill>
-            <a:blip r:embed="rId2"/>
+            <a:blip r:embed="rId3"/>
             <a:stretch>
               <a:fillRect/>
             </a:stretch>
@@ -6172,7 +7547,7 @@
             <p:nvPr/>
           </p:nvPicPr>
           <p:blipFill>
-            <a:blip r:embed="rId3"/>
+            <a:blip r:embed="rId4"/>
             <a:stretch>
               <a:fillRect/>
             </a:stretch>
@@ -6202,7 +7577,7 @@
             <p:nvPr/>
           </p:nvPicPr>
           <p:blipFill>
-            <a:blip r:embed="rId4"/>
+            <a:blip r:embed="rId5"/>
             <a:stretch>
               <a:fillRect/>
             </a:stretch>
@@ -6652,4 +8027,319 @@
     </a:ext>
   </a:extLst>
 </a:theme>
+</file>
+
+<file path=ppt/theme/theme2.xml><?xml version="1.0" encoding="utf-8"?>
+<a:theme xmlns:a="http://schemas.openxmlformats.org/drawingml/2006/main" name="Office Theme">
+  <a:themeElements>
+    <a:clrScheme name="Office">
+      <a:dk1>
+        <a:sysClr val="windowText" lastClr="000000"/>
+      </a:dk1>
+      <a:lt1>
+        <a:sysClr val="window" lastClr="FFFFFF"/>
+      </a:lt1>
+      <a:dk2>
+        <a:srgbClr val="0E2841"/>
+      </a:dk2>
+      <a:lt2>
+        <a:srgbClr val="E8E8E8"/>
+      </a:lt2>
+      <a:accent1>
+        <a:srgbClr val="156082"/>
+      </a:accent1>
+      <a:accent2>
+        <a:srgbClr val="E97132"/>
+      </a:accent2>
+      <a:accent3>
+        <a:srgbClr val="196B24"/>
+      </a:accent3>
+      <a:accent4>
+        <a:srgbClr val="0F9ED5"/>
+      </a:accent4>
+      <a:accent5>
+        <a:srgbClr val="A02B93"/>
+      </a:accent5>
+      <a:accent6>
+        <a:srgbClr val="4EA72E"/>
+      </a:accent6>
+      <a:hlink>
+        <a:srgbClr val="467886"/>
+      </a:hlink>
+      <a:folHlink>
+        <a:srgbClr val="96607D"/>
+      </a:folHlink>
+    </a:clrScheme>
+    <a:fontScheme name="Office">
+      <a:majorFont>
+        <a:latin typeface="Aptos Display" panose="02110004020202020204"/>
+        <a:ea typeface=""/>
+        <a:cs typeface=""/>
+        <a:font script="Jpan" typeface="游ゴシック Light"/>
+        <a:font script="Hang" typeface="맑은 고딕"/>
+        <a:font script="Hans" typeface="等线 Light"/>
+        <a:font script="Hant" typeface="新細明體"/>
+        <a:font script="Arab" typeface="Times New Roman"/>
+        <a:font script="Hebr" typeface="Times New Roman"/>
+        <a:font script="Thai" typeface="Angsana New"/>
+        <a:font script="Ethi" typeface="Nyala"/>
+        <a:font script="Beng" typeface="Vrinda"/>
+        <a:font script="Gujr" typeface="Shruti"/>
+        <a:font script="Khmr" typeface="MoolBoran"/>
+        <a:font script="Knda" typeface="Tunga"/>
+        <a:font script="Guru" typeface="Raavi"/>
+        <a:font script="Cans" typeface="Euphemia"/>
+        <a:font script="Cher" typeface="Plantagenet Cherokee"/>
+        <a:font script="Yiii" typeface="Microsoft Yi Baiti"/>
+        <a:font script="Tibt" typeface="Microsoft Himalaya"/>
+        <a:font script="Thaa" typeface="MV Boli"/>
+        <a:font script="Deva" typeface="Mangal"/>
+        <a:font script="Telu" typeface="Gautami"/>
+        <a:font script="Taml" typeface="Latha"/>
+        <a:font script="Syrc" typeface="Estrangelo Edessa"/>
+        <a:font script="Orya" typeface="Kalinga"/>
+        <a:font script="Mlym" typeface="Kartika"/>
+        <a:font script="Laoo" typeface="DokChampa"/>
+        <a:font script="Sinh" typeface="Iskoola Pota"/>
+        <a:font script="Mong" typeface="Mongolian Baiti"/>
+        <a:font script="Viet" typeface="Times New Roman"/>
+        <a:font script="Uigh" typeface="Microsoft Uighur"/>
+        <a:font script="Geor" typeface="Sylfaen"/>
+        <a:font script="Armn" typeface="Arial"/>
+        <a:font script="Bugi" typeface="Leelawadee UI"/>
+        <a:font script="Bopo" typeface="Microsoft JhengHei"/>
+        <a:font script="Java" typeface="Javanese Text"/>
+        <a:font script="Lisu" typeface="Segoe UI"/>
+        <a:font script="Mymr" typeface="Myanmar Text"/>
+        <a:font script="Nkoo" typeface="Ebrima"/>
+        <a:font script="Olck" typeface="Nirmala UI"/>
+        <a:font script="Osma" typeface="Ebrima"/>
+        <a:font script="Phag" typeface="Phagspa"/>
+        <a:font script="Syrn" typeface="Estrangelo Edessa"/>
+        <a:font script="Syrj" typeface="Estrangelo Edessa"/>
+        <a:font script="Syre" typeface="Estrangelo Edessa"/>
+        <a:font script="Sora" typeface="Nirmala UI"/>
+        <a:font script="Tale" typeface="Microsoft Tai Le"/>
+        <a:font script="Talu" typeface="Microsoft New Tai Lue"/>
+        <a:font script="Tfng" typeface="Ebrima"/>
+      </a:majorFont>
+      <a:minorFont>
+        <a:latin typeface="Aptos" panose="02110004020202020204"/>
+        <a:ea typeface=""/>
+        <a:cs typeface=""/>
+        <a:font script="Jpan" typeface="游ゴシック"/>
+        <a:font script="Hang" typeface="맑은 고딕"/>
+        <a:font script="Hans" typeface="等线"/>
+        <a:font script="Hant" typeface="新細明體"/>
+        <a:font script="Arab" typeface="Arial"/>
+        <a:font script="Hebr" typeface="Arial"/>
+        <a:font script="Thai" typeface="Cordia New"/>
+        <a:font script="Ethi" typeface="Nyala"/>
+        <a:font script="Beng" typeface="Vrinda"/>
+        <a:font script="Gujr" typeface="Shruti"/>
+        <a:font script="Khmr" typeface="DaunPenh"/>
+        <a:font script="Knda" typeface="Tunga"/>
+        <a:font script="Guru" typeface="Raavi"/>
+        <a:font script="Cans" typeface="Euphemia"/>
+        <a:font script="Cher" typeface="Plantagenet Cherokee"/>
+        <a:font script="Yiii" typeface="Microsoft Yi Baiti"/>
+        <a:font script="Tibt" typeface="Microsoft Himalaya"/>
+        <a:font script="Thaa" typeface="MV Boli"/>
+        <a:font script="Deva" typeface="Mangal"/>
+        <a:font script="Telu" typeface="Gautami"/>
+        <a:font script="Taml" typeface="Latha"/>
+        <a:font script="Syrc" typeface="Estrangelo Edessa"/>
+        <a:font script="Orya" typeface="Kalinga"/>
+        <a:font script="Mlym" typeface="Kartika"/>
+        <a:font script="Laoo" typeface="DokChampa"/>
+        <a:font script="Sinh" typeface="Iskoola Pota"/>
+        <a:font script="Mong" typeface="Mongolian Baiti"/>
+        <a:font script="Viet" typeface="Arial"/>
+        <a:font script="Uigh" typeface="Microsoft Uighur"/>
+        <a:font script="Geor" typeface="Sylfaen"/>
+        <a:font script="Armn" typeface="Arial"/>
+        <a:font script="Bugi" typeface="Leelawadee UI"/>
+        <a:font script="Bopo" typeface="Microsoft JhengHei"/>
+        <a:font script="Java" typeface="Javanese Text"/>
+        <a:font script="Lisu" typeface="Segoe UI"/>
+        <a:font script="Mymr" typeface="Myanmar Text"/>
+        <a:font script="Nkoo" typeface="Ebrima"/>
+        <a:font script="Olck" typeface="Nirmala UI"/>
+        <a:font script="Osma" typeface="Ebrima"/>
+        <a:font script="Phag" typeface="Phagspa"/>
+        <a:font script="Syrn" typeface="Estrangelo Edessa"/>
+        <a:font script="Syrj" typeface="Estrangelo Edessa"/>
+        <a:font script="Syre" typeface="Estrangelo Edessa"/>
+        <a:font script="Sora" typeface="Nirmala UI"/>
+        <a:font script="Tale" typeface="Microsoft Tai Le"/>
+        <a:font script="Talu" typeface="Microsoft New Tai Lue"/>
+        <a:font script="Tfng" typeface="Ebrima"/>
+      </a:minorFont>
+    </a:fontScheme>
+    <a:fmtScheme name="Office">
+      <a:fillStyleLst>
+        <a:solidFill>
+          <a:schemeClr val="phClr"/>
+        </a:solidFill>
+        <a:gradFill rotWithShape="1">
+          <a:gsLst>
+            <a:gs pos="0">
+              <a:schemeClr val="phClr">
+                <a:lumMod val="110000"/>
+                <a:satMod val="105000"/>
+                <a:tint val="67000"/>
+              </a:schemeClr>
+            </a:gs>
+            <a:gs pos="50000">
+              <a:schemeClr val="phClr">
+                <a:lumMod val="105000"/>
+                <a:satMod val="103000"/>
+                <a:tint val="73000"/>
+              </a:schemeClr>
+            </a:gs>
+            <a:gs pos="100000">
+              <a:schemeClr val="phClr">
+                <a:lumMod val="105000"/>
+                <a:satMod val="109000"/>
+                <a:tint val="81000"/>
+              </a:schemeClr>
+            </a:gs>
+          </a:gsLst>
+          <a:lin ang="5400000" scaled="0"/>
+        </a:gradFill>
+        <a:gradFill rotWithShape="1">
+          <a:gsLst>
+            <a:gs pos="0">
+              <a:schemeClr val="phClr">
+                <a:satMod val="103000"/>
+                <a:lumMod val="102000"/>
+                <a:tint val="94000"/>
+              </a:schemeClr>
+            </a:gs>
+            <a:gs pos="50000">
+              <a:schemeClr val="phClr">
+                <a:satMod val="110000"/>
+                <a:lumMod val="100000"/>
+                <a:shade val="100000"/>
+              </a:schemeClr>
+            </a:gs>
+            <a:gs pos="100000">
+              <a:schemeClr val="phClr">
+                <a:lumMod val="99000"/>
+                <a:satMod val="120000"/>
+                <a:shade val="78000"/>
+              </a:schemeClr>
+            </a:gs>
+          </a:gsLst>
+          <a:lin ang="5400000" scaled="0"/>
+        </a:gradFill>
+      </a:fillStyleLst>
+      <a:lnStyleLst>
+        <a:ln w="12700" cap="flat" cmpd="sng" algn="ctr">
+          <a:solidFill>
+            <a:schemeClr val="phClr"/>
+          </a:solidFill>
+          <a:prstDash val="solid"/>
+          <a:miter lim="800000"/>
+        </a:ln>
+        <a:ln w="19050" cap="flat" cmpd="sng" algn="ctr">
+          <a:solidFill>
+            <a:schemeClr val="phClr"/>
+          </a:solidFill>
+          <a:prstDash val="solid"/>
+          <a:miter lim="800000"/>
+        </a:ln>
+        <a:ln w="25400" cap="flat" cmpd="sng" algn="ctr">
+          <a:solidFill>
+            <a:schemeClr val="phClr"/>
+          </a:solidFill>
+          <a:prstDash val="solid"/>
+          <a:miter lim="800000"/>
+        </a:ln>
+      </a:lnStyleLst>
+      <a:effectStyleLst>
+        <a:effectStyle>
+          <a:effectLst/>
+        </a:effectStyle>
+        <a:effectStyle>
+          <a:effectLst/>
+        </a:effectStyle>
+        <a:effectStyle>
+          <a:effectLst>
+            <a:outerShdw blurRad="57150" dist="19050" dir="5400000" algn="ctr" rotWithShape="0">
+              <a:srgbClr val="000000">
+                <a:alpha val="63000"/>
+              </a:srgbClr>
+            </a:outerShdw>
+          </a:effectLst>
+        </a:effectStyle>
+      </a:effectStyleLst>
+      <a:bgFillStyleLst>
+        <a:solidFill>
+          <a:schemeClr val="phClr"/>
+        </a:solidFill>
+        <a:solidFill>
+          <a:schemeClr val="phClr">
+            <a:tint val="95000"/>
+            <a:satMod val="170000"/>
+          </a:schemeClr>
+        </a:solidFill>
+        <a:gradFill rotWithShape="1">
+          <a:gsLst>
+            <a:gs pos="0">
+              <a:schemeClr val="phClr">
+                <a:tint val="93000"/>
+                <a:satMod val="150000"/>
+                <a:shade val="98000"/>
+                <a:lumMod val="102000"/>
+              </a:schemeClr>
+            </a:gs>
+            <a:gs pos="50000">
+              <a:schemeClr val="phClr">
+                <a:tint val="98000"/>
+                <a:satMod val="130000"/>
+                <a:shade val="90000"/>
+                <a:lumMod val="103000"/>
+              </a:schemeClr>
+            </a:gs>
+            <a:gs pos="100000">
+              <a:schemeClr val="phClr">
+                <a:shade val="63000"/>
+                <a:satMod val="120000"/>
+              </a:schemeClr>
+            </a:gs>
+          </a:gsLst>
+          <a:lin ang="5400000" scaled="0"/>
+        </a:gradFill>
+      </a:bgFillStyleLst>
+    </a:fmtScheme>
+  </a:themeElements>
+  <a:objectDefaults>
+    <a:lnDef>
+      <a:spPr/>
+      <a:bodyPr/>
+      <a:lstStyle/>
+      <a:style>
+        <a:lnRef idx="2">
+          <a:schemeClr val="accent1"/>
+        </a:lnRef>
+        <a:fillRef idx="0">
+          <a:schemeClr val="accent1"/>
+        </a:fillRef>
+        <a:effectRef idx="1">
+          <a:schemeClr val="accent1"/>
+        </a:effectRef>
+        <a:fontRef idx="minor">
+          <a:schemeClr val="tx1"/>
+        </a:fontRef>
+      </a:style>
+    </a:lnDef>
+  </a:objectDefaults>
+  <a:extraClrSchemeLst/>
+  <a:extLst>
+    <a:ext uri="{05A4C25C-085E-4340-85A3-A5531E510DB2}">
+      <thm15:themeFamily xmlns:thm15="http://schemas.microsoft.com/office/thememl/2012/main" name="Office Theme" id="{2E142A2C-CD16-42D6-873A-C26D2A0506FA}" vid="{1BDDFF52-6CD6-40A5-AB3C-68EB2F1E4D0A}"/>
+    </a:ext>
+  </a:extLst>
+</a:theme>
 </file>